--- a/deck/pavilion-workshop.pptx
+++ b/deck/pavilion-workshop.pptx
@@ -1459,7 +1459,7 @@
           <a:lstStyle/>
           <a:p>
             <a:r>
-              <a:t>Modes = reuse. One test, many contexts.</a:t>
+              <a:t>Modes = reuse. One test, many contexts. Here the same test flips FAIL→PASS purely because the mode overrode a value — no edit to the test itself.</a:t>
             </a:r>
           </a:p>
         </p:txBody>
@@ -1529,7 +1529,7 @@
           <a:lstStyle/>
           <a:p>
             <a:r>
-              <a:t>A mode is tiny — here it overrides one variable. Modes can also swap queues, bump resources, toggle features. No test edits required.</a:t>
+              <a:t>The test evaluates throughput_mbs &gt; 1300. Base value 1200 fails it. The prod mode overrides only that variable to 1400, so the same test now passes — no edit to the test.</a:t>
             </a:r>
           </a:p>
         </p:txBody>
@@ -1599,7 +1599,7 @@
           <a:lstStyle/>
           <a:p>
             <a:r>
-              <a:t>The label result is the proof — a plain run parses 'default', the prod mode merges env_label: production on top. Modes merge onto the fully-resolved test.</a:t>
+              <a:t>The result is the proof: base throughput 1200 fails the &gt; 1300 check; the prod mode overrides the value to 1400 and the identical test now passes. Both ran through PBS (qstat).</a:t>
             </a:r>
           </a:p>
         </p:txBody>
@@ -12037,7 +12037,7 @@
                 </a:solidFill>
                 <a:latin typeface="Arial"/>
               </a:rPr>
-              <a:t>•  Our demo: a `prod` mode overrides a variable (env_label: default → production).</a:t>
+              <a:t>•  Our demo: the test fails at throughput 1200; a `prod` mode raises it to 1400 → it passes.</a:t>
             </a:r>
           </a:p>
         </p:txBody>
@@ -12123,7 +12123,7 @@
                 </a:solidFill>
                 <a:latin typeface="Arial"/>
               </a:rPr>
-              <a:t>A mode file</a:t>
+              <a:t>The test, and a mode that changes its outcome</a:t>
             </a:r>
           </a:p>
         </p:txBody>
@@ -12200,7 +12200,7 @@
                 </a:solidFill>
                 <a:latin typeface="Arial"/>
               </a:rPr>
-              <a:t>prod.yaml — just the config keys you want merged on top of a resolved test.</a:t>
+              <a:t>The test measures throughput and requires &gt; 1300. Base is 1200 (FAIL); the mode raises it.</a:t>
             </a:r>
           </a:p>
         </p:txBody>
@@ -12214,7 +12214,7 @@
         <p:spPr>
           <a:xfrm>
             <a:off x="640080" y="2148840"/>
-            <a:ext cx="10972800" cy="4206240"/>
+            <a:ext cx="10972800" cy="4846320"/>
           </a:xfrm>
           <a:prstGeom prst="rect">
             <a:avLst/>
@@ -12248,31 +12248,187 @@
           <a:p>
             <a:pPr algn="l"/>
             <a:r>
-              <a:rPr sz="1400" b="0">
+              <a:rPr sz="1300" b="0">
                 <a:solidFill>
                   <a:srgbClr val="5B6674"/>
                 </a:solidFill>
                 <a:latin typeface="Consolas"/>
               </a:rPr>
-              <a:t># config/modes/prod.yaml</a:t>
-            </a:r>
-          </a:p>
-          <a:p>
-            <a:pPr algn="l"/>
-            <a:r>
-              <a:rPr sz="1400" b="0">
+              <a:t># config/suites/demo_modes.yaml   (the test)</a:t>
+            </a:r>
+          </a:p>
+          <a:p>
+            <a:pPr algn="l"/>
+            <a:r>
+              <a:rPr sz="1300" b="0">
+                <a:solidFill>
+                  <a:srgbClr val="1B2B34"/>
+                </a:solidFill>
+                <a:latin typeface="Consolas"/>
+              </a:rPr>
+              <a:t>mode_demo:</a:t>
+            </a:r>
+          </a:p>
+          <a:p>
+            <a:pPr algn="l"/>
+            <a:r>
+              <a:rPr sz="1300" b="0">
+                <a:solidFill>
+                  <a:srgbClr val="1B2B34"/>
+                </a:solidFill>
+                <a:latin typeface="Consolas"/>
+              </a:rPr>
+              <a:t>  variables:</a:t>
+            </a:r>
+          </a:p>
+          <a:p>
+            <a:pPr algn="l"/>
+            <a:r>
+              <a:rPr sz="1300" b="0">
+                <a:solidFill>
+                  <a:srgbClr val="1B2B34"/>
+                </a:solidFill>
+                <a:latin typeface="Consolas"/>
+              </a:rPr>
+              <a:t>    throughput: 1200</a:t>
+            </a:r>
+          </a:p>
+          <a:p>
+            <a:pPr algn="l"/>
+            <a:r>
+              <a:rPr sz="1300" b="0">
+                <a:solidFill>
+                  <a:srgbClr val="1B2B34"/>
+                </a:solidFill>
+                <a:latin typeface="Consolas"/>
+              </a:rPr>
+              <a:t>  run:</a:t>
+            </a:r>
+          </a:p>
+          <a:p>
+            <a:pPr algn="l"/>
+            <a:r>
+              <a:rPr sz="1300" b="0">
+                <a:solidFill>
+                  <a:srgbClr val="1B2B34"/>
+                </a:solidFill>
+                <a:latin typeface="Consolas"/>
+              </a:rPr>
+              <a:t>    cmds:</a:t>
+            </a:r>
+          </a:p>
+          <a:p>
+            <a:pPr algn="l"/>
+            <a:r>
+              <a:rPr sz="1300" b="0">
+                <a:solidFill>
+                  <a:srgbClr val="1B2B34"/>
+                </a:solidFill>
+                <a:latin typeface="Consolas"/>
+              </a:rPr>
+              <a:t>      - 'echo "throughput {{throughput}}"'</a:t>
+            </a:r>
+          </a:p>
+          <a:p>
+            <a:pPr algn="l"/>
+            <a:r>
+              <a:rPr sz="1300" b="0">
+                <a:solidFill>
+                  <a:srgbClr val="1B2B34"/>
+                </a:solidFill>
+                <a:latin typeface="Consolas"/>
+              </a:rPr>
+              <a:t>  result_parse:</a:t>
+            </a:r>
+          </a:p>
+          <a:p>
+            <a:pPr algn="l"/>
+            <a:r>
+              <a:rPr sz="1300" b="0">
+                <a:solidFill>
+                  <a:srgbClr val="1B2B34"/>
+                </a:solidFill>
+                <a:latin typeface="Consolas"/>
+              </a:rPr>
+              <a:t>    regex:</a:t>
+            </a:r>
+          </a:p>
+          <a:p>
+            <a:pPr algn="l"/>
+            <a:r>
+              <a:rPr sz="1300" b="0">
+                <a:solidFill>
+                  <a:srgbClr val="1B2B34"/>
+                </a:solidFill>
+                <a:latin typeface="Consolas"/>
+              </a:rPr>
+              <a:t>      throughput_mbs:</a:t>
+            </a:r>
+          </a:p>
+          <a:p>
+            <a:pPr algn="l"/>
+            <a:r>
+              <a:rPr sz="1300" b="0">
+                <a:solidFill>
+                  <a:srgbClr val="1B2B34"/>
+                </a:solidFill>
+                <a:latin typeface="Consolas"/>
+              </a:rPr>
+              <a:t>        regex: 'throughput (\S+)'</a:t>
+            </a:r>
+          </a:p>
+          <a:p>
+            <a:pPr algn="l"/>
+            <a:r>
+              <a:rPr sz="1300" b="0">
+                <a:solidFill>
+                  <a:srgbClr val="1B2B34"/>
+                </a:solidFill>
+                <a:latin typeface="Consolas"/>
+              </a:rPr>
+              <a:t>  result_evaluate:</a:t>
+            </a:r>
+          </a:p>
+          <a:p>
+            <a:pPr algn="l"/>
+            <a:r>
+              <a:rPr sz="1300" b="0">
+                <a:solidFill>
+                  <a:srgbClr val="1B2B34"/>
+                </a:solidFill>
+                <a:latin typeface="Consolas"/>
+              </a:rPr>
+              <a:t>    result: 'throughput_mbs &gt; 1300'      # PASS only if above 1300</a:t>
+            </a:r>
+          </a:p>
+          <a:p>
+            <a:pPr algn="l"/>
+            <a:r>
+              <a:rPr sz="1300" b="0">
+                <a:solidFill>
+                  <a:srgbClr val="1B2B34"/>
+                </a:solidFill>
+                <a:latin typeface="Consolas"/>
+              </a:rPr>
+              <a:t> </a:t>
+            </a:r>
+          </a:p>
+          <a:p>
+            <a:pPr algn="l"/>
+            <a:r>
+              <a:rPr sz="1300" b="0">
                 <a:solidFill>
                   <a:srgbClr val="5B6674"/>
                 </a:solidFill>
                 <a:latin typeface="Consolas"/>
               </a:rPr>
-              <a:t># Apply with:  pav run -m prod &lt;test&gt;</a:t>
-            </a:r>
-          </a:p>
-          <a:p>
-            <a:pPr algn="l"/>
-            <a:r>
-              <a:rPr sz="1400" b="0">
+              <a:t># config/modes/prod.yaml   (the mode overlay)</a:t>
+            </a:r>
+          </a:p>
+          <a:p>
+            <a:pPr algn="l"/>
+            <a:r>
+              <a:rPr sz="1300" b="0">
                 <a:solidFill>
                   <a:srgbClr val="1B2B34"/>
                 </a:solidFill>
@@ -12284,13 +12440,13 @@
           <a:p>
             <a:pPr algn="l"/>
             <a:r>
-              <a:rPr sz="1400" b="0">
-                <a:solidFill>
-                  <a:srgbClr val="1B2B34"/>
-                </a:solidFill>
-                <a:latin typeface="Consolas"/>
-              </a:rPr>
-              <a:t>  env_label: 'production'</a:t>
+              <a:rPr sz="1300" b="0">
+                <a:solidFill>
+                  <a:srgbClr val="1B2B34"/>
+                </a:solidFill>
+                <a:latin typeface="Consolas"/>
+              </a:rPr>
+              <a:t>  throughput: 1400                        # override 1200 -&gt; 1400</a:t>
             </a:r>
           </a:p>
         </p:txBody>
@@ -12624,7 +12780,7 @@
                 </a:solidFill>
                 <a:latin typeface="Arial"/>
               </a:rPr>
-              <a:t>A mode overrides config</a:t>
+              <a:t>A mode flips FAIL → PASS</a:t>
             </a:r>
           </a:p>
         </p:txBody>
@@ -12773,7 +12929,7 @@
                 </a:solidFill>
                 <a:latin typeface="Consolas"/>
               </a:rPr>
-              <a:t>$ pav run -m prod demo_modes.mode_demo    # apply the prod overlay</a:t>
+              <a:t>$ pav run demo_modes.mode_demo           # base: throughput = 1200</a:t>
             </a:r>
           </a:p>
           <a:p>
@@ -12785,7 +12941,7 @@
                 </a:solidFill>
                 <a:latin typeface="Consolas"/>
               </a:rPr>
-              <a:t>sid: s73</a:t>
+              <a:t>  'throughput_mbs': 1200,</a:t>
             </a:r>
           </a:p>
           <a:p>
@@ -12793,11 +12949,11 @@
             <a:r>
               <a:rPr sz="1250" b="0">
                 <a:solidFill>
-                  <a:srgbClr val="1B2B34"/>
-                </a:solidFill>
-                <a:latin typeface="Consolas"/>
-              </a:rPr>
-              <a:t>tests: 1</a:t>
+                  <a:srgbClr val="B32A2A"/>
+                </a:solidFill>
+                <a:latin typeface="Consolas"/>
+              </a:rPr>
+              <a:t>  'result': 'FAIL'          # 1200 &gt; 1300 is false</a:t>
             </a:r>
           </a:p>
           <a:p>
@@ -12821,7 +12977,7 @@
                 </a:solidFill>
                 <a:latin typeface="Consolas"/>
               </a:rPr>
-              <a:t>$ qstat -a                                # dispatched to PBS</a:t>
+              <a:t>$ qstat -a                                # a real PBS job</a:t>
             </a:r>
           </a:p>
           <a:p>
@@ -12833,7 +12989,7 @@
                 </a:solidFill>
                 <a:latin typeface="Consolas"/>
               </a:rPr>
-              <a:t>8386.pbs-server pavilion workq pav_demo_*  1  1  R</a:t>
+              <a:t>8407.pbs-server pavilion workq pav_demo_*  1  1  R</a:t>
             </a:r>
           </a:p>
           <a:p>
@@ -12857,7 +13013,7 @@
                 </a:solidFill>
                 <a:latin typeface="Consolas"/>
               </a:rPr>
-              <a:t>$ pav results --full s73</a:t>
+              <a:t>$ pav run -m prod demo_modes.mode_demo    # prod overrides -&gt; throughput = 1400</a:t>
             </a:r>
           </a:p>
           <a:p>
@@ -12869,7 +13025,7 @@
                 </a:solidFill>
                 <a:latin typeface="Consolas"/>
               </a:rPr>
-              <a:t>  'name': 'demo_modes.mode_demo',</a:t>
+              <a:t>  'throughput_mbs': 1400,</a:t>
             </a:r>
           </a:p>
           <a:p>
@@ -12877,23 +13033,11 @@
             <a:r>
               <a:rPr sz="1250" b="0">
                 <a:solidFill>
-                  <a:srgbClr val="1B2B34"/>
-                </a:solidFill>
-                <a:latin typeface="Consolas"/>
-              </a:rPr>
-              <a:t>  'label': 'production',</a:t>
-            </a:r>
-          </a:p>
-          <a:p>
-            <a:pPr algn="l"/>
-            <a:r>
-              <a:rPr sz="1250" b="0">
-                <a:solidFill>
-                  <a:srgbClr val="1B2B34"/>
-                </a:solidFill>
-                <a:latin typeface="Consolas"/>
-              </a:rPr>
-              <a:t>  'var': {'env_label': 'production'}</a:t>
+                  <a:srgbClr val="1E7D3C"/>
+                </a:solidFill>
+                <a:latin typeface="Consolas"/>
+              </a:rPr>
+              <a:t>  'result': 'PASS'          # 1400 &gt; 1300 is true</a:t>
             </a:r>
           </a:p>
         </p:txBody>
@@ -12927,7 +13071,7 @@
                 </a:solidFill>
                 <a:latin typeface="Arial"/>
               </a:rPr>
-              <a:t>Plain, env_label is 'default'; with `-m prod` the overlay flips it to 'production'.</a:t>
+              <a:t>Same test, no edits — the prod mode raised throughput past the 1300 threshold, flipping FAIL → PASS.</a:t>
             </a:r>
           </a:p>
         </p:txBody>

--- a/deck/pavilion-workshop.pptx
+++ b/deck/pavilion-workshop.pptx
@@ -2299,7 +2299,7 @@
           <a:lstStyle/>
           <a:p>
             <a:r>
-              <a:t>saLog is a logger specific to us (NASA/NOAA). Pavilion's sa_log result plugin invokes it as nodes are released from the PBS job — one CSV row per node, with the test result. It writes node(s), content (result), user, and the 'released' action.</a:t>
+              <a:t>saLog is a logger specific to us (NASA/NOAA). The test uses a per_file: name parser so each node's result is recorded; Pavilion's sa_log plugin then invokes saLog once per node with the 'released' action, writing node, content (result), user, action to the CSV.</a:t>
             </a:r>
           </a:p>
         </p:txBody>
@@ -16473,7 +16473,7 @@
                 </a:solidFill>
                 <a:latin typeface="Consolas"/>
               </a:rPr>
-              <a:t>$ pav run demo_pbs.pass demo_pbs.fail    # 1. run in Pavilion</a:t>
+              <a:t>$ pav run demo_pbs.salog                 # 1. run in Pavilion (per_file: name)</a:t>
             </a:r>
           </a:p>
           <a:p>
@@ -16485,7 +16485,7 @@
                 </a:solidFill>
                 <a:latin typeface="Consolas"/>
               </a:rPr>
-              <a:t>sid: s70</a:t>
+              <a:t>sid: s141</a:t>
             </a:r>
           </a:p>
           <a:p>
@@ -16497,7 +16497,7 @@
                 </a:solidFill>
                 <a:latin typeface="Consolas"/>
               </a:rPr>
-              <a:t>tests: 2</a:t>
+              <a:t>tests: 1</a:t>
             </a:r>
           </a:p>
           <a:p>
@@ -16521,7 +16521,7 @@
                 </a:solidFill>
                 <a:latin typeface="Consolas"/>
               </a:rPr>
-              <a:t>$ qstat -a                               # 2. the jobs, running in PBS</a:t>
+              <a:t>$ qstat -a                               # 2. the job, running in PBS</a:t>
             </a:r>
           </a:p>
           <a:p>
@@ -16533,7 +16533,7 @@
                 </a:solidFill>
                 <a:latin typeface="Consolas"/>
               </a:rPr>
-              <a:t>8383.pbs-server pavilion workq pav_demo_*  1  1  R</a:t>
+              <a:t>8410.pbs-server pavilion workq pav_demo_*  1  1  R</a:t>
             </a:r>
           </a:p>
           <a:p>
@@ -16557,7 +16557,7 @@
                 </a:solidFill>
                 <a:latin typeface="Consolas"/>
               </a:rPr>
-              <a:t>$ tail salog_output.txt                  # 3. the CSV saLog wrote on release</a:t>
+              <a:t>$ tail salog_output.txt                  # 3. the CSV the sa_log plugin wrote on release</a:t>
             </a:r>
           </a:p>
           <a:p>
@@ -16569,19 +16569,7 @@
                 </a:solidFill>
                 <a:latin typeface="Consolas"/>
               </a:rPr>
-              <a:t>x1003c7s7b0n3,"pav_test result=PASS",pavilion,released</a:t>
-            </a:r>
-          </a:p>
-          <a:p>
-            <a:pPr algn="l"/>
-            <a:r>
-              <a:rPr sz="1250" b="0">
-                <a:solidFill>
-                  <a:srgbClr val="B32A2A"/>
-                </a:solidFill>
-                <a:latin typeface="Consolas"/>
-              </a:rPr>
-              <a:t>x1003c7s7b0n1,x1003c7s7b0n2,x1003c7s7b0n3,"pav_test result=FAIL",pavilion,released</a:t>
+              <a:t>x1002c6s2b0n1,"demo_pbs.salog result=PASS",pavilion,released</a:t>
             </a:r>
           </a:p>
         </p:txBody>
@@ -16615,7 +16603,7 @@
                 </a:solidFill>
                 <a:latin typeface="Arial"/>
               </a:rPr>
-              <a:t>Run in Pavilion → jobs in PBS → saLog writes a CSV row as each node is released.</a:t>
+              <a:t>Run in Pavilion → job in PBS → the sa_log plugin calls saLog per node as it's released.</a:t>
             </a:r>
           </a:p>
         </p:txBody>

--- a/deck/pavilion-workshop.pptx
+++ b/deck/pavilion-workshop.pptx
@@ -2369,7 +2369,7 @@
           <a:lstStyle/>
           <a:p>
             <a:r>
-              <a:t>Run the suite, query the index to prove indexing, then open Grafana (http://&lt;your-grafana-host&gt;:3000). Export OS_PASS before the demo.</a:t>
+              <a:t>Run the suite, query the index to prove indexing, then open Grafana (http://&lt;your-grafana-host&gt;:3000). The read-back auto-loads the password from pavilion.yaml — no OS_PASS export needed.</a:t>
             </a:r>
           </a:p>
         </p:txBody>

--- a/deck/pavilion-workshop.pptx
+++ b/deck/pavilion-workshop.pptx
@@ -1740,7 +1740,7 @@
           <a:lstStyle/>
           <a:p>
             <a:r>
-              <a:t>Sets can be ordered or not; unordered runs them concurrently (robust for a live demo). Each set becomes its own PBS job.</a:t>
+              <a:t>Sets can be ordered or not; unordered runs them concurrently (robust for a live demo). One 'pav series run' launches every test in the set.</a:t>
             </a:r>
           </a:p>
         </p:txBody>
@@ -1810,7 +1810,7 @@
           <a:lstStyle/>
           <a:p>
             <a:r>
-              <a:t>Series group test sets; each set here dispatches its own PBS job (qstat shows two). I use unordered for a robust live run.</a:t>
+              <a:t>Series group tests into sets and run them with one command. The smoke set here holds demo_pbs.pass, .fail, and .metrics — 2 pass, 1 intentional fail. I use unordered for a robust live run.</a:t>
             </a:r>
           </a:p>
         </p:txBody>
@@ -13812,7 +13812,7 @@
                 </a:solidFill>
                 <a:latin typeface="Arial"/>
               </a:rPr>
-              <a:t>demo_series.yaml — name a few test sets; each set lists the tests it runs.</a:t>
+              <a:t>demo_series.yaml — name a test set, list the tests it runs.</a:t>
             </a:r>
           </a:p>
         </p:txBody>
@@ -13938,19 +13938,7 @@
                 </a:solidFill>
                 <a:latin typeface="Consolas"/>
               </a:rPr>
-              <a:t>  perf:</a:t>
-            </a:r>
-          </a:p>
-          <a:p>
-            <a:pPr algn="l"/>
-            <a:r>
-              <a:rPr sz="1400" b="0">
-                <a:solidFill>
-                  <a:srgbClr val="1B2B34"/>
-                </a:solidFill>
-                <a:latin typeface="Consolas"/>
-              </a:rPr>
-              <a:t>    tests:</a:t>
+              <a:t>      - demo_pbs.fail</a:t>
             </a:r>
           </a:p>
           <a:p>
@@ -14221,7 +14209,7 @@
                 </a:solidFill>
                 <a:latin typeface="Consolas"/>
               </a:rPr>
-              <a:t>Started series s74.</a:t>
+              <a:t>Started series s152.</a:t>
             </a:r>
           </a:p>
           <a:p>
@@ -14245,7 +14233,7 @@
                 </a:solidFill>
                 <a:latin typeface="Consolas"/>
               </a:rPr>
-              <a:t>$ qstat -a                        # one PBS job per test set</a:t>
+              <a:t>$ qstat -a                        # the set's tests dispatched to PBS</a:t>
             </a:r>
           </a:p>
           <a:p>
@@ -14257,7 +14245,7 @@
                 </a:solidFill>
                 <a:latin typeface="Consolas"/>
               </a:rPr>
-              <a:t>8387.pbs-server pavilion workq pav_demo_*  1  1  R</a:t>
+              <a:t>9076.pbs-server pavilion workq pav_demo_*  1  1  R</a:t>
             </a:r>
           </a:p>
           <a:p>
@@ -14269,7 +14257,7 @@
                 </a:solidFill>
                 <a:latin typeface="Consolas"/>
               </a:rPr>
-              <a:t>8388.pbs-server pavilion workq pav_demo_*  1  1  R</a:t>
+              <a:t>9077.pbs-server pavilion workq pav_demo_*  1  1  R</a:t>
             </a:r>
           </a:p>
           <a:p>
@@ -14293,7 +14281,7 @@
                 </a:solidFill>
                 <a:latin typeface="Consolas"/>
               </a:rPr>
-              <a:t>$ pav series status s74</a:t>
+              <a:t>$ pav series status s152</a:t>
             </a:r>
           </a:p>
           <a:p>
@@ -14305,7 +14293,7 @@
                 </a:solidFill>
                 <a:latin typeface="Consolas"/>
               </a:rPr>
-              <a:t>Id  | Name        | Status   | Tests | Pass | Fail</a:t>
+              <a:t>Id   | Name        | Status   | Tests | Pass | Fail</a:t>
             </a:r>
           </a:p>
           <a:p>
@@ -14317,7 +14305,7 @@
                 </a:solidFill>
                 <a:latin typeface="Consolas"/>
               </a:rPr>
-              <a:t>s74 | demo_series | COMPLETE |   2   |   2  |   0</a:t>
+              <a:t>s152 | demo_series | COMPLETE |   3   |   2  |   1</a:t>
             </a:r>
           </a:p>
         </p:txBody>
@@ -14351,7 +14339,7 @@
                 </a:solidFill>
                 <a:latin typeface="Arial"/>
               </a:rPr>
-              <a:t>One command runs both test sets as a named series — two PBS jobs, all PASS.</a:t>
+              <a:t>One command runs all three tests in the 'smoke' set — 2 PASS, 1 (intentional) FAIL.</a:t>
             </a:r>
           </a:p>
         </p:txBody>

--- a/deck/pavilion-workshop.pptx
+++ b/deck/pavilion-workshop.pptx
@@ -54,6 +54,9 @@
     <p:sldId id="302" r:id="rId54"/>
     <p:sldId id="303" r:id="rId55"/>
     <p:sldId id="304" r:id="rId56"/>
+    <p:sldId id="305" r:id="rId57"/>
+    <p:sldId id="306" r:id="rId58"/>
+    <p:sldId id="307" r:id="rId59"/>
   </p:sldIdLst>
   <p:sldSz cx="12191695" cy="6858000" type="screen4x3"/>
   <p:notesSz cx="6858000" cy="9144000"/>
@@ -1110,7 +1113,7 @@
           <a:lstStyle/>
           <a:p>
             <a:r>
-              <a:t>The feature people remember. One definition, six tests, each with its own subtitle. share_allocation: false makes Pavilion submit a separate PBS job per instance (the default packs them into one shared allocation).</a:t>
+              <a:t>result_evaluate runs expressions over the parsed results. Assigning the special 'result' key overrides the default exit-code result — so a test that exits 0 still FAILs if the number doesn't clear the bar. Expressions can do math, comparisons, all(), any(), etc.</a:t>
             </a:r>
           </a:p>
         </p:txBody>
@@ -1180,7 +1183,7 @@
           <a:lstStyle/>
           <a:p>
             <a:r>
-              <a:t>share_allocation: false gives each permutation its OWN PBS job (distinct job ids 8400–8405). With one free node they run a couple at a time and the rest sit in Q — real scheduler behavior. Point out the auto-generated subtitles (size-mode).</a:t>
+              <a:t>Both tests exit 0, so by exit code both would PASS. The evaluation flips 'low' to FAIL because 80 isn't &gt; 100. This is how you turn a measured number into an acceptance criterion.</a:t>
             </a:r>
           </a:p>
         </p:txBody>
@@ -1250,7 +1253,7 @@
           <a:lstStyle/>
           <a:p>
             <a:r>
-              <a:t>Same test, different scheduler = portability. Our PBS plugin is the custom bit.</a:t>
+              <a:t>The feature people remember. One definition, six tests, each with its own subtitle. share_allocation: false makes Pavilion submit a separate PBS job per instance (the default packs them into one shared allocation).</a:t>
             </a:r>
           </a:p>
         </p:txBody>
@@ -1390,7 +1393,7 @@
           <a:lstStyle/>
           <a:p>
             <a:r>
-              <a:t>schedule.pbs maps to #PBS resource requests via our plugin. Addressed as demo_pbs.pass.</a:t>
+              <a:t>share_allocation: false gives each permutation its OWN PBS job (distinct job ids 8400–8405). With one free node they run a couple at a time and the rest sit in Q — real scheduler behavior. Point out the auto-generated subtitles (size-mode).</a:t>
             </a:r>
           </a:p>
         </p:txBody>
@@ -1460,7 +1463,7 @@
           <a:lstStyle/>
           <a:p>
             <a:r>
-              <a:t>The running step shows the same job in both Pavilion (RUNNING) and PBS (state R). Live tip: 'pav run' then immediately 'pav status' / 'qstat -a' to catch it.</a:t>
+              <a:t>Same test, different scheduler = portability. Our PBS plugin is the custom bit.</a:t>
             </a:r>
           </a:p>
         </p:txBody>
@@ -1530,7 +1533,7 @@
           <a:lstStyle/>
           <a:p>
             <a:r>
-              <a:t>Modes = reuse. One test, many contexts. Here the same test flips FAIL→PASS purely because the mode overrode a value — no edit to the test itself.</a:t>
+              <a:t>schedule.pbs maps to #PBS resource requests via our plugin. Addressed as demo_pbs.pass.</a:t>
             </a:r>
           </a:p>
         </p:txBody>
@@ -1600,7 +1603,7 @@
           <a:lstStyle/>
           <a:p>
             <a:r>
-              <a:t>The test evaluates throughput_mbs &gt; 1300. Base value 1200 fails it. The prod mode overrides only that variable to 1400, so the same test now passes — no edit to the test.</a:t>
+              <a:t>The running step shows the same job in both Pavilion (RUNNING) and PBS (state R). Live tip: 'pav run' then immediately 'pav status' / 'qstat -a' to catch it.</a:t>
             </a:r>
           </a:p>
         </p:txBody>
@@ -1670,7 +1673,7 @@
           <a:lstStyle/>
           <a:p>
             <a:r>
-              <a:t>The result is the proof: base throughput 1200 fails the &gt; 1300 check; the prod mode overrides the value to 1400 and the identical test now passes. Both ran through PBS (qstat).</a:t>
+              <a:t>Modes = reuse. One test, many contexts. Here the same test flips FAIL→PASS purely because the mode overrode a value — no edit to the test itself.</a:t>
             </a:r>
           </a:p>
         </p:txBody>
@@ -1740,7 +1743,7 @@
           <a:lstStyle/>
           <a:p>
             <a:r>
-              <a:t>Sets can be ordered or not; unordered runs them concurrently (robust for a live demo). One 'pav series run' launches every test in the set.</a:t>
+              <a:t>The test evaluates throughput_mbs &gt; 1300. Base value 1200 fails it. The prod mode overrides only that variable to 1400, so the same test now passes — no edit to the test.</a:t>
             </a:r>
           </a:p>
         </p:txBody>
@@ -1810,7 +1813,7 @@
           <a:lstStyle/>
           <a:p>
             <a:r>
-              <a:t>Series group tests into sets and run them with one command. The smoke set here holds demo_pbs.pass, .fail, and .metrics — 2 pass, 1 intentional fail. I use unordered for a robust live run.</a:t>
+              <a:t>The result is the proof: base throughput 1200 fails the &gt; 1300 check; the prod mode overrides the value to 1400 and the identical test now passes. Both ran through PBS (qstat).</a:t>
             </a:r>
           </a:p>
         </p:txBody>
@@ -1880,7 +1883,7 @@
           <a:lstStyle/>
           <a:p>
             <a:r>
-              <a:t>Point out that every parsed field (throughput_mbs, latency_ms…) is in the JSON — that's what feeds the result loggers next. --json (or -j) is how you script against Pavilion.</a:t>
+              <a:t>Sets can be ordered or not; unordered runs them concurrently (robust for a live demo). One 'pav series run' launches every test in the set.</a:t>
             </a:r>
           </a:p>
         </p:txBody>
@@ -1950,7 +1953,7 @@
           <a:lstStyle/>
           <a:p>
             <a:r>
-              <a:t>Two kinds of custom plugins next: command plugins and result loggers.</a:t>
+              <a:t>Series group tests into sets and run them with one command. The smoke set here holds demo_pbs.pass, .fail, and .metrics — 2 pass, 1 intentional fail. I use unordered for a robust live run.</a:t>
             </a:r>
           </a:p>
         </p:txBody>
@@ -2020,7 +2023,7 @@
           <a:lstStyle/>
           <a:p>
             <a:r>
-              <a:t>These add new verbs to pav itself — just Python classes Pavilion auto-discovers.</a:t>
+              <a:t>Point out that every parsed field (throughput_mbs, latency_ms…) is in the JSON — that's what feeds the result loggers next. --json (or -j) is how you script against Pavilion.</a:t>
             </a:r>
           </a:p>
         </p:txBody>
@@ -2160,7 +2163,7 @@
           <a:lstStyle/>
           <a:p>
             <a:r>
-              <a:t>hello/recent/test-summary/disk-usage all add new verbs to pav itself. recent/test-summary read Pavilion's run database via cmd_utils; disk-usage totals runs / builds / series (handy before a 'pav clean'). Same plugin API for all four.</a:t>
+              <a:t>Two kinds of custom plugins next: command plugins and result loggers.</a:t>
             </a:r>
           </a:p>
         </p:txBody>
@@ -2230,7 +2233,7 @@
           <a:lstStyle/>
           <a:p>
             <a:r>
-              <a:t>Result loggers run at the end of the results stage. One config, applies to all runs. (Redact the OpenSearch password if you ever show pavilion.yaml.)</a:t>
+              <a:t>These add new verbs to pav itself — just Python classes Pavilion auto-discovers.</a:t>
             </a:r>
           </a:p>
         </p:txBody>
@@ -2300,7 +2303,7 @@
           <a:lstStyle/>
           <a:p>
             <a:r>
-              <a:t>The CSV page also shows scheduler dispatch — these are real PBS jobs (qstat) — then the csv_file logger records one row per test. Parsed metrics land in 'extra', permute vars in 'permute_on'.</a:t>
+              <a:t>hello/recent/test-summary/disk-usage all add new verbs to pav itself. recent/test-summary read Pavilion's run database via cmd_utils; disk-usage totals runs / builds / series (handy before a 'pav clean'). Same plugin API for all four.</a:t>
             </a:r>
           </a:p>
         </p:txBody>
@@ -2370,7 +2373,7 @@
           <a:lstStyle/>
           <a:p>
             <a:r>
-              <a:t>saLog is a logger specific to us (NASA/NOAA). The test uses a per_file: name parser so each node's result is recorded; Pavilion's sa_log plugin then invokes saLog once per node with the 'released' action, writing node, content (result), user, action to the CSV.</a:t>
+              <a:t>Result loggers run at the end of the results stage. One config, applies to all runs. (Redact the OpenSearch password if you ever show pavilion.yaml.)</a:t>
             </a:r>
           </a:p>
         </p:txBody>
@@ -2440,7 +2443,7 @@
           <a:lstStyle/>
           <a:p>
             <a:r>
-              <a:t>Run the suite, query the index to prove indexing, then open Grafana (http://&lt;your-grafana-host&gt;:3000). The read-back auto-loads the password from pavilion.yaml — no OS_PASS export needed.</a:t>
+              <a:t>The CSV page also shows scheduler dispatch — these are real PBS jobs (qstat) — then the csv_file logger records one row per test. Parsed metrics land in 'extra', permute vars in 'permute_on'.</a:t>
             </a:r>
           </a:p>
         </p:txBody>
@@ -2510,7 +2513,7 @@
           <a:lstStyle/>
           <a:p>
             <a:r>
-              <a:t>Built with pymysql; connects via unix_socket so there's NO password in pavilion.yaml. The row-per-test appears the moment the run finishes.</a:t>
+              <a:t>saLog is a logger specific to us (NASA/NOAA). The test uses a per_file: name parser so each node's result is recorded; Pavilion's sa_log plugin then invokes saLog once per node with the 'released' action, writing node, content (result), user, action to the CSV.</a:t>
             </a:r>
           </a:p>
         </p:txBody>
@@ -2580,7 +2583,7 @@
           <a:lstStyle/>
           <a:p>
             <a:r>
-              <a:t>The point: loggers are plugins, so results can go wherever you need. csv_file / saLog / opensearch / mysql all exist and are shown today; PostgreSQL is an example you'd write a logger for — '[add your own]' says exactly that.</a:t>
+              <a:t>Run the suite, query the index to prove indexing, then open Grafana (http://&lt;your-grafana-host&gt;:3000). The read-back auto-loads the password from pavilion.yaml — no OS_PASS export needed.</a:t>
             </a:r>
           </a:p>
         </p:txBody>
@@ -2650,7 +2653,7 @@
           <a:lstStyle/>
           <a:p>
             <a:r>
-              <a:t>Pavilion isn't just running tests — it's a data pipeline from 'did it pass' to 'how is the system trending'.</a:t>
+              <a:t>Built with pymysql; connects via unix_socket so there's NO password in pavilion.yaml. The row-per-test appears the moment the run finishes.</a:t>
             </a:r>
           </a:p>
         </p:txBody>
@@ -2720,7 +2723,77 @@
           <a:lstStyle/>
           <a:p>
             <a:r>
-              <a:t>Leave up for Q&amp;A. Offer to walk through any demo again live.</a:t>
+              <a:t>The point: loggers are plugins, so results can go wherever you need. csv_file / saLog / opensearch / mysql all exist and are shown today; PostgreSQL is an example you'd write a logger for — '[add your own]' says exactly that.</a:t>
+            </a:r>
+          </a:p>
+        </p:txBody>
+      </p:sp>
+      <p:sp>
+        <p:nvSpPr>
+          <p:cNvPr id="4" name="Slide Number Placeholder 3"/>
+          <p:cNvSpPr>
+            <a:spLocks noGrp="1"/>
+          </p:cNvSpPr>
+          <p:nvPr>
+            <p:ph type="sldNum" idx="5" sz="quarter"/>
+          </p:nvPr>
+        </p:nvSpPr>
+        <p:spPr/>
+      </p:sp>
+    </p:spTree>
+  </p:cSld>
+  <p:clrMapOvr>
+    <a:masterClrMapping/>
+  </p:clrMapOvr>
+</p:notes>
+</file>
+
+<file path=ppt/notesSlides/notesSlide39.xml><?xml version="1.0" encoding="utf-8"?>
+<p:notes xmlns:a="http://schemas.openxmlformats.org/drawingml/2006/main" xmlns:p="http://schemas.openxmlformats.org/presentationml/2006/main" xmlns:r="http://schemas.openxmlformats.org/officeDocument/2006/relationships">
+  <p:cSld>
+    <p:spTree>
+      <p:nvGrpSpPr>
+        <p:cNvPr id="1" name=""/>
+        <p:cNvGrpSpPr/>
+        <p:nvPr/>
+      </p:nvGrpSpPr>
+      <p:grpSpPr>
+        <a:xfrm>
+          <a:off x="0" y="0"/>
+          <a:ext cx="0" cy="0"/>
+          <a:chOff x="0" y="0"/>
+          <a:chExt cx="0" cy="0"/>
+        </a:xfrm>
+      </p:grpSpPr>
+      <p:sp>
+        <p:nvSpPr>
+          <p:cNvPr id="2" name="Slide Image Placeholder 1"/>
+          <p:cNvSpPr>
+            <a:spLocks noGrp="1"/>
+          </p:cNvSpPr>
+          <p:nvPr>
+            <p:ph type="sldImg" idx="2"/>
+          </p:nvPr>
+        </p:nvSpPr>
+        <p:spPr/>
+      </p:sp>
+      <p:sp>
+        <p:nvSpPr>
+          <p:cNvPr id="3" name="Notes Placeholder 2"/>
+          <p:cNvSpPr>
+            <a:spLocks noGrp="1"/>
+          </p:cNvSpPr>
+          <p:nvPr>
+            <p:ph type="body" idx="3" sz="quarter"/>
+          </p:nvPr>
+        </p:nvSpPr>
+        <p:spPr/>
+        <p:txBody>
+          <a:bodyPr/>
+          <a:lstStyle/>
+          <a:p>
+            <a:r>
+              <a:t>Pavilion isn't just running tests — it's a data pipeline from 'did it pass' to 'how is the system trending'.</a:t>
             </a:r>
           </a:p>
         </p:txBody>
@@ -2791,6 +2864,76 @@
           <a:p>
             <a:r>
               <a:t>Name each concept plainly. 'suite.test' is how you address a test, e.g. demo_pbs.pass.</a:t>
+            </a:r>
+          </a:p>
+        </p:txBody>
+      </p:sp>
+      <p:sp>
+        <p:nvSpPr>
+          <p:cNvPr id="4" name="Slide Number Placeholder 3"/>
+          <p:cNvSpPr>
+            <a:spLocks noGrp="1"/>
+          </p:cNvSpPr>
+          <p:nvPr>
+            <p:ph type="sldNum" idx="5" sz="quarter"/>
+          </p:nvPr>
+        </p:nvSpPr>
+        <p:spPr/>
+      </p:sp>
+    </p:spTree>
+  </p:cSld>
+  <p:clrMapOvr>
+    <a:masterClrMapping/>
+  </p:clrMapOvr>
+</p:notes>
+</file>
+
+<file path=ppt/notesSlides/notesSlide40.xml><?xml version="1.0" encoding="utf-8"?>
+<p:notes xmlns:a="http://schemas.openxmlformats.org/drawingml/2006/main" xmlns:p="http://schemas.openxmlformats.org/presentationml/2006/main" xmlns:r="http://schemas.openxmlformats.org/officeDocument/2006/relationships">
+  <p:cSld>
+    <p:spTree>
+      <p:nvGrpSpPr>
+        <p:cNvPr id="1" name=""/>
+        <p:cNvGrpSpPr/>
+        <p:nvPr/>
+      </p:nvGrpSpPr>
+      <p:grpSpPr>
+        <a:xfrm>
+          <a:off x="0" y="0"/>
+          <a:ext cx="0" cy="0"/>
+          <a:chOff x="0" y="0"/>
+          <a:chExt cx="0" cy="0"/>
+        </a:xfrm>
+      </p:grpSpPr>
+      <p:sp>
+        <p:nvSpPr>
+          <p:cNvPr id="2" name="Slide Image Placeholder 1"/>
+          <p:cNvSpPr>
+            <a:spLocks noGrp="1"/>
+          </p:cNvSpPr>
+          <p:nvPr>
+            <p:ph type="sldImg" idx="2"/>
+          </p:nvPr>
+        </p:nvSpPr>
+        <p:spPr/>
+      </p:sp>
+      <p:sp>
+        <p:nvSpPr>
+          <p:cNvPr id="3" name="Notes Placeholder 2"/>
+          <p:cNvSpPr>
+            <a:spLocks noGrp="1"/>
+          </p:cNvSpPr>
+          <p:nvPr>
+            <p:ph type="body" idx="3" sz="quarter"/>
+          </p:nvPr>
+        </p:nvSpPr>
+        <p:spPr/>
+        <p:txBody>
+          <a:bodyPr/>
+          <a:lstStyle/>
+          <a:p>
+            <a:r>
+              <a:t>Leave up for Q&amp;A. Offer to walk through any demo again live.</a:t>
             </a:r>
           </a:p>
         </p:txBody>
@@ -10268,7 +10411,7 @@
                 </a:solidFill>
                 <a:latin typeface="Arial"/>
               </a:rPr>
-              <a:t>PERMUTATIONS</a:t>
+              <a:t>RESULT EVALUATION</a:t>
             </a:r>
           </a:p>
           <a:p>
@@ -10279,7 +10422,7 @@
                 </a:solidFill>
                 <a:latin typeface="Arial"/>
               </a:rPr>
-              <a:t>One config → many tests</a:t>
+              <a:t>Turning numbers into pass/fail</a:t>
             </a:r>
           </a:p>
         </p:txBody>
@@ -10331,7 +10474,7 @@
                 </a:solidFill>
                 <a:latin typeface="Arial"/>
               </a:rPr>
-              <a:t>THE BIG ONE</a:t>
+              <a:t>EVALUATE</a:t>
             </a:r>
           </a:p>
         </p:txBody>
@@ -10365,7 +10508,7 @@
                 </a:solidFill>
                 <a:latin typeface="Arial"/>
               </a:rPr>
-              <a:t>Permutations</a:t>
+              <a:t>Result evaluation</a:t>
             </a:r>
           </a:p>
         </p:txBody>
@@ -10442,7 +10585,7 @@
                 </a:solidFill>
                 <a:latin typeface="Arial"/>
               </a:rPr>
-              <a:t>permute_on + variable lists generate one test instance per combination.</a:t>
+              <a:t>Parsing pulls values out; result_evaluate judges them. The 'result' key sets PASS/FAIL.</a:t>
             </a:r>
           </a:p>
         </p:txBody>
@@ -10496,7 +10639,7 @@
                 </a:solidFill>
                 <a:latin typeface="Consolas"/>
               </a:rPr>
-              <a:t>matrix:</a:t>
+              <a:t>high:</a:t>
             </a:r>
           </a:p>
           <a:p>
@@ -10508,7 +10651,7 @@
                 </a:solidFill>
                 <a:latin typeface="Consolas"/>
               </a:rPr>
-              <a:t>  scheduler: pbs</a:t>
+              <a:t>  run:</a:t>
             </a:r>
           </a:p>
           <a:p>
@@ -10520,7 +10663,7 @@
                 </a:solidFill>
                 <a:latin typeface="Consolas"/>
               </a:rPr>
-              <a:t>  schedule:</a:t>
+              <a:t>    cmds:</a:t>
             </a:r>
           </a:p>
           <a:p>
@@ -10532,7 +10675,7 @@
                 </a:solidFill>
                 <a:latin typeface="Consolas"/>
               </a:rPr>
-              <a:t>    share_allocation: false      # one PBS job per instance</a:t>
+              <a:t>      - 'echo "score 150"'</a:t>
             </a:r>
           </a:p>
           <a:p>
@@ -10544,7 +10687,7 @@
                 </a:solidFill>
                 <a:latin typeface="Consolas"/>
               </a:rPr>
-              <a:t>    pbs: { queue: workq, nodes: 1, walltime: '00:02:00' }</a:t>
+              <a:t>  result_parse:</a:t>
             </a:r>
           </a:p>
           <a:p>
@@ -10556,7 +10699,7 @@
                 </a:solidFill>
                 <a:latin typeface="Consolas"/>
               </a:rPr>
-              <a:t>  permute_on: [size, mode]</a:t>
+              <a:t>    regex:</a:t>
             </a:r>
           </a:p>
           <a:p>
@@ -10568,7 +10711,7 @@
                 </a:solidFill>
                 <a:latin typeface="Consolas"/>
               </a:rPr>
-              <a:t>  variables:</a:t>
+              <a:t>      score:</a:t>
             </a:r>
           </a:p>
           <a:p>
@@ -10580,7 +10723,7 @@
                 </a:solidFill>
                 <a:latin typeface="Consolas"/>
               </a:rPr>
-              <a:t>    size: ['small', 'medium', 'large']</a:t>
+              <a:t>        regex: 'score (\S+)'      # parse: pull the number out</a:t>
             </a:r>
           </a:p>
           <a:p>
@@ -10592,7 +10735,7 @@
                 </a:solidFill>
                 <a:latin typeface="Consolas"/>
               </a:rPr>
-              <a:t>    mode: ['read', 'write']</a:t>
+              <a:t>  result_evaluate:</a:t>
             </a:r>
           </a:p>
           <a:p>
@@ -10604,67 +10747,7 @@
                 </a:solidFill>
                 <a:latin typeface="Consolas"/>
               </a:rPr>
-              <a:t>  subtitle: '{{size}}-{{mode}}'</a:t>
-            </a:r>
-          </a:p>
-          <a:p>
-            <a:pPr algn="l"/>
-            <a:r>
-              <a:rPr sz="1400" b="0">
-                <a:solidFill>
-                  <a:srgbClr val="1B2B34"/>
-                </a:solidFill>
-                <a:latin typeface="Consolas"/>
-              </a:rPr>
-              <a:t>  run:</a:t>
-            </a:r>
-          </a:p>
-          <a:p>
-            <a:pPr algn="l"/>
-            <a:r>
-              <a:rPr sz="1400" b="0">
-                <a:solidFill>
-                  <a:srgbClr val="1B2B34"/>
-                </a:solidFill>
-                <a:latin typeface="Consolas"/>
-              </a:rPr>
-              <a:t>    cmds:</a:t>
-            </a:r>
-          </a:p>
-          <a:p>
-            <a:pPr algn="l"/>
-            <a:r>
-              <a:rPr sz="1400" b="0">
-                <a:solidFill>
-                  <a:srgbClr val="1B2B34"/>
-                </a:solidFill>
-                <a:latin typeface="Consolas"/>
-              </a:rPr>
-              <a:t>      - 'echo "size={{size}} mode={{mode}}"'</a:t>
-            </a:r>
-          </a:p>
-          <a:p>
-            <a:pPr algn="l"/>
-            <a:r>
-              <a:rPr sz="1400" b="0">
-                <a:solidFill>
-                  <a:srgbClr val="1B2B34"/>
-                </a:solidFill>
-                <a:latin typeface="Consolas"/>
-              </a:rPr>
-              <a:t> </a:t>
-            </a:r>
-          </a:p>
-          <a:p>
-            <a:pPr algn="l"/>
-            <a:r>
-              <a:rPr sz="1400" b="0">
-                <a:solidFill>
-                  <a:srgbClr val="5B6674"/>
-                </a:solidFill>
-                <a:latin typeface="Consolas"/>
-              </a:rPr>
-              <a:t># 3 sizes x 2 modes  =&gt;  6 test instances, 6 PBS jobs.</a:t>
+              <a:t>    result: 'score &gt; 100'          # evaluate: turn it into PASS/FAIL</a:t>
             </a:r>
           </a:p>
         </p:txBody>
@@ -10716,7 +10799,7 @@
                 </a:solidFill>
                 <a:latin typeface="Arial"/>
               </a:rPr>
-              <a:t>LIVE DEMO · L3</a:t>
+              <a:t>LIVE DEMO · EVAL</a:t>
             </a:r>
           </a:p>
         </p:txBody>
@@ -10750,7 +10833,7 @@
                 </a:solidFill>
                 <a:latin typeface="Arial"/>
               </a:rPr>
-              <a:t>Permutations expand</a:t>
+              <a:t>Evaluate decides pass or fail</a:t>
             </a:r>
           </a:p>
         </p:txBody>
@@ -10845,7 +10928,7 @@
                 </a:solidFill>
                 <a:latin typeface="Arial"/>
               </a:rPr>
-              <a:t>▶  03-permutations.sh</a:t>
+              <a:t>▶  02b-evaluate.sh</a:t>
             </a:r>
           </a:p>
         </p:txBody>
@@ -10899,7 +10982,7 @@
                 </a:solidFill>
                 <a:latin typeface="Consolas"/>
               </a:rPr>
-              <a:t>$ pav run demo_perms.matrix</a:t>
+              <a:t>$ pav run demo_eval.high demo_eval.low     # both exit 0</a:t>
             </a:r>
           </a:p>
           <a:p>
@@ -10911,7 +10994,7 @@
                 </a:solidFill>
                 <a:latin typeface="Consolas"/>
               </a:rPr>
-              <a:t>Test set 'demo_perms.matrix' created 6 tests, skipped 0, 0 errors.</a:t>
+              <a:t>created 2 tests, 0 errors.</a:t>
             </a:r>
           </a:p>
           <a:p>
@@ -10923,7 +11006,7 @@
                 </a:solidFill>
                 <a:latin typeface="Consolas"/>
               </a:rPr>
-              <a:t>sid: s93</a:t>
+              <a:t>sid: s155</a:t>
             </a:r>
           </a:p>
           <a:p>
@@ -10947,7 +11030,7 @@
                 </a:solidFill>
                 <a:latin typeface="Consolas"/>
               </a:rPr>
-              <a:t>$ qstat -a                        # SIX PBS jobs — one per permutation</a:t>
+              <a:t>$ qstat -a                                 # two PBS jobs</a:t>
             </a:r>
           </a:p>
           <a:p>
@@ -10959,7 +11042,7 @@
                 </a:solidFill>
                 <a:latin typeface="Consolas"/>
               </a:rPr>
-              <a:t>8400.pbs-server pavilion workq pav_demo_*  1  1  R</a:t>
+              <a:t>9086.pbs-server pavilion workq pav_demo_*  1  1  R</a:t>
             </a:r>
           </a:p>
           <a:p>
@@ -10971,7 +11054,7 @@
                 </a:solidFill>
                 <a:latin typeface="Consolas"/>
               </a:rPr>
-              <a:t>8401.pbs-server pavilion workq pav_demo_*  1  1  R</a:t>
+              <a:t>9087.pbs-server pavilion workq pav_demo_*  1  1  R</a:t>
             </a:r>
           </a:p>
           <a:p>
@@ -10983,7 +11066,19 @@
                 </a:solidFill>
                 <a:latin typeface="Consolas"/>
               </a:rPr>
-              <a:t>8402.pbs-server pavilion workq pav_demo_*  1  1  Q</a:t>
+              <a:t> </a:t>
+            </a:r>
+          </a:p>
+          <a:p>
+            <a:pPr algn="l"/>
+            <a:r>
+              <a:rPr sz="1400" b="1">
+                <a:solidFill>
+                  <a:srgbClr val="2E6DA4"/>
+                </a:solidFill>
+                <a:latin typeface="Consolas"/>
+              </a:rPr>
+              <a:t>$ pav results --full s155                  # result = score &gt; 100, NOT the exit code</a:t>
             </a:r>
           </a:p>
           <a:p>
@@ -10991,11 +11086,11 @@
             <a:r>
               <a:rPr sz="1250" b="0">
                 <a:solidFill>
-                  <a:srgbClr val="1B2B34"/>
-                </a:solidFill>
-                <a:latin typeface="Consolas"/>
-              </a:rPr>
-              <a:t>8403.pbs-server pavilion workq pav_demo_*  1  1  Q</a:t>
+                  <a:srgbClr val="1E7D3C"/>
+                </a:solidFill>
+                <a:latin typeface="Consolas"/>
+              </a:rPr>
+              <a:t>high  -&gt; score=150   result=PASS     # 150 &gt; 100</a:t>
             </a:r>
           </a:p>
           <a:p>
@@ -11003,119 +11098,11 @@
             <a:r>
               <a:rPr sz="1250" b="0">
                 <a:solidFill>
-                  <a:srgbClr val="1B2B34"/>
-                </a:solidFill>
-                <a:latin typeface="Consolas"/>
-              </a:rPr>
-              <a:t>8404.pbs-server pavilion workq pav_demo_*  1  1  Q</a:t>
-            </a:r>
-          </a:p>
-          <a:p>
-            <a:pPr algn="l"/>
-            <a:r>
-              <a:rPr sz="1250" b="0">
-                <a:solidFill>
-                  <a:srgbClr val="1B2B34"/>
-                </a:solidFill>
-                <a:latin typeface="Consolas"/>
-              </a:rPr>
-              <a:t>8405.pbs-server pavilion workq pav_demo_*  1  1  Q</a:t>
-            </a:r>
-          </a:p>
-          <a:p>
-            <a:pPr algn="l"/>
-            <a:r>
-              <a:rPr sz="1250" b="0">
-                <a:solidFill>
-                  <a:srgbClr val="1B2B34"/>
-                </a:solidFill>
-                <a:latin typeface="Consolas"/>
-              </a:rPr>
-              <a:t> </a:t>
-            </a:r>
-          </a:p>
-          <a:p>
-            <a:pPr algn="l"/>
-            <a:r>
-              <a:rPr sz="1400" b="1">
-                <a:solidFill>
-                  <a:srgbClr val="2E6DA4"/>
-                </a:solidFill>
-                <a:latin typeface="Consolas"/>
-              </a:rPr>
-              <a:t>$ pav status s93                  # each instance = its own job id</a:t>
-            </a:r>
-          </a:p>
-          <a:p>
-            <a:pPr algn="l"/>
-            <a:r>
-              <a:rPr sz="1250" b="0">
-                <a:solidFill>
-                  <a:srgbClr val="1E7D3C"/>
-                </a:solidFill>
-                <a:latin typeface="Consolas"/>
-              </a:rPr>
-              <a:t>s93.1 | 8400_pbs-server | demo_perms.matrix.small-read  | PASS</a:t>
-            </a:r>
-          </a:p>
-          <a:p>
-            <a:pPr algn="l"/>
-            <a:r>
-              <a:rPr sz="1250" b="0">
-                <a:solidFill>
-                  <a:srgbClr val="1E7D3C"/>
-                </a:solidFill>
-                <a:latin typeface="Consolas"/>
-              </a:rPr>
-              <a:t>s93.2 | 8401_pbs-server | demo_perms.matrix.medium-read | PASS</a:t>
-            </a:r>
-          </a:p>
-          <a:p>
-            <a:pPr algn="l"/>
-            <a:r>
-              <a:rPr sz="1250" b="0">
-                <a:solidFill>
-                  <a:srgbClr val="1E7D3C"/>
-                </a:solidFill>
-                <a:latin typeface="Consolas"/>
-              </a:rPr>
-              <a:t>s93.3 | 8402_pbs-server | demo_perms.matrix.large-read  | PASS</a:t>
-            </a:r>
-          </a:p>
-          <a:p>
-            <a:pPr algn="l"/>
-            <a:r>
-              <a:rPr sz="1250" b="0">
-                <a:solidFill>
-                  <a:srgbClr val="1E7D3C"/>
-                </a:solidFill>
-                <a:latin typeface="Consolas"/>
-              </a:rPr>
-              <a:t>s93.4 | 8403_pbs-server | demo_perms.matrix.small-write | PASS</a:t>
-            </a:r>
-          </a:p>
-          <a:p>
-            <a:pPr algn="l"/>
-            <a:r>
-              <a:rPr sz="1250" b="0">
-                <a:solidFill>
-                  <a:srgbClr val="1E7D3C"/>
-                </a:solidFill>
-                <a:latin typeface="Consolas"/>
-              </a:rPr>
-              <a:t>s93.5 | 8404_pbs-server | demo_perms.matrix.medium-write| PASS</a:t>
-            </a:r>
-          </a:p>
-          <a:p>
-            <a:pPr algn="l"/>
-            <a:r>
-              <a:rPr sz="1250" b="0">
-                <a:solidFill>
-                  <a:srgbClr val="1E7D3C"/>
-                </a:solidFill>
-                <a:latin typeface="Consolas"/>
-              </a:rPr>
-              <a:t>s93.6 | 8405_pbs-server | demo_perms.matrix.large-write | PASS</a:t>
+                  <a:srgbClr val="B32A2A"/>
+                </a:solidFill>
+                <a:latin typeface="Consolas"/>
+              </a:rPr>
+              <a:t>low   -&gt; score=80    result=FAIL     # 80 &gt; 100 is false</a:t>
             </a:r>
           </a:p>
         </p:txBody>
@@ -11149,7 +11136,7 @@
                 </a:solidFill>
                 <a:latin typeface="Arial"/>
               </a:rPr>
-              <a:t>One YAML block → six PBS jobs (8400–8405), one per permutation — some run, the rest queue.</a:t>
+              <a:t>Same rule (score &gt; 100), different data → different verdict. Evaluation, not the exit code, sets PASS/FAIL.</a:t>
             </a:r>
           </a:p>
         </p:txBody>
@@ -11244,7 +11231,7 @@
                 </a:solidFill>
                 <a:latin typeface="Arial"/>
               </a:rPr>
-              <a:t>RUNNING AT SCALE</a:t>
+              <a:t>PERMUTATIONS</a:t>
             </a:r>
           </a:p>
           <a:p>
@@ -11255,7 +11242,7 @@
                 </a:solidFill>
                 <a:latin typeface="Arial"/>
               </a:rPr>
-              <a:t>Schedulers</a:t>
+              <a:t>One config → many tests</a:t>
             </a:r>
           </a:p>
         </p:txBody>
@@ -11307,7 +11294,7 @@
                 </a:solidFill>
                 <a:latin typeface="Arial"/>
               </a:rPr>
-              <a:t>SCHEDULERS</a:t>
+              <a:t>THE BIG ONE</a:t>
             </a:r>
           </a:p>
         </p:txBody>
@@ -11341,7 +11328,7 @@
                 </a:solidFill>
                 <a:latin typeface="Arial"/>
               </a:rPr>
-              <a:t>Schedulers &amp; the PBS plugin</a:t>
+              <a:t>Permutations</a:t>
             </a:r>
           </a:p>
         </p:txBody>
@@ -11397,8 +11384,8 @@
         </p:nvSpPr>
         <p:spPr>
           <a:xfrm>
-            <a:off x="640080" y="1691640"/>
-            <a:ext cx="10972800" cy="4754880"/>
+            <a:off x="640080" y="1600200"/>
+            <a:ext cx="10972800" cy="457200"/>
           </a:xfrm>
           <a:prstGeom prst="rect">
             <a:avLst/>
@@ -11411,67 +11398,236 @@
           </a:bodyPr>
           <a:lstStyle/>
           <a:p>
-            <a:pPr>
-              <a:spcAft>
-                <a:spcPts val="1000"/>
-              </a:spcAft>
-            </a:pPr>
-            <a:r>
-              <a:rPr sz="2000" b="0">
-                <a:solidFill>
-                  <a:srgbClr val="21252B"/>
-                </a:solidFill>
-                <a:latin typeface="Arial"/>
-              </a:rPr>
-              <a:t>•  Built-in scheduler plugins: raw (local), slurm, flux, pbs.</a:t>
-            </a:r>
-          </a:p>
-          <a:p>
-            <a:pPr>
-              <a:spcAft>
-                <a:spcPts val="1000"/>
-              </a:spcAft>
-            </a:pPr>
-            <a:r>
-              <a:rPr sz="2000" b="0">
-                <a:solidFill>
-                  <a:srgbClr val="21252B"/>
-                </a:solidFill>
-                <a:latin typeface="Arial"/>
-              </a:rPr>
-              <a:t>•  Switch by setting `scheduler:` — the test body doesn't change.</a:t>
-            </a:r>
-          </a:p>
-          <a:p>
-            <a:pPr>
-              <a:spcAft>
-                <a:spcPts val="1000"/>
-              </a:spcAft>
-            </a:pPr>
-            <a:r>
-              <a:rPr sz="2000" b="0">
-                <a:solidFill>
-                  <a:srgbClr val="21252B"/>
-                </a:solidFill>
-                <a:latin typeface="Arial"/>
-              </a:rPr>
-              <a:t>•  The PBS plugin (ours) submits real qsub jobs and maps nodes/tasks/walltime/queue.</a:t>
-            </a:r>
-          </a:p>
-          <a:p>
-            <a:pPr>
-              <a:spcAft>
-                <a:spcPts val="1000"/>
-              </a:spcAft>
-            </a:pPr>
-            <a:r>
-              <a:rPr sz="2000" b="0">
-                <a:solidFill>
-                  <a:srgbClr val="21252B"/>
-                </a:solidFill>
-                <a:latin typeface="Arial"/>
-              </a:rPr>
-              <a:t>•  Scheduler variables (sched.*) expose node lists, chunks, task counts to the test.</a:t>
+            <a:r>
+              <a:rPr sz="1600" b="0">
+                <a:solidFill>
+                  <a:srgbClr val="5B6674"/>
+                </a:solidFill>
+                <a:latin typeface="Arial"/>
+              </a:rPr>
+              <a:t>permute_on + variable lists generate one test instance per combination.</a:t>
+            </a:r>
+          </a:p>
+        </p:txBody>
+      </p:sp>
+      <p:sp>
+        <p:nvSpPr>
+          <p:cNvPr id="6" name="Rectangle 5"/>
+          <p:cNvSpPr/>
+          <p:nvPr/>
+        </p:nvSpPr>
+        <p:spPr>
+          <a:xfrm>
+            <a:off x="640080" y="2148840"/>
+            <a:ext cx="10972800" cy="4206240"/>
+          </a:xfrm>
+          <a:prstGeom prst="rect">
+            <a:avLst/>
+          </a:prstGeom>
+          <a:solidFill>
+            <a:srgbClr val="F3F4F6"/>
+          </a:solidFill>
+          <a:ln w="12700">
+            <a:solidFill>
+              <a:srgbClr val="D5DAE0"/>
+            </a:solidFill>
+          </a:ln>
+        </p:spPr>
+        <p:style>
+          <a:lnRef idx="1">
+            <a:schemeClr val="accent1"/>
+          </a:lnRef>
+          <a:fillRef idx="3">
+            <a:schemeClr val="accent1"/>
+          </a:fillRef>
+          <a:effectRef idx="2">
+            <a:schemeClr val="accent1"/>
+          </a:effectRef>
+          <a:fontRef idx="minor">
+            <a:schemeClr val="lt1"/>
+          </a:fontRef>
+        </p:style>
+        <p:txBody>
+          <a:bodyPr rtlCol="0" anchor="t" wrap="square" lIns="228600" tIns="164592"/>
+          <a:lstStyle/>
+          <a:p>
+            <a:pPr algn="l"/>
+            <a:r>
+              <a:rPr sz="1400" b="0">
+                <a:solidFill>
+                  <a:srgbClr val="1B2B34"/>
+                </a:solidFill>
+                <a:latin typeface="Consolas"/>
+              </a:rPr>
+              <a:t>matrix:</a:t>
+            </a:r>
+          </a:p>
+          <a:p>
+            <a:pPr algn="l"/>
+            <a:r>
+              <a:rPr sz="1400" b="0">
+                <a:solidFill>
+                  <a:srgbClr val="1B2B34"/>
+                </a:solidFill>
+                <a:latin typeface="Consolas"/>
+              </a:rPr>
+              <a:t>  scheduler: pbs</a:t>
+            </a:r>
+          </a:p>
+          <a:p>
+            <a:pPr algn="l"/>
+            <a:r>
+              <a:rPr sz="1400" b="0">
+                <a:solidFill>
+                  <a:srgbClr val="1B2B34"/>
+                </a:solidFill>
+                <a:latin typeface="Consolas"/>
+              </a:rPr>
+              <a:t>  schedule:</a:t>
+            </a:r>
+          </a:p>
+          <a:p>
+            <a:pPr algn="l"/>
+            <a:r>
+              <a:rPr sz="1400" b="0">
+                <a:solidFill>
+                  <a:srgbClr val="1B2B34"/>
+                </a:solidFill>
+                <a:latin typeface="Consolas"/>
+              </a:rPr>
+              <a:t>    share_allocation: false      # one PBS job per instance</a:t>
+            </a:r>
+          </a:p>
+          <a:p>
+            <a:pPr algn="l"/>
+            <a:r>
+              <a:rPr sz="1400" b="0">
+                <a:solidFill>
+                  <a:srgbClr val="1B2B34"/>
+                </a:solidFill>
+                <a:latin typeface="Consolas"/>
+              </a:rPr>
+              <a:t>    pbs: { queue: workq, nodes: 1, walltime: '00:02:00' }</a:t>
+            </a:r>
+          </a:p>
+          <a:p>
+            <a:pPr algn="l"/>
+            <a:r>
+              <a:rPr sz="1400" b="0">
+                <a:solidFill>
+                  <a:srgbClr val="1B2B34"/>
+                </a:solidFill>
+                <a:latin typeface="Consolas"/>
+              </a:rPr>
+              <a:t>  permute_on: [size, mode]</a:t>
+            </a:r>
+          </a:p>
+          <a:p>
+            <a:pPr algn="l"/>
+            <a:r>
+              <a:rPr sz="1400" b="0">
+                <a:solidFill>
+                  <a:srgbClr val="1B2B34"/>
+                </a:solidFill>
+                <a:latin typeface="Consolas"/>
+              </a:rPr>
+              <a:t>  variables:</a:t>
+            </a:r>
+          </a:p>
+          <a:p>
+            <a:pPr algn="l"/>
+            <a:r>
+              <a:rPr sz="1400" b="0">
+                <a:solidFill>
+                  <a:srgbClr val="1B2B34"/>
+                </a:solidFill>
+                <a:latin typeface="Consolas"/>
+              </a:rPr>
+              <a:t>    size: ['small', 'medium', 'large']</a:t>
+            </a:r>
+          </a:p>
+          <a:p>
+            <a:pPr algn="l"/>
+            <a:r>
+              <a:rPr sz="1400" b="0">
+                <a:solidFill>
+                  <a:srgbClr val="1B2B34"/>
+                </a:solidFill>
+                <a:latin typeface="Consolas"/>
+              </a:rPr>
+              <a:t>    mode: ['read', 'write']</a:t>
+            </a:r>
+          </a:p>
+          <a:p>
+            <a:pPr algn="l"/>
+            <a:r>
+              <a:rPr sz="1400" b="0">
+                <a:solidFill>
+                  <a:srgbClr val="1B2B34"/>
+                </a:solidFill>
+                <a:latin typeface="Consolas"/>
+              </a:rPr>
+              <a:t>  subtitle: '{{size}}-{{mode}}'</a:t>
+            </a:r>
+          </a:p>
+          <a:p>
+            <a:pPr algn="l"/>
+            <a:r>
+              <a:rPr sz="1400" b="0">
+                <a:solidFill>
+                  <a:srgbClr val="1B2B34"/>
+                </a:solidFill>
+                <a:latin typeface="Consolas"/>
+              </a:rPr>
+              <a:t>  run:</a:t>
+            </a:r>
+          </a:p>
+          <a:p>
+            <a:pPr algn="l"/>
+            <a:r>
+              <a:rPr sz="1400" b="0">
+                <a:solidFill>
+                  <a:srgbClr val="1B2B34"/>
+                </a:solidFill>
+                <a:latin typeface="Consolas"/>
+              </a:rPr>
+              <a:t>    cmds:</a:t>
+            </a:r>
+          </a:p>
+          <a:p>
+            <a:pPr algn="l"/>
+            <a:r>
+              <a:rPr sz="1400" b="0">
+                <a:solidFill>
+                  <a:srgbClr val="1B2B34"/>
+                </a:solidFill>
+                <a:latin typeface="Consolas"/>
+              </a:rPr>
+              <a:t>      - 'echo "size={{size}} mode={{mode}}"'</a:t>
+            </a:r>
+          </a:p>
+          <a:p>
+            <a:pPr algn="l"/>
+            <a:r>
+              <a:rPr sz="1400" b="0">
+                <a:solidFill>
+                  <a:srgbClr val="1B2B34"/>
+                </a:solidFill>
+                <a:latin typeface="Consolas"/>
+              </a:rPr>
+              <a:t> </a:t>
+            </a:r>
+          </a:p>
+          <a:p>
+            <a:pPr algn="l"/>
+            <a:r>
+              <a:rPr sz="1400" b="0">
+                <a:solidFill>
+                  <a:srgbClr val="5B6674"/>
+                </a:solidFill>
+                <a:latin typeface="Consolas"/>
+              </a:rPr>
+              <a:t># 3 sizes x 2 modes  =&gt;  6 test instances, 6 PBS jobs.</a:t>
             </a:r>
           </a:p>
         </p:txBody>
@@ -11523,7 +11679,7 @@
                 </a:solidFill>
                 <a:latin typeface="Arial"/>
               </a:rPr>
-              <a:t>SCHEDULERS</a:t>
+              <a:t>LIVE DEMO · L3</a:t>
             </a:r>
           </a:p>
         </p:txBody>
@@ -11557,7 +11713,7 @@
                 </a:solidFill>
                 <a:latin typeface="Arial"/>
               </a:rPr>
-              <a:t>A PBS test</a:t>
+              <a:t>Permutations expand</a:t>
             </a:r>
           </a:p>
         </p:txBody>
@@ -11613,8 +11769,60 @@
         </p:nvSpPr>
         <p:spPr>
           <a:xfrm>
-            <a:off x="640080" y="1783080"/>
-            <a:ext cx="10972800" cy="4206240"/>
+            <a:off x="8503920" y="457200"/>
+            <a:ext cx="3108960" cy="502920"/>
+          </a:xfrm>
+          <a:prstGeom prst="rect">
+            <a:avLst/>
+          </a:prstGeom>
+          <a:solidFill>
+            <a:srgbClr val="2E6DA4"/>
+          </a:solidFill>
+          <a:ln>
+            <a:noFill/>
+          </a:ln>
+        </p:spPr>
+        <p:style>
+          <a:lnRef idx="1">
+            <a:schemeClr val="accent1"/>
+          </a:lnRef>
+          <a:fillRef idx="3">
+            <a:schemeClr val="accent1"/>
+          </a:fillRef>
+          <a:effectRef idx="2">
+            <a:schemeClr val="accent1"/>
+          </a:effectRef>
+          <a:fontRef idx="minor">
+            <a:schemeClr val="lt1"/>
+          </a:fontRef>
+        </p:style>
+        <p:txBody>
+          <a:bodyPr rtlCol="0" anchor="ctr" wrap="square"/>
+          <a:lstStyle/>
+          <a:p>
+            <a:pPr algn="ctr"/>
+            <a:r>
+              <a:rPr sz="1300" b="1">
+                <a:solidFill>
+                  <a:srgbClr val="FFFFFF"/>
+                </a:solidFill>
+                <a:latin typeface="Arial"/>
+              </a:rPr>
+              <a:t>▶  03-permutations.sh</a:t>
+            </a:r>
+          </a:p>
+        </p:txBody>
+      </p:sp>
+      <p:sp>
+        <p:nvSpPr>
+          <p:cNvPr id="6" name="Rectangle 5"/>
+          <p:cNvSpPr/>
+          <p:nvPr/>
+        </p:nvSpPr>
+        <p:spPr>
+          <a:xfrm>
+            <a:off x="640080" y="1645920"/>
+            <a:ext cx="10972800" cy="4343400"/>
           </a:xfrm>
           <a:prstGeom prst="rect">
             <a:avLst/>
@@ -11643,150 +11851,268 @@
           </a:fontRef>
         </p:style>
         <p:txBody>
-          <a:bodyPr rtlCol="0" anchor="t" wrap="square" lIns="228600" tIns="164592"/>
-          <a:lstStyle/>
-          <a:p>
-            <a:pPr algn="l"/>
+          <a:bodyPr rtlCol="0" anchor="t" wrap="square" lIns="228600" tIns="146304"/>
+          <a:lstStyle/>
+          <a:p>
+            <a:pPr algn="l"/>
+            <a:r>
+              <a:rPr sz="1400" b="1">
+                <a:solidFill>
+                  <a:srgbClr val="2E6DA4"/>
+                </a:solidFill>
+                <a:latin typeface="Consolas"/>
+              </a:rPr>
+              <a:t>$ pav run demo_perms.matrix</a:t>
+            </a:r>
+          </a:p>
+          <a:p>
+            <a:pPr algn="l"/>
+            <a:r>
+              <a:rPr sz="1250" b="0">
+                <a:solidFill>
+                  <a:srgbClr val="1B2B34"/>
+                </a:solidFill>
+                <a:latin typeface="Consolas"/>
+              </a:rPr>
+              <a:t>Test set 'demo_perms.matrix' created 6 tests, skipped 0, 0 errors.</a:t>
+            </a:r>
+          </a:p>
+          <a:p>
+            <a:pPr algn="l"/>
+            <a:r>
+              <a:rPr sz="1250" b="0">
+                <a:solidFill>
+                  <a:srgbClr val="1B2B34"/>
+                </a:solidFill>
+                <a:latin typeface="Consolas"/>
+              </a:rPr>
+              <a:t>sid: s93</a:t>
+            </a:r>
+          </a:p>
+          <a:p>
+            <a:pPr algn="l"/>
+            <a:r>
+              <a:rPr sz="1250" b="0">
+                <a:solidFill>
+                  <a:srgbClr val="1B2B34"/>
+                </a:solidFill>
+                <a:latin typeface="Consolas"/>
+              </a:rPr>
+              <a:t> </a:t>
+            </a:r>
+          </a:p>
+          <a:p>
+            <a:pPr algn="l"/>
+            <a:r>
+              <a:rPr sz="1400" b="1">
+                <a:solidFill>
+                  <a:srgbClr val="2E6DA4"/>
+                </a:solidFill>
+                <a:latin typeface="Consolas"/>
+              </a:rPr>
+              <a:t>$ qstat -a                        # SIX PBS jobs — one per permutation</a:t>
+            </a:r>
+          </a:p>
+          <a:p>
+            <a:pPr algn="l"/>
+            <a:r>
+              <a:rPr sz="1250" b="0">
+                <a:solidFill>
+                  <a:srgbClr val="1B2B34"/>
+                </a:solidFill>
+                <a:latin typeface="Consolas"/>
+              </a:rPr>
+              <a:t>8400.pbs-server pavilion workq pav_demo_*  1  1  R</a:t>
+            </a:r>
+          </a:p>
+          <a:p>
+            <a:pPr algn="l"/>
+            <a:r>
+              <a:rPr sz="1250" b="0">
+                <a:solidFill>
+                  <a:srgbClr val="1B2B34"/>
+                </a:solidFill>
+                <a:latin typeface="Consolas"/>
+              </a:rPr>
+              <a:t>8401.pbs-server pavilion workq pav_demo_*  1  1  R</a:t>
+            </a:r>
+          </a:p>
+          <a:p>
+            <a:pPr algn="l"/>
+            <a:r>
+              <a:rPr sz="1250" b="0">
+                <a:solidFill>
+                  <a:srgbClr val="1B2B34"/>
+                </a:solidFill>
+                <a:latin typeface="Consolas"/>
+              </a:rPr>
+              <a:t>8402.pbs-server pavilion workq pav_demo_*  1  1  Q</a:t>
+            </a:r>
+          </a:p>
+          <a:p>
+            <a:pPr algn="l"/>
+            <a:r>
+              <a:rPr sz="1250" b="0">
+                <a:solidFill>
+                  <a:srgbClr val="1B2B34"/>
+                </a:solidFill>
+                <a:latin typeface="Consolas"/>
+              </a:rPr>
+              <a:t>8403.pbs-server pavilion workq pav_demo_*  1  1  Q</a:t>
+            </a:r>
+          </a:p>
+          <a:p>
+            <a:pPr algn="l"/>
+            <a:r>
+              <a:rPr sz="1250" b="0">
+                <a:solidFill>
+                  <a:srgbClr val="1B2B34"/>
+                </a:solidFill>
+                <a:latin typeface="Consolas"/>
+              </a:rPr>
+              <a:t>8404.pbs-server pavilion workq pav_demo_*  1  1  Q</a:t>
+            </a:r>
+          </a:p>
+          <a:p>
+            <a:pPr algn="l"/>
+            <a:r>
+              <a:rPr sz="1250" b="0">
+                <a:solidFill>
+                  <a:srgbClr val="1B2B34"/>
+                </a:solidFill>
+                <a:latin typeface="Consolas"/>
+              </a:rPr>
+              <a:t>8405.pbs-server pavilion workq pav_demo_*  1  1  Q</a:t>
+            </a:r>
+          </a:p>
+          <a:p>
+            <a:pPr algn="l"/>
+            <a:r>
+              <a:rPr sz="1250" b="0">
+                <a:solidFill>
+                  <a:srgbClr val="1B2B34"/>
+                </a:solidFill>
+                <a:latin typeface="Consolas"/>
+              </a:rPr>
+              <a:t> </a:t>
+            </a:r>
+          </a:p>
+          <a:p>
+            <a:pPr algn="l"/>
+            <a:r>
+              <a:rPr sz="1400" b="1">
+                <a:solidFill>
+                  <a:srgbClr val="2E6DA4"/>
+                </a:solidFill>
+                <a:latin typeface="Consolas"/>
+              </a:rPr>
+              <a:t>$ pav status s93                  # each instance = its own job id</a:t>
+            </a:r>
+          </a:p>
+          <a:p>
+            <a:pPr algn="l"/>
+            <a:r>
+              <a:rPr sz="1250" b="0">
+                <a:solidFill>
+                  <a:srgbClr val="1E7D3C"/>
+                </a:solidFill>
+                <a:latin typeface="Consolas"/>
+              </a:rPr>
+              <a:t>s93.1 | 8400_pbs-server | demo_perms.matrix.small-read  | PASS</a:t>
+            </a:r>
+          </a:p>
+          <a:p>
+            <a:pPr algn="l"/>
+            <a:r>
+              <a:rPr sz="1250" b="0">
+                <a:solidFill>
+                  <a:srgbClr val="1E7D3C"/>
+                </a:solidFill>
+                <a:latin typeface="Consolas"/>
+              </a:rPr>
+              <a:t>s93.2 | 8401_pbs-server | demo_perms.matrix.medium-read | PASS</a:t>
+            </a:r>
+          </a:p>
+          <a:p>
+            <a:pPr algn="l"/>
+            <a:r>
+              <a:rPr sz="1250" b="0">
+                <a:solidFill>
+                  <a:srgbClr val="1E7D3C"/>
+                </a:solidFill>
+                <a:latin typeface="Consolas"/>
+              </a:rPr>
+              <a:t>s93.3 | 8402_pbs-server | demo_perms.matrix.large-read  | PASS</a:t>
+            </a:r>
+          </a:p>
+          <a:p>
+            <a:pPr algn="l"/>
+            <a:r>
+              <a:rPr sz="1250" b="0">
+                <a:solidFill>
+                  <a:srgbClr val="1E7D3C"/>
+                </a:solidFill>
+                <a:latin typeface="Consolas"/>
+              </a:rPr>
+              <a:t>s93.4 | 8403_pbs-server | demo_perms.matrix.small-write | PASS</a:t>
+            </a:r>
+          </a:p>
+          <a:p>
+            <a:pPr algn="l"/>
+            <a:r>
+              <a:rPr sz="1250" b="0">
+                <a:solidFill>
+                  <a:srgbClr val="1E7D3C"/>
+                </a:solidFill>
+                <a:latin typeface="Consolas"/>
+              </a:rPr>
+              <a:t>s93.5 | 8404_pbs-server | demo_perms.matrix.medium-write| PASS</a:t>
+            </a:r>
+          </a:p>
+          <a:p>
+            <a:pPr algn="l"/>
+            <a:r>
+              <a:rPr sz="1250" b="0">
+                <a:solidFill>
+                  <a:srgbClr val="1E7D3C"/>
+                </a:solidFill>
+                <a:latin typeface="Consolas"/>
+              </a:rPr>
+              <a:t>s93.6 | 8405_pbs-server | demo_perms.matrix.large-write | PASS</a:t>
+            </a:r>
+          </a:p>
+        </p:txBody>
+      </p:sp>
+      <p:sp>
+        <p:nvSpPr>
+          <p:cNvPr id="7" name="TextBox 6"/>
+          <p:cNvSpPr txBox="1"/>
+          <p:nvPr/>
+        </p:nvSpPr>
+        <p:spPr>
+          <a:xfrm>
+            <a:off x="640080" y="6144768"/>
+            <a:ext cx="10972800" cy="502920"/>
+          </a:xfrm>
+          <a:prstGeom prst="rect">
+            <a:avLst/>
+          </a:prstGeom>
+          <a:noFill/>
+        </p:spPr>
+        <p:txBody>
+          <a:bodyPr wrap="square">
+            <a:spAutoFit/>
+          </a:bodyPr>
+          <a:lstStyle/>
+          <a:p>
             <a:r>
               <a:rPr sz="1400" b="0">
                 <a:solidFill>
                   <a:srgbClr val="5B6674"/>
                 </a:solidFill>
-                <a:latin typeface="Consolas"/>
-              </a:rPr>
-              <a:t># demo_pbs.yaml  -&gt;  address it as  demo_pbs.pass</a:t>
-            </a:r>
-          </a:p>
-          <a:p>
-            <a:pPr algn="l"/>
-            <a:r>
-              <a:rPr sz="1400" b="0">
-                <a:solidFill>
-                  <a:srgbClr val="1B2B34"/>
-                </a:solidFill>
-                <a:latin typeface="Consolas"/>
-              </a:rPr>
-              <a:t>pass:</a:t>
-            </a:r>
-          </a:p>
-          <a:p>
-            <a:pPr algn="l"/>
-            <a:r>
-              <a:rPr sz="1400" b="0">
-                <a:solidFill>
-                  <a:srgbClr val="1B2B34"/>
-                </a:solidFill>
-                <a:latin typeface="Consolas"/>
-              </a:rPr>
-              <a:t>  scheduler: pbs</a:t>
-            </a:r>
-          </a:p>
-          <a:p>
-            <a:pPr algn="l"/>
-            <a:r>
-              <a:rPr sz="1400" b="0">
-                <a:solidFill>
-                  <a:srgbClr val="1B2B34"/>
-                </a:solidFill>
-                <a:latin typeface="Consolas"/>
-              </a:rPr>
-              <a:t>  schedule:</a:t>
-            </a:r>
-          </a:p>
-          <a:p>
-            <a:pPr algn="l"/>
-            <a:r>
-              <a:rPr sz="1400" b="0">
-                <a:solidFill>
-                  <a:srgbClr val="1B2B34"/>
-                </a:solidFill>
-                <a:latin typeface="Consolas"/>
-              </a:rPr>
-              <a:t>    pbs:</a:t>
-            </a:r>
-          </a:p>
-          <a:p>
-            <a:pPr algn="l"/>
-            <a:r>
-              <a:rPr sz="1400" b="0">
-                <a:solidFill>
-                  <a:srgbClr val="1B2B34"/>
-                </a:solidFill>
-                <a:latin typeface="Consolas"/>
-              </a:rPr>
-              <a:t>      nodes: 1</a:t>
-            </a:r>
-          </a:p>
-          <a:p>
-            <a:pPr algn="l"/>
-            <a:r>
-              <a:rPr sz="1400" b="0">
-                <a:solidFill>
-                  <a:srgbClr val="1B2B34"/>
-                </a:solidFill>
-                <a:latin typeface="Consolas"/>
-              </a:rPr>
-              <a:t>      tasks: 1</a:t>
-            </a:r>
-          </a:p>
-          <a:p>
-            <a:pPr algn="l"/>
-            <a:r>
-              <a:rPr sz="1400" b="0">
-                <a:solidFill>
-                  <a:srgbClr val="1B2B34"/>
-                </a:solidFill>
-                <a:latin typeface="Consolas"/>
-              </a:rPr>
-              <a:t>      walltime: '00:00:30'</a:t>
-            </a:r>
-          </a:p>
-          <a:p>
-            <a:pPr algn="l"/>
-            <a:r>
-              <a:rPr sz="1400" b="0">
-                <a:solidFill>
-                  <a:srgbClr val="1B2B34"/>
-                </a:solidFill>
-                <a:latin typeface="Consolas"/>
-              </a:rPr>
-              <a:t>      queue: workq</a:t>
-            </a:r>
-          </a:p>
-          <a:p>
-            <a:pPr algn="l"/>
-            <a:r>
-              <a:rPr sz="1400" b="0">
-                <a:solidFill>
-                  <a:srgbClr val="1B2B34"/>
-                </a:solidFill>
-                <a:latin typeface="Consolas"/>
-              </a:rPr>
-              <a:t>  run:</a:t>
-            </a:r>
-          </a:p>
-          <a:p>
-            <a:pPr algn="l"/>
-            <a:r>
-              <a:rPr sz="1400" b="0">
-                <a:solidFill>
-                  <a:srgbClr val="1B2B34"/>
-                </a:solidFill>
-                <a:latin typeface="Consolas"/>
-              </a:rPr>
-              <a:t>    cmds:</a:t>
-            </a:r>
-          </a:p>
-          <a:p>
-            <a:pPr algn="l"/>
-            <a:r>
-              <a:rPr sz="1400" b="0">
-                <a:solidFill>
-                  <a:srgbClr val="1B2B34"/>
-                </a:solidFill>
-                <a:latin typeface="Consolas"/>
-              </a:rPr>
-              <a:t>      - 'echo "pbs job on $(hostname)"'</a:t>
+                <a:latin typeface="Arial"/>
+              </a:rPr>
+              <a:t>One YAML block → six PBS jobs (8400–8405), one per permutation — some run, the rest queue.</a:t>
             </a:r>
           </a:p>
         </p:txBody>
@@ -11811,88 +12137,20 @@
       <p:grpSpPr/>
       <p:sp>
         <p:nvSpPr>
-          <p:cNvPr id="2" name="TextBox 1"/>
-          <p:cNvSpPr txBox="1"/>
-          <p:nvPr/>
-        </p:nvSpPr>
-        <p:spPr>
-          <a:xfrm>
-            <a:off x="548640" y="320040"/>
-            <a:ext cx="7680960" cy="365760"/>
-          </a:xfrm>
-          <a:prstGeom prst="rect">
-            <a:avLst/>
-          </a:prstGeom>
-          <a:noFill/>
-        </p:spPr>
-        <p:txBody>
-          <a:bodyPr wrap="square">
-            <a:spAutoFit/>
-          </a:bodyPr>
-          <a:lstStyle/>
-          <a:p>
-            <a:r>
-              <a:rPr sz="1200" b="1">
-                <a:solidFill>
-                  <a:srgbClr val="2E6DA4"/>
-                </a:solidFill>
-                <a:latin typeface="Arial"/>
-              </a:rPr>
-              <a:t>LIVE DEMO · L4</a:t>
-            </a:r>
-          </a:p>
-        </p:txBody>
-      </p:sp>
-      <p:sp>
-        <p:nvSpPr>
-          <p:cNvPr id="3" name="TextBox 2"/>
-          <p:cNvSpPr txBox="1"/>
-          <p:nvPr/>
-        </p:nvSpPr>
-        <p:spPr>
-          <a:xfrm>
-            <a:off x="548640" y="640080"/>
-            <a:ext cx="11064240" cy="822960"/>
-          </a:xfrm>
-          <a:prstGeom prst="rect">
-            <a:avLst/>
-          </a:prstGeom>
-          <a:noFill/>
-        </p:spPr>
-        <p:txBody>
-          <a:bodyPr wrap="square">
-            <a:spAutoFit/>
-          </a:bodyPr>
-          <a:lstStyle/>
-          <a:p>
-            <a:r>
-              <a:rPr sz="3000" b="1">
-                <a:solidFill>
-                  <a:srgbClr val="1F3B63"/>
-                </a:solidFill>
-                <a:latin typeface="Arial"/>
-              </a:rPr>
-              <a:t>Submit to PBS</a:t>
-            </a:r>
-          </a:p>
-        </p:txBody>
-      </p:sp>
-      <p:sp>
-        <p:nvSpPr>
-          <p:cNvPr id="4" name="Rectangle 3"/>
+          <p:cNvPr id="2" name="Rectangle 1"/>
           <p:cNvSpPr/>
           <p:nvPr/>
         </p:nvSpPr>
         <p:spPr>
           <a:xfrm>
-            <a:off x="566928" y="1417320"/>
-            <a:ext cx="2011680" cy="38100"/>
+            <a:off x="0" y="2651760"/>
+            <a:ext cx="12191695" cy="1554480"/>
           </a:xfrm>
           <a:prstGeom prst="rect">
             <a:avLst/>
           </a:prstGeom>
           <a:solidFill>
-            <a:srgbClr val="2E6DA4"/>
+            <a:srgbClr val="EEF2F7"/>
           </a:solidFill>
           <a:ln>
             <a:noFill/>
@@ -11922,252 +12180,14 @@
       </p:sp>
       <p:sp>
         <p:nvSpPr>
-          <p:cNvPr id="5" name="Rectangle 4"/>
-          <p:cNvSpPr/>
-          <p:nvPr/>
-        </p:nvSpPr>
-        <p:spPr>
-          <a:xfrm>
-            <a:off x="8503920" y="457200"/>
-            <a:ext cx="3108960" cy="502920"/>
-          </a:xfrm>
-          <a:prstGeom prst="rect">
-            <a:avLst/>
-          </a:prstGeom>
-          <a:solidFill>
-            <a:srgbClr val="2E6DA4"/>
-          </a:solidFill>
-          <a:ln>
-            <a:noFill/>
-          </a:ln>
-        </p:spPr>
-        <p:style>
-          <a:lnRef idx="1">
-            <a:schemeClr val="accent1"/>
-          </a:lnRef>
-          <a:fillRef idx="3">
-            <a:schemeClr val="accent1"/>
-          </a:fillRef>
-          <a:effectRef idx="2">
-            <a:schemeClr val="accent1"/>
-          </a:effectRef>
-          <a:fontRef idx="minor">
-            <a:schemeClr val="lt1"/>
-          </a:fontRef>
-        </p:style>
-        <p:txBody>
-          <a:bodyPr rtlCol="0" anchor="ctr" wrap="square"/>
-          <a:lstStyle/>
-          <a:p>
-            <a:pPr algn="ctr"/>
-            <a:r>
-              <a:rPr sz="1300" b="1">
-                <a:solidFill>
-                  <a:srgbClr val="FFFFFF"/>
-                </a:solidFill>
-                <a:latin typeface="Arial"/>
-              </a:rPr>
-              <a:t>▶  04-pbs.sh</a:t>
-            </a:r>
-          </a:p>
-        </p:txBody>
-      </p:sp>
-      <p:sp>
-        <p:nvSpPr>
-          <p:cNvPr id="6" name="Rectangle 5"/>
-          <p:cNvSpPr/>
-          <p:nvPr/>
-        </p:nvSpPr>
-        <p:spPr>
-          <a:xfrm>
-            <a:off x="640080" y="1645920"/>
-            <a:ext cx="10972800" cy="4343400"/>
-          </a:xfrm>
-          <a:prstGeom prst="rect">
-            <a:avLst/>
-          </a:prstGeom>
-          <a:solidFill>
-            <a:srgbClr val="F3F4F6"/>
-          </a:solidFill>
-          <a:ln w="12700">
-            <a:solidFill>
-              <a:srgbClr val="D5DAE0"/>
-            </a:solidFill>
-          </a:ln>
-        </p:spPr>
-        <p:style>
-          <a:lnRef idx="1">
-            <a:schemeClr val="accent1"/>
-          </a:lnRef>
-          <a:fillRef idx="3">
-            <a:schemeClr val="accent1"/>
-          </a:fillRef>
-          <a:effectRef idx="2">
-            <a:schemeClr val="accent1"/>
-          </a:effectRef>
-          <a:fontRef idx="minor">
-            <a:schemeClr val="lt1"/>
-          </a:fontRef>
-        </p:style>
-        <p:txBody>
-          <a:bodyPr rtlCol="0" anchor="t" wrap="square" lIns="228600" tIns="146304"/>
-          <a:lstStyle/>
-          <a:p>
-            <a:pPr algn="l"/>
-            <a:r>
-              <a:rPr sz="1400" b="1">
-                <a:solidFill>
-                  <a:srgbClr val="2E6DA4"/>
-                </a:solidFill>
-                <a:latin typeface="Consolas"/>
-              </a:rPr>
-              <a:t>$ pav run demo_pbs.pass</a:t>
-            </a:r>
-          </a:p>
-          <a:p>
-            <a:pPr algn="l"/>
-            <a:r>
-              <a:rPr sz="1250" b="0">
-                <a:solidFill>
-                  <a:srgbClr val="1B2B34"/>
-                </a:solidFill>
-                <a:latin typeface="Consolas"/>
-              </a:rPr>
-              <a:t>sid: s76</a:t>
-            </a:r>
-          </a:p>
-          <a:p>
-            <a:pPr algn="l"/>
-            <a:r>
-              <a:rPr sz="1250" b="0">
-                <a:solidFill>
-                  <a:srgbClr val="1B2B34"/>
-                </a:solidFill>
-                <a:latin typeface="Consolas"/>
-              </a:rPr>
-              <a:t>tests: 1</a:t>
-            </a:r>
-          </a:p>
-          <a:p>
-            <a:pPr algn="l"/>
-            <a:r>
-              <a:rPr sz="1250" b="0">
-                <a:solidFill>
-                  <a:srgbClr val="1B2B34"/>
-                </a:solidFill>
-                <a:latin typeface="Consolas"/>
-              </a:rPr>
-              <a:t> </a:t>
-            </a:r>
-          </a:p>
-          <a:p>
-            <a:pPr algn="l"/>
-            <a:r>
-              <a:rPr sz="1400" b="1">
-                <a:solidFill>
-                  <a:srgbClr val="2E6DA4"/>
-                </a:solidFill>
-                <a:latin typeface="Consolas"/>
-              </a:rPr>
-              <a:t>$ pav status s76           # Pavilion: it's running</a:t>
-            </a:r>
-          </a:p>
-          <a:p>
-            <a:pPr algn="l"/>
-            <a:r>
-              <a:rPr sz="1250" b="0">
-                <a:solidFill>
-                  <a:srgbClr val="1B2B34"/>
-                </a:solidFill>
-                <a:latin typeface="Consolas"/>
-              </a:rPr>
-              <a:t>s76.1 | 8390_pbs-server | demo_pbs.pass | RUNNING</a:t>
-            </a:r>
-          </a:p>
-          <a:p>
-            <a:pPr algn="l"/>
-            <a:r>
-              <a:rPr sz="1250" b="0">
-                <a:solidFill>
-                  <a:srgbClr val="1B2B34"/>
-                </a:solidFill>
-                <a:latin typeface="Consolas"/>
-              </a:rPr>
-              <a:t> </a:t>
-            </a:r>
-          </a:p>
-          <a:p>
-            <a:pPr algn="l"/>
-            <a:r>
-              <a:rPr sz="1400" b="1">
-                <a:solidFill>
-                  <a:srgbClr val="2E6DA4"/>
-                </a:solidFill>
-                <a:latin typeface="Consolas"/>
-              </a:rPr>
-              <a:t>$ qstat -a                 # PBS: the same job, state R</a:t>
-            </a:r>
-          </a:p>
-          <a:p>
-            <a:pPr algn="l"/>
-            <a:r>
-              <a:rPr sz="1250" b="0">
-                <a:solidFill>
-                  <a:srgbClr val="1B2B34"/>
-                </a:solidFill>
-                <a:latin typeface="Consolas"/>
-              </a:rPr>
-              <a:t>8390.pbs-server  pavilion  workq  pav_demo_*  1  1  R</a:t>
-            </a:r>
-          </a:p>
-          <a:p>
-            <a:pPr algn="l"/>
-            <a:r>
-              <a:rPr sz="1250" b="0">
-                <a:solidFill>
-                  <a:srgbClr val="1B2B34"/>
-                </a:solidFill>
-                <a:latin typeface="Consolas"/>
-              </a:rPr>
-              <a:t> </a:t>
-            </a:r>
-          </a:p>
-          <a:p>
-            <a:pPr algn="l"/>
-            <a:r>
-              <a:rPr sz="1400" b="1">
-                <a:solidFill>
-                  <a:srgbClr val="2E6DA4"/>
-                </a:solidFill>
-                <a:latin typeface="Consolas"/>
-              </a:rPr>
-              <a:t>$ pav results s76          # once it finishes</a:t>
-            </a:r>
-          </a:p>
-          <a:p>
-            <a:pPr algn="l"/>
-            <a:r>
-              <a:rPr sz="1250" b="0">
-                <a:solidFill>
-                  <a:srgbClr val="1E7D3C"/>
-                </a:solidFill>
-                <a:latin typeface="Consolas"/>
-              </a:rPr>
-              <a:t>s76.1 | demo_pbs.pass | COMPLETE | PASS</a:t>
-            </a:r>
-          </a:p>
-        </p:txBody>
-      </p:sp>
-      <p:sp>
-        <p:nvSpPr>
-          <p:cNvPr id="7" name="TextBox 6"/>
+          <p:cNvPr id="3" name="TextBox 2"/>
           <p:cNvSpPr txBox="1"/>
           <p:nvPr/>
         </p:nvSpPr>
         <p:spPr>
           <a:xfrm>
-            <a:off x="640080" y="6144768"/>
-            <a:ext cx="10972800" cy="502920"/>
+            <a:off x="731520" y="2834640"/>
+            <a:ext cx="10698480" cy="1188720"/>
           </a:xfrm>
           <a:prstGeom prst="rect">
             <a:avLst/>
@@ -12181,13 +12201,24 @@
           <a:lstStyle/>
           <a:p>
             <a:r>
-              <a:rPr sz="1400" b="0">
-                <a:solidFill>
-                  <a:srgbClr val="5B6674"/>
-                </a:solidFill>
-                <a:latin typeface="Arial"/>
-              </a:rPr>
-              <a:t>Submitted → running (seen in Pavilion AND PBS) → PASS on a compute node.</a:t>
+              <a:rPr sz="1300" b="1">
+                <a:solidFill>
+                  <a:srgbClr val="2E6DA4"/>
+                </a:solidFill>
+                <a:latin typeface="Arial"/>
+              </a:rPr>
+              <a:t>RUNNING AT SCALE</a:t>
+            </a:r>
+          </a:p>
+          <a:p>
+            <a:r>
+              <a:rPr sz="3600" b="1">
+                <a:solidFill>
+                  <a:srgbClr val="1F3B63"/>
+                </a:solidFill>
+                <a:latin typeface="Arial"/>
+              </a:rPr>
+              <a:t>Schedulers</a:t>
             </a:r>
           </a:p>
         </p:txBody>
@@ -12212,20 +12243,88 @@
       <p:grpSpPr/>
       <p:sp>
         <p:nvSpPr>
-          <p:cNvPr id="2" name="Rectangle 1"/>
+          <p:cNvPr id="2" name="TextBox 1"/>
+          <p:cNvSpPr txBox="1"/>
+          <p:nvPr/>
+        </p:nvSpPr>
+        <p:spPr>
+          <a:xfrm>
+            <a:off x="548640" y="320040"/>
+            <a:ext cx="7680960" cy="365760"/>
+          </a:xfrm>
+          <a:prstGeom prst="rect">
+            <a:avLst/>
+          </a:prstGeom>
+          <a:noFill/>
+        </p:spPr>
+        <p:txBody>
+          <a:bodyPr wrap="square">
+            <a:spAutoFit/>
+          </a:bodyPr>
+          <a:lstStyle/>
+          <a:p>
+            <a:r>
+              <a:rPr sz="1200" b="1">
+                <a:solidFill>
+                  <a:srgbClr val="2E6DA4"/>
+                </a:solidFill>
+                <a:latin typeface="Arial"/>
+              </a:rPr>
+              <a:t>SCHEDULERS</a:t>
+            </a:r>
+          </a:p>
+        </p:txBody>
+      </p:sp>
+      <p:sp>
+        <p:nvSpPr>
+          <p:cNvPr id="3" name="TextBox 2"/>
+          <p:cNvSpPr txBox="1"/>
+          <p:nvPr/>
+        </p:nvSpPr>
+        <p:spPr>
+          <a:xfrm>
+            <a:off x="548640" y="640080"/>
+            <a:ext cx="11064240" cy="822960"/>
+          </a:xfrm>
+          <a:prstGeom prst="rect">
+            <a:avLst/>
+          </a:prstGeom>
+          <a:noFill/>
+        </p:spPr>
+        <p:txBody>
+          <a:bodyPr wrap="square">
+            <a:spAutoFit/>
+          </a:bodyPr>
+          <a:lstStyle/>
+          <a:p>
+            <a:r>
+              <a:rPr sz="3000" b="1">
+                <a:solidFill>
+                  <a:srgbClr val="1F3B63"/>
+                </a:solidFill>
+                <a:latin typeface="Arial"/>
+              </a:rPr>
+              <a:t>Schedulers &amp; the PBS plugin</a:t>
+            </a:r>
+          </a:p>
+        </p:txBody>
+      </p:sp>
+      <p:sp>
+        <p:nvSpPr>
+          <p:cNvPr id="4" name="Rectangle 3"/>
           <p:cNvSpPr/>
           <p:nvPr/>
         </p:nvSpPr>
         <p:spPr>
           <a:xfrm>
-            <a:off x="0" y="2651760"/>
-            <a:ext cx="12191695" cy="1554480"/>
+            <a:off x="566928" y="1417320"/>
+            <a:ext cx="2011680" cy="38100"/>
           </a:xfrm>
           <a:prstGeom prst="rect">
             <a:avLst/>
           </a:prstGeom>
           <a:solidFill>
-            <a:srgbClr val="EEF2F7"/>
+            <a:srgbClr val="2E6DA4"/>
           </a:solidFill>
           <a:ln>
             <a:noFill/>
@@ -12255,14 +12354,14 @@
       </p:sp>
       <p:sp>
         <p:nvSpPr>
-          <p:cNvPr id="3" name="TextBox 2"/>
+          <p:cNvPr id="5" name="TextBox 4"/>
           <p:cNvSpPr txBox="1"/>
           <p:nvPr/>
         </p:nvSpPr>
         <p:spPr>
           <a:xfrm>
-            <a:off x="731520" y="2834640"/>
-            <a:ext cx="10698480" cy="1188720"/>
+            <a:off x="640080" y="1691640"/>
+            <a:ext cx="10972800" cy="4754880"/>
           </a:xfrm>
           <a:prstGeom prst="rect">
             <a:avLst/>
@@ -12275,25 +12374,67 @@
           </a:bodyPr>
           <a:lstStyle/>
           <a:p>
-            <a:r>
-              <a:rPr sz="1300" b="1">
-                <a:solidFill>
-                  <a:srgbClr val="2E6DA4"/>
-                </a:solidFill>
-                <a:latin typeface="Arial"/>
-              </a:rPr>
-              <a:t>REUSABLE OVERLAYS</a:t>
-            </a:r>
-          </a:p>
-          <a:p>
-            <a:r>
-              <a:rPr sz="3600" b="1">
-                <a:solidFill>
-                  <a:srgbClr val="1F3B63"/>
-                </a:solidFill>
-                <a:latin typeface="Arial"/>
-              </a:rPr>
-              <a:t>Modes</a:t>
+            <a:pPr>
+              <a:spcAft>
+                <a:spcPts val="1000"/>
+              </a:spcAft>
+            </a:pPr>
+            <a:r>
+              <a:rPr sz="2000" b="0">
+                <a:solidFill>
+                  <a:srgbClr val="21252B"/>
+                </a:solidFill>
+                <a:latin typeface="Arial"/>
+              </a:rPr>
+              <a:t>•  Built-in scheduler plugins: raw (local), slurm, flux, pbs.</a:t>
+            </a:r>
+          </a:p>
+          <a:p>
+            <a:pPr>
+              <a:spcAft>
+                <a:spcPts val="1000"/>
+              </a:spcAft>
+            </a:pPr>
+            <a:r>
+              <a:rPr sz="2000" b="0">
+                <a:solidFill>
+                  <a:srgbClr val="21252B"/>
+                </a:solidFill>
+                <a:latin typeface="Arial"/>
+              </a:rPr>
+              <a:t>•  Switch by setting `scheduler:` — the test body doesn't change.</a:t>
+            </a:r>
+          </a:p>
+          <a:p>
+            <a:pPr>
+              <a:spcAft>
+                <a:spcPts val="1000"/>
+              </a:spcAft>
+            </a:pPr>
+            <a:r>
+              <a:rPr sz="2000" b="0">
+                <a:solidFill>
+                  <a:srgbClr val="21252B"/>
+                </a:solidFill>
+                <a:latin typeface="Arial"/>
+              </a:rPr>
+              <a:t>•  The PBS plugin (ours) submits real qsub jobs and maps nodes/tasks/walltime/queue.</a:t>
+            </a:r>
+          </a:p>
+          <a:p>
+            <a:pPr>
+              <a:spcAft>
+                <a:spcPts val="1000"/>
+              </a:spcAft>
+            </a:pPr>
+            <a:r>
+              <a:rPr sz="2000" b="0">
+                <a:solidFill>
+                  <a:srgbClr val="21252B"/>
+                </a:solidFill>
+                <a:latin typeface="Arial"/>
+              </a:rPr>
+              <a:t>•  Scheduler variables (sched.*) expose node lists, chunks, task counts to the test.</a:t>
             </a:r>
           </a:p>
         </p:txBody>
@@ -12345,7 +12486,7 @@
                 </a:solidFill>
                 <a:latin typeface="Arial"/>
               </a:rPr>
-              <a:t>MODES</a:t>
+              <a:t>SCHEDULERS</a:t>
             </a:r>
           </a:p>
         </p:txBody>
@@ -12379,7 +12520,7 @@
                 </a:solidFill>
                 <a:latin typeface="Arial"/>
               </a:rPr>
-              <a:t>What a mode is</a:t>
+              <a:t>A PBS test</a:t>
             </a:r>
           </a:p>
         </p:txBody>
@@ -12429,87 +12570,186 @@
       </p:sp>
       <p:sp>
         <p:nvSpPr>
-          <p:cNvPr id="5" name="TextBox 4"/>
-          <p:cNvSpPr txBox="1"/>
-          <p:nvPr/>
-        </p:nvSpPr>
-        <p:spPr>
-          <a:xfrm>
-            <a:off x="640080" y="1691640"/>
-            <a:ext cx="10972800" cy="4754880"/>
-          </a:xfrm>
-          <a:prstGeom prst="rect">
-            <a:avLst/>
-          </a:prstGeom>
-          <a:noFill/>
-        </p:spPr>
-        <p:txBody>
-          <a:bodyPr wrap="square">
-            <a:spAutoFit/>
-          </a:bodyPr>
-          <a:lstStyle/>
-          <a:p>
-            <a:pPr>
-              <a:spcAft>
-                <a:spcPts val="1000"/>
-              </a:spcAft>
-            </a:pPr>
-            <a:r>
-              <a:rPr sz="2000" b="0">
-                <a:solidFill>
-                  <a:srgbClr val="21252B"/>
-                </a:solidFill>
-                <a:latin typeface="Arial"/>
-              </a:rPr>
-              <a:t>•  A mode is a small YAML overlay merged on top of a fully-resolved test.</a:t>
-            </a:r>
-          </a:p>
-          <a:p>
-            <a:pPr>
-              <a:spcAft>
-                <a:spcPts val="1000"/>
-              </a:spcAft>
-            </a:pPr>
-            <a:r>
-              <a:rPr sz="2000" b="0">
-                <a:solidFill>
-                  <a:srgbClr val="21252B"/>
-                </a:solidFill>
-                <a:latin typeface="Arial"/>
-              </a:rPr>
-              <a:t>•  Apply at run time with -m: `pav run -m prod &lt;test&gt;`.</a:t>
-            </a:r>
-          </a:p>
-          <a:p>
-            <a:pPr>
-              <a:spcAft>
-                <a:spcPts val="1000"/>
-              </a:spcAft>
-            </a:pPr>
-            <a:r>
-              <a:rPr sz="2000" b="0">
-                <a:solidFill>
-                  <a:srgbClr val="21252B"/>
-                </a:solidFill>
-                <a:latin typeface="Arial"/>
-              </a:rPr>
-              <a:t>•  Great for: swapping queues, tuning resources, toggling variables — without editing tests.</a:t>
-            </a:r>
-          </a:p>
-          <a:p>
-            <a:pPr>
-              <a:spcAft>
-                <a:spcPts val="1000"/>
-              </a:spcAft>
-            </a:pPr>
-            <a:r>
-              <a:rPr sz="2000" b="0">
-                <a:solidFill>
-                  <a:srgbClr val="21252B"/>
-                </a:solidFill>
-                <a:latin typeface="Arial"/>
-              </a:rPr>
-              <a:t>•  Our demo: the test fails at throughput 1200; a `prod` mode raises it to 1400 → it passes.</a:t>
+          <p:cNvPr id="5" name="Rectangle 4"/>
+          <p:cNvSpPr/>
+          <p:nvPr/>
+        </p:nvSpPr>
+        <p:spPr>
+          <a:xfrm>
+            <a:off x="640080" y="1783080"/>
+            <a:ext cx="10972800" cy="4206240"/>
+          </a:xfrm>
+          <a:prstGeom prst="rect">
+            <a:avLst/>
+          </a:prstGeom>
+          <a:solidFill>
+            <a:srgbClr val="F3F4F6"/>
+          </a:solidFill>
+          <a:ln w="12700">
+            <a:solidFill>
+              <a:srgbClr val="D5DAE0"/>
+            </a:solidFill>
+          </a:ln>
+        </p:spPr>
+        <p:style>
+          <a:lnRef idx="1">
+            <a:schemeClr val="accent1"/>
+          </a:lnRef>
+          <a:fillRef idx="3">
+            <a:schemeClr val="accent1"/>
+          </a:fillRef>
+          <a:effectRef idx="2">
+            <a:schemeClr val="accent1"/>
+          </a:effectRef>
+          <a:fontRef idx="minor">
+            <a:schemeClr val="lt1"/>
+          </a:fontRef>
+        </p:style>
+        <p:txBody>
+          <a:bodyPr rtlCol="0" anchor="t" wrap="square" lIns="228600" tIns="164592"/>
+          <a:lstStyle/>
+          <a:p>
+            <a:pPr algn="l"/>
+            <a:r>
+              <a:rPr sz="1400" b="0">
+                <a:solidFill>
+                  <a:srgbClr val="5B6674"/>
+                </a:solidFill>
+                <a:latin typeface="Consolas"/>
+              </a:rPr>
+              <a:t># demo_pbs.yaml  -&gt;  address it as  demo_pbs.pass</a:t>
+            </a:r>
+          </a:p>
+          <a:p>
+            <a:pPr algn="l"/>
+            <a:r>
+              <a:rPr sz="1400" b="0">
+                <a:solidFill>
+                  <a:srgbClr val="1B2B34"/>
+                </a:solidFill>
+                <a:latin typeface="Consolas"/>
+              </a:rPr>
+              <a:t>pass:</a:t>
+            </a:r>
+          </a:p>
+          <a:p>
+            <a:pPr algn="l"/>
+            <a:r>
+              <a:rPr sz="1400" b="0">
+                <a:solidFill>
+                  <a:srgbClr val="1B2B34"/>
+                </a:solidFill>
+                <a:latin typeface="Consolas"/>
+              </a:rPr>
+              <a:t>  scheduler: pbs</a:t>
+            </a:r>
+          </a:p>
+          <a:p>
+            <a:pPr algn="l"/>
+            <a:r>
+              <a:rPr sz="1400" b="0">
+                <a:solidFill>
+                  <a:srgbClr val="1B2B34"/>
+                </a:solidFill>
+                <a:latin typeface="Consolas"/>
+              </a:rPr>
+              <a:t>  schedule:</a:t>
+            </a:r>
+          </a:p>
+          <a:p>
+            <a:pPr algn="l"/>
+            <a:r>
+              <a:rPr sz="1400" b="0">
+                <a:solidFill>
+                  <a:srgbClr val="1B2B34"/>
+                </a:solidFill>
+                <a:latin typeface="Consolas"/>
+              </a:rPr>
+              <a:t>    pbs:</a:t>
+            </a:r>
+          </a:p>
+          <a:p>
+            <a:pPr algn="l"/>
+            <a:r>
+              <a:rPr sz="1400" b="0">
+                <a:solidFill>
+                  <a:srgbClr val="1B2B34"/>
+                </a:solidFill>
+                <a:latin typeface="Consolas"/>
+              </a:rPr>
+              <a:t>      nodes: 1</a:t>
+            </a:r>
+          </a:p>
+          <a:p>
+            <a:pPr algn="l"/>
+            <a:r>
+              <a:rPr sz="1400" b="0">
+                <a:solidFill>
+                  <a:srgbClr val="1B2B34"/>
+                </a:solidFill>
+                <a:latin typeface="Consolas"/>
+              </a:rPr>
+              <a:t>      tasks: 1</a:t>
+            </a:r>
+          </a:p>
+          <a:p>
+            <a:pPr algn="l"/>
+            <a:r>
+              <a:rPr sz="1400" b="0">
+                <a:solidFill>
+                  <a:srgbClr val="1B2B34"/>
+                </a:solidFill>
+                <a:latin typeface="Consolas"/>
+              </a:rPr>
+              <a:t>      walltime: '00:00:30'</a:t>
+            </a:r>
+          </a:p>
+          <a:p>
+            <a:pPr algn="l"/>
+            <a:r>
+              <a:rPr sz="1400" b="0">
+                <a:solidFill>
+                  <a:srgbClr val="1B2B34"/>
+                </a:solidFill>
+                <a:latin typeface="Consolas"/>
+              </a:rPr>
+              <a:t>      queue: workq</a:t>
+            </a:r>
+          </a:p>
+          <a:p>
+            <a:pPr algn="l"/>
+            <a:r>
+              <a:rPr sz="1400" b="0">
+                <a:solidFill>
+                  <a:srgbClr val="1B2B34"/>
+                </a:solidFill>
+                <a:latin typeface="Consolas"/>
+              </a:rPr>
+              <a:t>  run:</a:t>
+            </a:r>
+          </a:p>
+          <a:p>
+            <a:pPr algn="l"/>
+            <a:r>
+              <a:rPr sz="1400" b="0">
+                <a:solidFill>
+                  <a:srgbClr val="1B2B34"/>
+                </a:solidFill>
+                <a:latin typeface="Consolas"/>
+              </a:rPr>
+              <a:t>    cmds:</a:t>
+            </a:r>
+          </a:p>
+          <a:p>
+            <a:pPr algn="l"/>
+            <a:r>
+              <a:rPr sz="1400" b="0">
+                <a:solidFill>
+                  <a:srgbClr val="1B2B34"/>
+                </a:solidFill>
+                <a:latin typeface="Consolas"/>
+              </a:rPr>
+              <a:t>      - 'echo "pbs job on $(hostname)"'</a:t>
             </a:r>
           </a:p>
         </p:txBody>
@@ -12809,7 +13049,7 @@
                 </a:solidFill>
                 <a:latin typeface="Arial"/>
               </a:rPr>
-              <a:t>MODES</a:t>
+              <a:t>LIVE DEMO · L4</a:t>
             </a:r>
           </a:p>
         </p:txBody>
@@ -12843,7 +13083,7 @@
                 </a:solidFill>
                 <a:latin typeface="Arial"/>
               </a:rPr>
-              <a:t>The test, and a mode that changes its outcome</a:t>
+              <a:t>Submit to PBS</a:t>
             </a:r>
           </a:p>
         </p:txBody>
@@ -12893,34 +13133,52 @@
       </p:sp>
       <p:sp>
         <p:nvSpPr>
-          <p:cNvPr id="5" name="TextBox 4"/>
-          <p:cNvSpPr txBox="1"/>
-          <p:nvPr/>
-        </p:nvSpPr>
-        <p:spPr>
-          <a:xfrm>
-            <a:off x="640080" y="1600200"/>
-            <a:ext cx="10972800" cy="457200"/>
-          </a:xfrm>
-          <a:prstGeom prst="rect">
-            <a:avLst/>
-          </a:prstGeom>
-          <a:noFill/>
-        </p:spPr>
-        <p:txBody>
-          <a:bodyPr wrap="square">
-            <a:spAutoFit/>
-          </a:bodyPr>
-          <a:lstStyle/>
-          <a:p>
-            <a:r>
-              <a:rPr sz="1600" b="0">
-                <a:solidFill>
-                  <a:srgbClr val="5B6674"/>
-                </a:solidFill>
-                <a:latin typeface="Arial"/>
-              </a:rPr>
-              <a:t>The test measures throughput and requires &gt; 1300. Base is 1200 (FAIL); the mode raises it.</a:t>
+          <p:cNvPr id="5" name="Rectangle 4"/>
+          <p:cNvSpPr/>
+          <p:nvPr/>
+        </p:nvSpPr>
+        <p:spPr>
+          <a:xfrm>
+            <a:off x="8503920" y="457200"/>
+            <a:ext cx="3108960" cy="502920"/>
+          </a:xfrm>
+          <a:prstGeom prst="rect">
+            <a:avLst/>
+          </a:prstGeom>
+          <a:solidFill>
+            <a:srgbClr val="2E6DA4"/>
+          </a:solidFill>
+          <a:ln>
+            <a:noFill/>
+          </a:ln>
+        </p:spPr>
+        <p:style>
+          <a:lnRef idx="1">
+            <a:schemeClr val="accent1"/>
+          </a:lnRef>
+          <a:fillRef idx="3">
+            <a:schemeClr val="accent1"/>
+          </a:fillRef>
+          <a:effectRef idx="2">
+            <a:schemeClr val="accent1"/>
+          </a:effectRef>
+          <a:fontRef idx="minor">
+            <a:schemeClr val="lt1"/>
+          </a:fontRef>
+        </p:style>
+        <p:txBody>
+          <a:bodyPr rtlCol="0" anchor="ctr" wrap="square"/>
+          <a:lstStyle/>
+          <a:p>
+            <a:pPr algn="ctr"/>
+            <a:r>
+              <a:rPr sz="1300" b="1">
+                <a:solidFill>
+                  <a:srgbClr val="FFFFFF"/>
+                </a:solidFill>
+                <a:latin typeface="Arial"/>
+              </a:rPr>
+              <a:t>▶  04-pbs.sh</a:t>
             </a:r>
           </a:p>
         </p:txBody>
@@ -12933,8 +13191,8 @@
         </p:nvSpPr>
         <p:spPr>
           <a:xfrm>
-            <a:off x="640080" y="2148840"/>
-            <a:ext cx="10972800" cy="4846320"/>
+            <a:off x="640080" y="1645920"/>
+            <a:ext cx="10972800" cy="4343400"/>
           </a:xfrm>
           <a:prstGeom prst="rect">
             <a:avLst/>
@@ -12963,210 +13221,184 @@
           </a:fontRef>
         </p:style>
         <p:txBody>
-          <a:bodyPr rtlCol="0" anchor="t" wrap="square" lIns="228600" tIns="164592"/>
-          <a:lstStyle/>
-          <a:p>
-            <a:pPr algn="l"/>
-            <a:r>
-              <a:rPr sz="1300" b="0">
+          <a:bodyPr rtlCol="0" anchor="t" wrap="square" lIns="228600" tIns="146304"/>
+          <a:lstStyle/>
+          <a:p>
+            <a:pPr algn="l"/>
+            <a:r>
+              <a:rPr sz="1400" b="1">
+                <a:solidFill>
+                  <a:srgbClr val="2E6DA4"/>
+                </a:solidFill>
+                <a:latin typeface="Consolas"/>
+              </a:rPr>
+              <a:t>$ pav run demo_pbs.pass</a:t>
+            </a:r>
+          </a:p>
+          <a:p>
+            <a:pPr algn="l"/>
+            <a:r>
+              <a:rPr sz="1250" b="0">
+                <a:solidFill>
+                  <a:srgbClr val="1B2B34"/>
+                </a:solidFill>
+                <a:latin typeface="Consolas"/>
+              </a:rPr>
+              <a:t>sid: s76</a:t>
+            </a:r>
+          </a:p>
+          <a:p>
+            <a:pPr algn="l"/>
+            <a:r>
+              <a:rPr sz="1250" b="0">
+                <a:solidFill>
+                  <a:srgbClr val="1B2B34"/>
+                </a:solidFill>
+                <a:latin typeface="Consolas"/>
+              </a:rPr>
+              <a:t>tests: 1</a:t>
+            </a:r>
+          </a:p>
+          <a:p>
+            <a:pPr algn="l"/>
+            <a:r>
+              <a:rPr sz="1250" b="0">
+                <a:solidFill>
+                  <a:srgbClr val="1B2B34"/>
+                </a:solidFill>
+                <a:latin typeface="Consolas"/>
+              </a:rPr>
+              <a:t> </a:t>
+            </a:r>
+          </a:p>
+          <a:p>
+            <a:pPr algn="l"/>
+            <a:r>
+              <a:rPr sz="1400" b="1">
+                <a:solidFill>
+                  <a:srgbClr val="2E6DA4"/>
+                </a:solidFill>
+                <a:latin typeface="Consolas"/>
+              </a:rPr>
+              <a:t>$ pav status s76           # Pavilion: it's running</a:t>
+            </a:r>
+          </a:p>
+          <a:p>
+            <a:pPr algn="l"/>
+            <a:r>
+              <a:rPr sz="1250" b="0">
+                <a:solidFill>
+                  <a:srgbClr val="1B2B34"/>
+                </a:solidFill>
+                <a:latin typeface="Consolas"/>
+              </a:rPr>
+              <a:t>s76.1 | 8390_pbs-server | demo_pbs.pass | RUNNING</a:t>
+            </a:r>
+          </a:p>
+          <a:p>
+            <a:pPr algn="l"/>
+            <a:r>
+              <a:rPr sz="1250" b="0">
+                <a:solidFill>
+                  <a:srgbClr val="1B2B34"/>
+                </a:solidFill>
+                <a:latin typeface="Consolas"/>
+              </a:rPr>
+              <a:t> </a:t>
+            </a:r>
+          </a:p>
+          <a:p>
+            <a:pPr algn="l"/>
+            <a:r>
+              <a:rPr sz="1400" b="1">
+                <a:solidFill>
+                  <a:srgbClr val="2E6DA4"/>
+                </a:solidFill>
+                <a:latin typeface="Consolas"/>
+              </a:rPr>
+              <a:t>$ qstat -a                 # PBS: the same job, state R</a:t>
+            </a:r>
+          </a:p>
+          <a:p>
+            <a:pPr algn="l"/>
+            <a:r>
+              <a:rPr sz="1250" b="0">
+                <a:solidFill>
+                  <a:srgbClr val="1B2B34"/>
+                </a:solidFill>
+                <a:latin typeface="Consolas"/>
+              </a:rPr>
+              <a:t>8390.pbs-server  pavilion  workq  pav_demo_*  1  1  R</a:t>
+            </a:r>
+          </a:p>
+          <a:p>
+            <a:pPr algn="l"/>
+            <a:r>
+              <a:rPr sz="1250" b="0">
+                <a:solidFill>
+                  <a:srgbClr val="1B2B34"/>
+                </a:solidFill>
+                <a:latin typeface="Consolas"/>
+              </a:rPr>
+              <a:t> </a:t>
+            </a:r>
+          </a:p>
+          <a:p>
+            <a:pPr algn="l"/>
+            <a:r>
+              <a:rPr sz="1400" b="1">
+                <a:solidFill>
+                  <a:srgbClr val="2E6DA4"/>
+                </a:solidFill>
+                <a:latin typeface="Consolas"/>
+              </a:rPr>
+              <a:t>$ pav results s76          # once it finishes</a:t>
+            </a:r>
+          </a:p>
+          <a:p>
+            <a:pPr algn="l"/>
+            <a:r>
+              <a:rPr sz="1250" b="0">
+                <a:solidFill>
+                  <a:srgbClr val="1E7D3C"/>
+                </a:solidFill>
+                <a:latin typeface="Consolas"/>
+              </a:rPr>
+              <a:t>s76.1 | demo_pbs.pass | COMPLETE | PASS</a:t>
+            </a:r>
+          </a:p>
+        </p:txBody>
+      </p:sp>
+      <p:sp>
+        <p:nvSpPr>
+          <p:cNvPr id="7" name="TextBox 6"/>
+          <p:cNvSpPr txBox="1"/>
+          <p:nvPr/>
+        </p:nvSpPr>
+        <p:spPr>
+          <a:xfrm>
+            <a:off x="640080" y="6144768"/>
+            <a:ext cx="10972800" cy="502920"/>
+          </a:xfrm>
+          <a:prstGeom prst="rect">
+            <a:avLst/>
+          </a:prstGeom>
+          <a:noFill/>
+        </p:spPr>
+        <p:txBody>
+          <a:bodyPr wrap="square">
+            <a:spAutoFit/>
+          </a:bodyPr>
+          <a:lstStyle/>
+          <a:p>
+            <a:r>
+              <a:rPr sz="1400" b="0">
                 <a:solidFill>
                   <a:srgbClr val="5B6674"/>
                 </a:solidFill>
-                <a:latin typeface="Consolas"/>
-              </a:rPr>
-              <a:t># config/suites/demo_modes.yaml   (the test)</a:t>
-            </a:r>
-          </a:p>
-          <a:p>
-            <a:pPr algn="l"/>
-            <a:r>
-              <a:rPr sz="1300" b="0">
-                <a:solidFill>
-                  <a:srgbClr val="1B2B34"/>
-                </a:solidFill>
-                <a:latin typeface="Consolas"/>
-              </a:rPr>
-              <a:t>mode_demo:</a:t>
-            </a:r>
-          </a:p>
-          <a:p>
-            <a:pPr algn="l"/>
-            <a:r>
-              <a:rPr sz="1300" b="0">
-                <a:solidFill>
-                  <a:srgbClr val="1B2B34"/>
-                </a:solidFill>
-                <a:latin typeface="Consolas"/>
-              </a:rPr>
-              <a:t>  variables:</a:t>
-            </a:r>
-          </a:p>
-          <a:p>
-            <a:pPr algn="l"/>
-            <a:r>
-              <a:rPr sz="1300" b="0">
-                <a:solidFill>
-                  <a:srgbClr val="1B2B34"/>
-                </a:solidFill>
-                <a:latin typeface="Consolas"/>
-              </a:rPr>
-              <a:t>    throughput: 1200</a:t>
-            </a:r>
-          </a:p>
-          <a:p>
-            <a:pPr algn="l"/>
-            <a:r>
-              <a:rPr sz="1300" b="0">
-                <a:solidFill>
-                  <a:srgbClr val="1B2B34"/>
-                </a:solidFill>
-                <a:latin typeface="Consolas"/>
-              </a:rPr>
-              <a:t>  run:</a:t>
-            </a:r>
-          </a:p>
-          <a:p>
-            <a:pPr algn="l"/>
-            <a:r>
-              <a:rPr sz="1300" b="0">
-                <a:solidFill>
-                  <a:srgbClr val="1B2B34"/>
-                </a:solidFill>
-                <a:latin typeface="Consolas"/>
-              </a:rPr>
-              <a:t>    cmds:</a:t>
-            </a:r>
-          </a:p>
-          <a:p>
-            <a:pPr algn="l"/>
-            <a:r>
-              <a:rPr sz="1300" b="0">
-                <a:solidFill>
-                  <a:srgbClr val="1B2B34"/>
-                </a:solidFill>
-                <a:latin typeface="Consolas"/>
-              </a:rPr>
-              <a:t>      - 'echo "throughput {{throughput}}"'</a:t>
-            </a:r>
-          </a:p>
-          <a:p>
-            <a:pPr algn="l"/>
-            <a:r>
-              <a:rPr sz="1300" b="0">
-                <a:solidFill>
-                  <a:srgbClr val="1B2B34"/>
-                </a:solidFill>
-                <a:latin typeface="Consolas"/>
-              </a:rPr>
-              <a:t>  result_parse:</a:t>
-            </a:r>
-          </a:p>
-          <a:p>
-            <a:pPr algn="l"/>
-            <a:r>
-              <a:rPr sz="1300" b="0">
-                <a:solidFill>
-                  <a:srgbClr val="1B2B34"/>
-                </a:solidFill>
-                <a:latin typeface="Consolas"/>
-              </a:rPr>
-              <a:t>    regex:</a:t>
-            </a:r>
-          </a:p>
-          <a:p>
-            <a:pPr algn="l"/>
-            <a:r>
-              <a:rPr sz="1300" b="0">
-                <a:solidFill>
-                  <a:srgbClr val="1B2B34"/>
-                </a:solidFill>
-                <a:latin typeface="Consolas"/>
-              </a:rPr>
-              <a:t>      throughput_mbs:</a:t>
-            </a:r>
-          </a:p>
-          <a:p>
-            <a:pPr algn="l"/>
-            <a:r>
-              <a:rPr sz="1300" b="0">
-                <a:solidFill>
-                  <a:srgbClr val="1B2B34"/>
-                </a:solidFill>
-                <a:latin typeface="Consolas"/>
-              </a:rPr>
-              <a:t>        regex: 'throughput (\S+)'</a:t>
-            </a:r>
-          </a:p>
-          <a:p>
-            <a:pPr algn="l"/>
-            <a:r>
-              <a:rPr sz="1300" b="0">
-                <a:solidFill>
-                  <a:srgbClr val="1B2B34"/>
-                </a:solidFill>
-                <a:latin typeface="Consolas"/>
-              </a:rPr>
-              <a:t>  result_evaluate:</a:t>
-            </a:r>
-          </a:p>
-          <a:p>
-            <a:pPr algn="l"/>
-            <a:r>
-              <a:rPr sz="1300" b="0">
-                <a:solidFill>
-                  <a:srgbClr val="1B2B34"/>
-                </a:solidFill>
-                <a:latin typeface="Consolas"/>
-              </a:rPr>
-              <a:t>    result: 'throughput_mbs &gt; 1300'      # PASS only if above 1300</a:t>
-            </a:r>
-          </a:p>
-          <a:p>
-            <a:pPr algn="l"/>
-            <a:r>
-              <a:rPr sz="1300" b="0">
-                <a:solidFill>
-                  <a:srgbClr val="1B2B34"/>
-                </a:solidFill>
-                <a:latin typeface="Consolas"/>
-              </a:rPr>
-              <a:t> </a:t>
-            </a:r>
-          </a:p>
-          <a:p>
-            <a:pPr algn="l"/>
-            <a:r>
-              <a:rPr sz="1300" b="0">
-                <a:solidFill>
-                  <a:srgbClr val="5B6674"/>
-                </a:solidFill>
-                <a:latin typeface="Consolas"/>
-              </a:rPr>
-              <a:t># config/modes/prod.yaml   (the mode overlay)</a:t>
-            </a:r>
-          </a:p>
-          <a:p>
-            <a:pPr algn="l"/>
-            <a:r>
-              <a:rPr sz="1300" b="0">
-                <a:solidFill>
-                  <a:srgbClr val="1B2B34"/>
-                </a:solidFill>
-                <a:latin typeface="Consolas"/>
-              </a:rPr>
-              <a:t>variables:</a:t>
-            </a:r>
-          </a:p>
-          <a:p>
-            <a:pPr algn="l"/>
-            <a:r>
-              <a:rPr sz="1300" b="0">
-                <a:solidFill>
-                  <a:srgbClr val="1B2B34"/>
-                </a:solidFill>
-                <a:latin typeface="Consolas"/>
-              </a:rPr>
-              <a:t>  throughput: 1400                        # override 1200 -&gt; 1400</a:t>
+                <a:latin typeface="Arial"/>
+              </a:rPr>
+              <a:t>Submitted → running (seen in Pavilion AND PBS) → PASS on a compute node.</a:t>
             </a:r>
           </a:p>
         </p:txBody>
@@ -13191,88 +13423,20 @@
       <p:grpSpPr/>
       <p:sp>
         <p:nvSpPr>
-          <p:cNvPr id="2" name="TextBox 1"/>
-          <p:cNvSpPr txBox="1"/>
-          <p:nvPr/>
-        </p:nvSpPr>
-        <p:spPr>
-          <a:xfrm>
-            <a:off x="548640" y="320040"/>
-            <a:ext cx="7680960" cy="365760"/>
-          </a:xfrm>
-          <a:prstGeom prst="rect">
-            <a:avLst/>
-          </a:prstGeom>
-          <a:noFill/>
-        </p:spPr>
-        <p:txBody>
-          <a:bodyPr wrap="square">
-            <a:spAutoFit/>
-          </a:bodyPr>
-          <a:lstStyle/>
-          <a:p>
-            <a:r>
-              <a:rPr sz="1200" b="1">
-                <a:solidFill>
-                  <a:srgbClr val="2E6DA4"/>
-                </a:solidFill>
-                <a:latin typeface="Arial"/>
-              </a:rPr>
-              <a:t>LIVE DEMO · L5</a:t>
-            </a:r>
-          </a:p>
-        </p:txBody>
-      </p:sp>
-      <p:sp>
-        <p:nvSpPr>
-          <p:cNvPr id="3" name="TextBox 2"/>
-          <p:cNvSpPr txBox="1"/>
-          <p:nvPr/>
-        </p:nvSpPr>
-        <p:spPr>
-          <a:xfrm>
-            <a:off x="548640" y="640080"/>
-            <a:ext cx="11064240" cy="822960"/>
-          </a:xfrm>
-          <a:prstGeom prst="rect">
-            <a:avLst/>
-          </a:prstGeom>
-          <a:noFill/>
-        </p:spPr>
-        <p:txBody>
-          <a:bodyPr wrap="square">
-            <a:spAutoFit/>
-          </a:bodyPr>
-          <a:lstStyle/>
-          <a:p>
-            <a:r>
-              <a:rPr sz="3000" b="1">
-                <a:solidFill>
-                  <a:srgbClr val="1F3B63"/>
-                </a:solidFill>
-                <a:latin typeface="Arial"/>
-              </a:rPr>
-              <a:t>A mode flips FAIL → PASS</a:t>
-            </a:r>
-          </a:p>
-        </p:txBody>
-      </p:sp>
-      <p:sp>
-        <p:nvSpPr>
-          <p:cNvPr id="4" name="Rectangle 3"/>
+          <p:cNvPr id="2" name="Rectangle 1"/>
           <p:cNvSpPr/>
           <p:nvPr/>
         </p:nvSpPr>
         <p:spPr>
           <a:xfrm>
-            <a:off x="566928" y="1417320"/>
-            <a:ext cx="2011680" cy="38100"/>
+            <a:off x="0" y="2651760"/>
+            <a:ext cx="12191695" cy="1554480"/>
           </a:xfrm>
           <a:prstGeom prst="rect">
             <a:avLst/>
           </a:prstGeom>
           <a:solidFill>
-            <a:srgbClr val="2E6DA4"/>
+            <a:srgbClr val="EEF2F7"/>
           </a:solidFill>
           <a:ln>
             <a:noFill/>
@@ -13302,228 +13466,14 @@
       </p:sp>
       <p:sp>
         <p:nvSpPr>
-          <p:cNvPr id="5" name="Rectangle 4"/>
-          <p:cNvSpPr/>
-          <p:nvPr/>
-        </p:nvSpPr>
-        <p:spPr>
-          <a:xfrm>
-            <a:off x="8503920" y="457200"/>
-            <a:ext cx="3108960" cy="502920"/>
-          </a:xfrm>
-          <a:prstGeom prst="rect">
-            <a:avLst/>
-          </a:prstGeom>
-          <a:solidFill>
-            <a:srgbClr val="2E6DA4"/>
-          </a:solidFill>
-          <a:ln>
-            <a:noFill/>
-          </a:ln>
-        </p:spPr>
-        <p:style>
-          <a:lnRef idx="1">
-            <a:schemeClr val="accent1"/>
-          </a:lnRef>
-          <a:fillRef idx="3">
-            <a:schemeClr val="accent1"/>
-          </a:fillRef>
-          <a:effectRef idx="2">
-            <a:schemeClr val="accent1"/>
-          </a:effectRef>
-          <a:fontRef idx="minor">
-            <a:schemeClr val="lt1"/>
-          </a:fontRef>
-        </p:style>
-        <p:txBody>
-          <a:bodyPr rtlCol="0" anchor="ctr" wrap="square"/>
-          <a:lstStyle/>
-          <a:p>
-            <a:pPr algn="ctr"/>
-            <a:r>
-              <a:rPr sz="1300" b="1">
-                <a:solidFill>
-                  <a:srgbClr val="FFFFFF"/>
-                </a:solidFill>
-                <a:latin typeface="Arial"/>
-              </a:rPr>
-              <a:t>▶  05-modes.sh</a:t>
-            </a:r>
-          </a:p>
-        </p:txBody>
-      </p:sp>
-      <p:sp>
-        <p:nvSpPr>
-          <p:cNvPr id="6" name="Rectangle 5"/>
-          <p:cNvSpPr/>
-          <p:nvPr/>
-        </p:nvSpPr>
-        <p:spPr>
-          <a:xfrm>
-            <a:off x="640080" y="1645920"/>
-            <a:ext cx="10972800" cy="4343400"/>
-          </a:xfrm>
-          <a:prstGeom prst="rect">
-            <a:avLst/>
-          </a:prstGeom>
-          <a:solidFill>
-            <a:srgbClr val="F3F4F6"/>
-          </a:solidFill>
-          <a:ln w="12700">
-            <a:solidFill>
-              <a:srgbClr val="D5DAE0"/>
-            </a:solidFill>
-          </a:ln>
-        </p:spPr>
-        <p:style>
-          <a:lnRef idx="1">
-            <a:schemeClr val="accent1"/>
-          </a:lnRef>
-          <a:fillRef idx="3">
-            <a:schemeClr val="accent1"/>
-          </a:fillRef>
-          <a:effectRef idx="2">
-            <a:schemeClr val="accent1"/>
-          </a:effectRef>
-          <a:fontRef idx="minor">
-            <a:schemeClr val="lt1"/>
-          </a:fontRef>
-        </p:style>
-        <p:txBody>
-          <a:bodyPr rtlCol="0" anchor="t" wrap="square" lIns="228600" tIns="146304"/>
-          <a:lstStyle/>
-          <a:p>
-            <a:pPr algn="l"/>
-            <a:r>
-              <a:rPr sz="1400" b="1">
-                <a:solidFill>
-                  <a:srgbClr val="2E6DA4"/>
-                </a:solidFill>
-                <a:latin typeface="Consolas"/>
-              </a:rPr>
-              <a:t>$ pav run demo_modes.mode_demo           # base: throughput = 1200</a:t>
-            </a:r>
-          </a:p>
-          <a:p>
-            <a:pPr algn="l"/>
-            <a:r>
-              <a:rPr sz="1250" b="0">
-                <a:solidFill>
-                  <a:srgbClr val="1B2B34"/>
-                </a:solidFill>
-                <a:latin typeface="Consolas"/>
-              </a:rPr>
-              <a:t>  'throughput_mbs': 1200,</a:t>
-            </a:r>
-          </a:p>
-          <a:p>
-            <a:pPr algn="l"/>
-            <a:r>
-              <a:rPr sz="1250" b="0">
-                <a:solidFill>
-                  <a:srgbClr val="B32A2A"/>
-                </a:solidFill>
-                <a:latin typeface="Consolas"/>
-              </a:rPr>
-              <a:t>  'result': 'FAIL'          # 1200 &gt; 1300 is false</a:t>
-            </a:r>
-          </a:p>
-          <a:p>
-            <a:pPr algn="l"/>
-            <a:r>
-              <a:rPr sz="1250" b="0">
-                <a:solidFill>
-                  <a:srgbClr val="1B2B34"/>
-                </a:solidFill>
-                <a:latin typeface="Consolas"/>
-              </a:rPr>
-              <a:t> </a:t>
-            </a:r>
-          </a:p>
-          <a:p>
-            <a:pPr algn="l"/>
-            <a:r>
-              <a:rPr sz="1400" b="1">
-                <a:solidFill>
-                  <a:srgbClr val="2E6DA4"/>
-                </a:solidFill>
-                <a:latin typeface="Consolas"/>
-              </a:rPr>
-              <a:t>$ qstat -a                                # a real PBS job</a:t>
-            </a:r>
-          </a:p>
-          <a:p>
-            <a:pPr algn="l"/>
-            <a:r>
-              <a:rPr sz="1250" b="0">
-                <a:solidFill>
-                  <a:srgbClr val="1B2B34"/>
-                </a:solidFill>
-                <a:latin typeface="Consolas"/>
-              </a:rPr>
-              <a:t>8407.pbs-server pavilion workq pav_demo_*  1  1  R</a:t>
-            </a:r>
-          </a:p>
-          <a:p>
-            <a:pPr algn="l"/>
-            <a:r>
-              <a:rPr sz="1250" b="0">
-                <a:solidFill>
-                  <a:srgbClr val="1B2B34"/>
-                </a:solidFill>
-                <a:latin typeface="Consolas"/>
-              </a:rPr>
-              <a:t> </a:t>
-            </a:r>
-          </a:p>
-          <a:p>
-            <a:pPr algn="l"/>
-            <a:r>
-              <a:rPr sz="1400" b="1">
-                <a:solidFill>
-                  <a:srgbClr val="2E6DA4"/>
-                </a:solidFill>
-                <a:latin typeface="Consolas"/>
-              </a:rPr>
-              <a:t>$ pav run -m prod demo_modes.mode_demo    # prod overrides -&gt; throughput = 1400</a:t>
-            </a:r>
-          </a:p>
-          <a:p>
-            <a:pPr algn="l"/>
-            <a:r>
-              <a:rPr sz="1250" b="0">
-                <a:solidFill>
-                  <a:srgbClr val="1B2B34"/>
-                </a:solidFill>
-                <a:latin typeface="Consolas"/>
-              </a:rPr>
-              <a:t>  'throughput_mbs': 1400,</a:t>
-            </a:r>
-          </a:p>
-          <a:p>
-            <a:pPr algn="l"/>
-            <a:r>
-              <a:rPr sz="1250" b="0">
-                <a:solidFill>
-                  <a:srgbClr val="1E7D3C"/>
-                </a:solidFill>
-                <a:latin typeface="Consolas"/>
-              </a:rPr>
-              <a:t>  'result': 'PASS'          # 1400 &gt; 1300 is true</a:t>
-            </a:r>
-          </a:p>
-        </p:txBody>
-      </p:sp>
-      <p:sp>
-        <p:nvSpPr>
-          <p:cNvPr id="7" name="TextBox 6"/>
+          <p:cNvPr id="3" name="TextBox 2"/>
           <p:cNvSpPr txBox="1"/>
           <p:nvPr/>
         </p:nvSpPr>
         <p:spPr>
           <a:xfrm>
-            <a:off x="640080" y="6144768"/>
-            <a:ext cx="10972800" cy="502920"/>
+            <a:off x="731520" y="2834640"/>
+            <a:ext cx="10698480" cy="1188720"/>
           </a:xfrm>
           <a:prstGeom prst="rect">
             <a:avLst/>
@@ -13537,13 +13487,24 @@
           <a:lstStyle/>
           <a:p>
             <a:r>
-              <a:rPr sz="1400" b="0">
-                <a:solidFill>
-                  <a:srgbClr val="5B6674"/>
-                </a:solidFill>
-                <a:latin typeface="Arial"/>
-              </a:rPr>
-              <a:t>Same test, no edits — the prod mode raised throughput past the 1300 threshold, flipping FAIL → PASS.</a:t>
+              <a:rPr sz="1300" b="1">
+                <a:solidFill>
+                  <a:srgbClr val="2E6DA4"/>
+                </a:solidFill>
+                <a:latin typeface="Arial"/>
+              </a:rPr>
+              <a:t>REUSABLE OVERLAYS</a:t>
+            </a:r>
+          </a:p>
+          <a:p>
+            <a:r>
+              <a:rPr sz="3600" b="1">
+                <a:solidFill>
+                  <a:srgbClr val="1F3B63"/>
+                </a:solidFill>
+                <a:latin typeface="Arial"/>
+              </a:rPr>
+              <a:t>Modes</a:t>
             </a:r>
           </a:p>
         </p:txBody>
@@ -13568,20 +13529,88 @@
       <p:grpSpPr/>
       <p:sp>
         <p:nvSpPr>
-          <p:cNvPr id="2" name="Rectangle 1"/>
+          <p:cNvPr id="2" name="TextBox 1"/>
+          <p:cNvSpPr txBox="1"/>
+          <p:nvPr/>
+        </p:nvSpPr>
+        <p:spPr>
+          <a:xfrm>
+            <a:off x="548640" y="320040"/>
+            <a:ext cx="7680960" cy="365760"/>
+          </a:xfrm>
+          <a:prstGeom prst="rect">
+            <a:avLst/>
+          </a:prstGeom>
+          <a:noFill/>
+        </p:spPr>
+        <p:txBody>
+          <a:bodyPr wrap="square">
+            <a:spAutoFit/>
+          </a:bodyPr>
+          <a:lstStyle/>
+          <a:p>
+            <a:r>
+              <a:rPr sz="1200" b="1">
+                <a:solidFill>
+                  <a:srgbClr val="2E6DA4"/>
+                </a:solidFill>
+                <a:latin typeface="Arial"/>
+              </a:rPr>
+              <a:t>MODES</a:t>
+            </a:r>
+          </a:p>
+        </p:txBody>
+      </p:sp>
+      <p:sp>
+        <p:nvSpPr>
+          <p:cNvPr id="3" name="TextBox 2"/>
+          <p:cNvSpPr txBox="1"/>
+          <p:nvPr/>
+        </p:nvSpPr>
+        <p:spPr>
+          <a:xfrm>
+            <a:off x="548640" y="640080"/>
+            <a:ext cx="11064240" cy="822960"/>
+          </a:xfrm>
+          <a:prstGeom prst="rect">
+            <a:avLst/>
+          </a:prstGeom>
+          <a:noFill/>
+        </p:spPr>
+        <p:txBody>
+          <a:bodyPr wrap="square">
+            <a:spAutoFit/>
+          </a:bodyPr>
+          <a:lstStyle/>
+          <a:p>
+            <a:r>
+              <a:rPr sz="3000" b="1">
+                <a:solidFill>
+                  <a:srgbClr val="1F3B63"/>
+                </a:solidFill>
+                <a:latin typeface="Arial"/>
+              </a:rPr>
+              <a:t>What a mode is</a:t>
+            </a:r>
+          </a:p>
+        </p:txBody>
+      </p:sp>
+      <p:sp>
+        <p:nvSpPr>
+          <p:cNvPr id="4" name="Rectangle 3"/>
           <p:cNvSpPr/>
           <p:nvPr/>
         </p:nvSpPr>
         <p:spPr>
           <a:xfrm>
-            <a:off x="0" y="2651760"/>
-            <a:ext cx="12191695" cy="1554480"/>
+            <a:off x="566928" y="1417320"/>
+            <a:ext cx="2011680" cy="38100"/>
           </a:xfrm>
           <a:prstGeom prst="rect">
             <a:avLst/>
           </a:prstGeom>
           <a:solidFill>
-            <a:srgbClr val="EEF2F7"/>
+            <a:srgbClr val="2E6DA4"/>
           </a:solidFill>
           <a:ln>
             <a:noFill/>
@@ -13611,14 +13640,14 @@
       </p:sp>
       <p:sp>
         <p:nvSpPr>
-          <p:cNvPr id="3" name="TextBox 2"/>
+          <p:cNvPr id="5" name="TextBox 4"/>
           <p:cNvSpPr txBox="1"/>
           <p:nvPr/>
         </p:nvSpPr>
         <p:spPr>
           <a:xfrm>
-            <a:off x="731520" y="2834640"/>
-            <a:ext cx="10698480" cy="1188720"/>
+            <a:off x="640080" y="1691640"/>
+            <a:ext cx="10972800" cy="4754880"/>
           </a:xfrm>
           <a:prstGeom prst="rect">
             <a:avLst/>
@@ -13631,25 +13660,67 @@
           </a:bodyPr>
           <a:lstStyle/>
           <a:p>
-            <a:r>
-              <a:rPr sz="1300" b="1">
-                <a:solidFill>
-                  <a:srgbClr val="2E6DA4"/>
-                </a:solidFill>
-                <a:latin typeface="Arial"/>
-              </a:rPr>
-              <a:t>GROUPING RUNS</a:t>
-            </a:r>
-          </a:p>
-          <a:p>
-            <a:r>
-              <a:rPr sz="3600" b="1">
-                <a:solidFill>
-                  <a:srgbClr val="1F3B63"/>
-                </a:solidFill>
-                <a:latin typeface="Arial"/>
-              </a:rPr>
-              <a:t>Series</a:t>
+            <a:pPr>
+              <a:spcAft>
+                <a:spcPts val="1000"/>
+              </a:spcAft>
+            </a:pPr>
+            <a:r>
+              <a:rPr sz="2000" b="0">
+                <a:solidFill>
+                  <a:srgbClr val="21252B"/>
+                </a:solidFill>
+                <a:latin typeface="Arial"/>
+              </a:rPr>
+              <a:t>•  A mode is a small YAML overlay merged on top of a fully-resolved test.</a:t>
+            </a:r>
+          </a:p>
+          <a:p>
+            <a:pPr>
+              <a:spcAft>
+                <a:spcPts val="1000"/>
+              </a:spcAft>
+            </a:pPr>
+            <a:r>
+              <a:rPr sz="2000" b="0">
+                <a:solidFill>
+                  <a:srgbClr val="21252B"/>
+                </a:solidFill>
+                <a:latin typeface="Arial"/>
+              </a:rPr>
+              <a:t>•  Apply at run time with -m: `pav run -m prod &lt;test&gt;`.</a:t>
+            </a:r>
+          </a:p>
+          <a:p>
+            <a:pPr>
+              <a:spcAft>
+                <a:spcPts val="1000"/>
+              </a:spcAft>
+            </a:pPr>
+            <a:r>
+              <a:rPr sz="2000" b="0">
+                <a:solidFill>
+                  <a:srgbClr val="21252B"/>
+                </a:solidFill>
+                <a:latin typeface="Arial"/>
+              </a:rPr>
+              <a:t>•  Great for: swapping queues, tuning resources, toggling variables — without editing tests.</a:t>
+            </a:r>
+          </a:p>
+          <a:p>
+            <a:pPr>
+              <a:spcAft>
+                <a:spcPts val="1000"/>
+              </a:spcAft>
+            </a:pPr>
+            <a:r>
+              <a:rPr sz="2000" b="0">
+                <a:solidFill>
+                  <a:srgbClr val="21252B"/>
+                </a:solidFill>
+                <a:latin typeface="Arial"/>
+              </a:rPr>
+              <a:t>•  Our demo: the test fails at throughput 1200; a `prod` mode raises it to 1400 → it passes.</a:t>
             </a:r>
           </a:p>
         </p:txBody>
@@ -13701,7 +13772,7 @@
                 </a:solidFill>
                 <a:latin typeface="Arial"/>
               </a:rPr>
-              <a:t>SERIES</a:t>
+              <a:t>MODES</a:t>
             </a:r>
           </a:p>
         </p:txBody>
@@ -13735,7 +13806,7 @@
                 </a:solidFill>
                 <a:latin typeface="Arial"/>
               </a:rPr>
-              <a:t>A series file</a:t>
+              <a:t>The test, and a mode that changes its outcome</a:t>
             </a:r>
           </a:p>
         </p:txBody>
@@ -13812,7 +13883,7 @@
                 </a:solidFill>
                 <a:latin typeface="Arial"/>
               </a:rPr>
-              <a:t>demo_series.yaml — name a test set, list the tests it runs.</a:t>
+              <a:t>The test measures throughput and requires &gt; 1300. Base is 1200 (FAIL); the mode raises it.</a:t>
             </a:r>
           </a:p>
         </p:txBody>
@@ -13826,7 +13897,7 @@
         <p:spPr>
           <a:xfrm>
             <a:off x="640080" y="2148840"/>
-            <a:ext cx="10972800" cy="4206240"/>
+            <a:ext cx="10972800" cy="4846320"/>
           </a:xfrm>
           <a:prstGeom prst="rect">
             <a:avLst/>
@@ -13860,97 +13931,205 @@
           <a:p>
             <a:pPr algn="l"/>
             <a:r>
-              <a:rPr sz="1400" b="0">
+              <a:rPr sz="1300" b="0">
                 <a:solidFill>
                   <a:srgbClr val="5B6674"/>
                 </a:solidFill>
                 <a:latin typeface="Consolas"/>
               </a:rPr>
-              <a:t># config/series/demo_series.yaml</a:t>
-            </a:r>
-          </a:p>
-          <a:p>
-            <a:pPr algn="l"/>
-            <a:r>
-              <a:rPr sz="1400" b="0">
-                <a:solidFill>
-                  <a:srgbClr val="1B2B34"/>
-                </a:solidFill>
-                <a:latin typeface="Consolas"/>
-              </a:rPr>
-              <a:t>ordered: False</a:t>
-            </a:r>
-          </a:p>
-          <a:p>
-            <a:pPr algn="l"/>
-            <a:r>
-              <a:rPr sz="1400" b="0">
-                <a:solidFill>
-                  <a:srgbClr val="1B2B34"/>
-                </a:solidFill>
-                <a:latin typeface="Consolas"/>
-              </a:rPr>
-              <a:t>test_sets:</a:t>
-            </a:r>
-          </a:p>
-          <a:p>
-            <a:pPr algn="l"/>
-            <a:r>
-              <a:rPr sz="1400" b="0">
-                <a:solidFill>
-                  <a:srgbClr val="1B2B34"/>
-                </a:solidFill>
-                <a:latin typeface="Consolas"/>
-              </a:rPr>
-              <a:t>  smoke:</a:t>
-            </a:r>
-          </a:p>
-          <a:p>
-            <a:pPr algn="l"/>
-            <a:r>
-              <a:rPr sz="1400" b="0">
-                <a:solidFill>
-                  <a:srgbClr val="1B2B34"/>
-                </a:solidFill>
-                <a:latin typeface="Consolas"/>
-              </a:rPr>
-              <a:t>    tests:</a:t>
-            </a:r>
-          </a:p>
-          <a:p>
-            <a:pPr algn="l"/>
-            <a:r>
-              <a:rPr sz="1400" b="0">
-                <a:solidFill>
-                  <a:srgbClr val="1B2B34"/>
-                </a:solidFill>
-                <a:latin typeface="Consolas"/>
-              </a:rPr>
-              <a:t>      - demo_pbs.pass</a:t>
-            </a:r>
-          </a:p>
-          <a:p>
-            <a:pPr algn="l"/>
-            <a:r>
-              <a:rPr sz="1400" b="0">
-                <a:solidFill>
-                  <a:srgbClr val="1B2B34"/>
-                </a:solidFill>
-                <a:latin typeface="Consolas"/>
-              </a:rPr>
-              <a:t>      - demo_pbs.fail</a:t>
-            </a:r>
-          </a:p>
-          <a:p>
-            <a:pPr algn="l"/>
-            <a:r>
-              <a:rPr sz="1400" b="0">
-                <a:solidFill>
-                  <a:srgbClr val="1B2B34"/>
-                </a:solidFill>
-                <a:latin typeface="Consolas"/>
-              </a:rPr>
-              <a:t>      - demo_pbs.metrics</a:t>
+              <a:t># config/suites/demo_modes.yaml   (the test)</a:t>
+            </a:r>
+          </a:p>
+          <a:p>
+            <a:pPr algn="l"/>
+            <a:r>
+              <a:rPr sz="1300" b="0">
+                <a:solidFill>
+                  <a:srgbClr val="1B2B34"/>
+                </a:solidFill>
+                <a:latin typeface="Consolas"/>
+              </a:rPr>
+              <a:t>mode_demo:</a:t>
+            </a:r>
+          </a:p>
+          <a:p>
+            <a:pPr algn="l"/>
+            <a:r>
+              <a:rPr sz="1300" b="0">
+                <a:solidFill>
+                  <a:srgbClr val="1B2B34"/>
+                </a:solidFill>
+                <a:latin typeface="Consolas"/>
+              </a:rPr>
+              <a:t>  variables:</a:t>
+            </a:r>
+          </a:p>
+          <a:p>
+            <a:pPr algn="l"/>
+            <a:r>
+              <a:rPr sz="1300" b="0">
+                <a:solidFill>
+                  <a:srgbClr val="1B2B34"/>
+                </a:solidFill>
+                <a:latin typeface="Consolas"/>
+              </a:rPr>
+              <a:t>    throughput: 1200</a:t>
+            </a:r>
+          </a:p>
+          <a:p>
+            <a:pPr algn="l"/>
+            <a:r>
+              <a:rPr sz="1300" b="0">
+                <a:solidFill>
+                  <a:srgbClr val="1B2B34"/>
+                </a:solidFill>
+                <a:latin typeface="Consolas"/>
+              </a:rPr>
+              <a:t>  run:</a:t>
+            </a:r>
+          </a:p>
+          <a:p>
+            <a:pPr algn="l"/>
+            <a:r>
+              <a:rPr sz="1300" b="0">
+                <a:solidFill>
+                  <a:srgbClr val="1B2B34"/>
+                </a:solidFill>
+                <a:latin typeface="Consolas"/>
+              </a:rPr>
+              <a:t>    cmds:</a:t>
+            </a:r>
+          </a:p>
+          <a:p>
+            <a:pPr algn="l"/>
+            <a:r>
+              <a:rPr sz="1300" b="0">
+                <a:solidFill>
+                  <a:srgbClr val="1B2B34"/>
+                </a:solidFill>
+                <a:latin typeface="Consolas"/>
+              </a:rPr>
+              <a:t>      - 'echo "throughput {{throughput}}"'</a:t>
+            </a:r>
+          </a:p>
+          <a:p>
+            <a:pPr algn="l"/>
+            <a:r>
+              <a:rPr sz="1300" b="0">
+                <a:solidFill>
+                  <a:srgbClr val="1B2B34"/>
+                </a:solidFill>
+                <a:latin typeface="Consolas"/>
+              </a:rPr>
+              <a:t>  result_parse:</a:t>
+            </a:r>
+          </a:p>
+          <a:p>
+            <a:pPr algn="l"/>
+            <a:r>
+              <a:rPr sz="1300" b="0">
+                <a:solidFill>
+                  <a:srgbClr val="1B2B34"/>
+                </a:solidFill>
+                <a:latin typeface="Consolas"/>
+              </a:rPr>
+              <a:t>    regex:</a:t>
+            </a:r>
+          </a:p>
+          <a:p>
+            <a:pPr algn="l"/>
+            <a:r>
+              <a:rPr sz="1300" b="0">
+                <a:solidFill>
+                  <a:srgbClr val="1B2B34"/>
+                </a:solidFill>
+                <a:latin typeface="Consolas"/>
+              </a:rPr>
+              <a:t>      throughput_mbs:</a:t>
+            </a:r>
+          </a:p>
+          <a:p>
+            <a:pPr algn="l"/>
+            <a:r>
+              <a:rPr sz="1300" b="0">
+                <a:solidFill>
+                  <a:srgbClr val="1B2B34"/>
+                </a:solidFill>
+                <a:latin typeface="Consolas"/>
+              </a:rPr>
+              <a:t>        regex: 'throughput (\S+)'</a:t>
+            </a:r>
+          </a:p>
+          <a:p>
+            <a:pPr algn="l"/>
+            <a:r>
+              <a:rPr sz="1300" b="0">
+                <a:solidFill>
+                  <a:srgbClr val="1B2B34"/>
+                </a:solidFill>
+                <a:latin typeface="Consolas"/>
+              </a:rPr>
+              <a:t>  result_evaluate:</a:t>
+            </a:r>
+          </a:p>
+          <a:p>
+            <a:pPr algn="l"/>
+            <a:r>
+              <a:rPr sz="1300" b="0">
+                <a:solidFill>
+                  <a:srgbClr val="1B2B34"/>
+                </a:solidFill>
+                <a:latin typeface="Consolas"/>
+              </a:rPr>
+              <a:t>    result: 'throughput_mbs &gt; 1300'      # PASS only if above 1300</a:t>
+            </a:r>
+          </a:p>
+          <a:p>
+            <a:pPr algn="l"/>
+            <a:r>
+              <a:rPr sz="1300" b="0">
+                <a:solidFill>
+                  <a:srgbClr val="1B2B34"/>
+                </a:solidFill>
+                <a:latin typeface="Consolas"/>
+              </a:rPr>
+              <a:t> </a:t>
+            </a:r>
+          </a:p>
+          <a:p>
+            <a:pPr algn="l"/>
+            <a:r>
+              <a:rPr sz="1300" b="0">
+                <a:solidFill>
+                  <a:srgbClr val="5B6674"/>
+                </a:solidFill>
+                <a:latin typeface="Consolas"/>
+              </a:rPr>
+              <a:t># config/modes/prod.yaml   (the mode overlay)</a:t>
+            </a:r>
+          </a:p>
+          <a:p>
+            <a:pPr algn="l"/>
+            <a:r>
+              <a:rPr sz="1300" b="0">
+                <a:solidFill>
+                  <a:srgbClr val="1B2B34"/>
+                </a:solidFill>
+                <a:latin typeface="Consolas"/>
+              </a:rPr>
+              <a:t>variables:</a:t>
+            </a:r>
+          </a:p>
+          <a:p>
+            <a:pPr algn="l"/>
+            <a:r>
+              <a:rPr sz="1300" b="0">
+                <a:solidFill>
+                  <a:srgbClr val="1B2B34"/>
+                </a:solidFill>
+                <a:latin typeface="Consolas"/>
+              </a:rPr>
+              <a:t>  throughput: 1400                        # override 1200 -&gt; 1400</a:t>
             </a:r>
           </a:p>
         </p:txBody>
@@ -14002,7 +14181,7 @@
                 </a:solidFill>
                 <a:latin typeface="Arial"/>
               </a:rPr>
-              <a:t>LIVE DEMO · L6</a:t>
+              <a:t>LIVE DEMO · L5</a:t>
             </a:r>
           </a:p>
         </p:txBody>
@@ -14036,7 +14215,7 @@
                 </a:solidFill>
                 <a:latin typeface="Arial"/>
               </a:rPr>
-              <a:t>Run a whole group</a:t>
+              <a:t>A mode flips FAIL → PASS</a:t>
             </a:r>
           </a:p>
         </p:txBody>
@@ -14131,7 +14310,7 @@
                 </a:solidFill>
                 <a:latin typeface="Arial"/>
               </a:rPr>
-              <a:t>▶  06-series.sh</a:t>
+              <a:t>▶  05-modes.sh</a:t>
             </a:r>
           </a:p>
         </p:txBody>
@@ -14185,7 +14364,7 @@
                 </a:solidFill>
                 <a:latin typeface="Consolas"/>
               </a:rPr>
-              <a:t>$ pav series run demo_series</a:t>
+              <a:t>$ pav run demo_modes.mode_demo           # base: throughput = 1200</a:t>
             </a:r>
           </a:p>
           <a:p>
@@ -14197,7 +14376,7 @@
                 </a:solidFill>
                 <a:latin typeface="Consolas"/>
               </a:rPr>
-              <a:t>Created Test Series demo_series.</a:t>
+              <a:t>  'throughput_mbs': 1200,</a:t>
             </a:r>
           </a:p>
           <a:p>
@@ -14205,11 +14384,11 @@
             <a:r>
               <a:rPr sz="1250" b="0">
                 <a:solidFill>
-                  <a:srgbClr val="1B2B34"/>
-                </a:solidFill>
-                <a:latin typeface="Consolas"/>
-              </a:rPr>
-              <a:t>Started series s152.</a:t>
+                  <a:srgbClr val="B32A2A"/>
+                </a:solidFill>
+                <a:latin typeface="Consolas"/>
+              </a:rPr>
+              <a:t>  'result': 'FAIL'          # 1200 &gt; 1300 is false</a:t>
             </a:r>
           </a:p>
           <a:p>
@@ -14233,7 +14412,7 @@
                 </a:solidFill>
                 <a:latin typeface="Consolas"/>
               </a:rPr>
-              <a:t>$ qstat -a                        # the set's tests dispatched to PBS</a:t>
+              <a:t>$ qstat -a                                # a real PBS job</a:t>
             </a:r>
           </a:p>
           <a:p>
@@ -14245,7 +14424,7 @@
                 </a:solidFill>
                 <a:latin typeface="Consolas"/>
               </a:rPr>
-              <a:t>9076.pbs-server pavilion workq pav_demo_*  1  1  R</a:t>
+              <a:t>8407.pbs-server pavilion workq pav_demo_*  1  1  R</a:t>
             </a:r>
           </a:p>
           <a:p>
@@ -14257,7 +14436,19 @@
                 </a:solidFill>
                 <a:latin typeface="Consolas"/>
               </a:rPr>
-              <a:t>9077.pbs-server pavilion workq pav_demo_*  1  1  R</a:t>
+              <a:t> </a:t>
+            </a:r>
+          </a:p>
+          <a:p>
+            <a:pPr algn="l"/>
+            <a:r>
+              <a:rPr sz="1400" b="1">
+                <a:solidFill>
+                  <a:srgbClr val="2E6DA4"/>
+                </a:solidFill>
+                <a:latin typeface="Consolas"/>
+              </a:rPr>
+              <a:t>$ pav run -m prod demo_modes.mode_demo    # prod overrides -&gt; throughput = 1400</a:t>
             </a:r>
           </a:p>
           <a:p>
@@ -14269,19 +14460,7 @@
                 </a:solidFill>
                 <a:latin typeface="Consolas"/>
               </a:rPr>
-              <a:t> </a:t>
-            </a:r>
-          </a:p>
-          <a:p>
-            <a:pPr algn="l"/>
-            <a:r>
-              <a:rPr sz="1400" b="1">
-                <a:solidFill>
-                  <a:srgbClr val="2E6DA4"/>
-                </a:solidFill>
-                <a:latin typeface="Consolas"/>
-              </a:rPr>
-              <a:t>$ pav series status s152</a:t>
+              <a:t>  'throughput_mbs': 1400,</a:t>
             </a:r>
           </a:p>
           <a:p>
@@ -14289,23 +14468,11 @@
             <a:r>
               <a:rPr sz="1250" b="0">
                 <a:solidFill>
-                  <a:srgbClr val="1B2B34"/>
-                </a:solidFill>
-                <a:latin typeface="Consolas"/>
-              </a:rPr>
-              <a:t>Id   | Name        | Status   | Tests | Pass | Fail</a:t>
-            </a:r>
-          </a:p>
-          <a:p>
-            <a:pPr algn="l"/>
-            <a:r>
-              <a:rPr sz="1250" b="0">
-                <a:solidFill>
-                  <a:srgbClr val="1B2B34"/>
-                </a:solidFill>
-                <a:latin typeface="Consolas"/>
-              </a:rPr>
-              <a:t>s152 | demo_series | COMPLETE |   3   |   2  |   1</a:t>
+                  <a:srgbClr val="1E7D3C"/>
+                </a:solidFill>
+                <a:latin typeface="Consolas"/>
+              </a:rPr>
+              <a:t>  'result': 'PASS'          # 1400 &gt; 1300 is true</a:t>
             </a:r>
           </a:p>
         </p:txBody>
@@ -14339,7 +14506,7 @@
                 </a:solidFill>
                 <a:latin typeface="Arial"/>
               </a:rPr>
-              <a:t>One command runs all three tests in the 'smoke' set — 2 PASS, 1 (intentional) FAIL.</a:t>
+              <a:t>Same test, no edits — the prod mode raised throughput past the 1300 threshold, flipping FAIL → PASS.</a:t>
             </a:r>
           </a:p>
         </p:txBody>
@@ -14434,7 +14601,7 @@
                 </a:solidFill>
                 <a:latin typeface="Arial"/>
               </a:rPr>
-              <a:t>READING &amp; SCRIPTING</a:t>
+              <a:t>GROUPING RUNS</a:t>
             </a:r>
           </a:p>
           <a:p>
@@ -14445,7 +14612,7 @@
                 </a:solidFill>
                 <a:latin typeface="Arial"/>
               </a:rPr>
-              <a:t>Results</a:t>
+              <a:t>Series</a:t>
             </a:r>
           </a:p>
         </p:txBody>
@@ -14497,7 +14664,7 @@
                 </a:solidFill>
                 <a:latin typeface="Arial"/>
               </a:rPr>
-              <a:t>LIVE DEMO · RESULTS</a:t>
+              <a:t>SERIES</a:t>
             </a:r>
           </a:p>
         </p:txBody>
@@ -14531,7 +14698,7 @@
                 </a:solidFill>
                 <a:latin typeface="Arial"/>
               </a:rPr>
-              <a:t>Results: human and machine</a:t>
+              <a:t>A series file</a:t>
             </a:r>
           </a:p>
         </p:txBody>
@@ -14581,14 +14748,48 @@
       </p:sp>
       <p:sp>
         <p:nvSpPr>
-          <p:cNvPr id="5" name="Rectangle 4"/>
+          <p:cNvPr id="5" name="TextBox 4"/>
+          <p:cNvSpPr txBox="1"/>
+          <p:nvPr/>
+        </p:nvSpPr>
+        <p:spPr>
+          <a:xfrm>
+            <a:off x="640080" y="1600200"/>
+            <a:ext cx="10972800" cy="457200"/>
+          </a:xfrm>
+          <a:prstGeom prst="rect">
+            <a:avLst/>
+          </a:prstGeom>
+          <a:noFill/>
+        </p:spPr>
+        <p:txBody>
+          <a:bodyPr wrap="square">
+            <a:spAutoFit/>
+          </a:bodyPr>
+          <a:lstStyle/>
+          <a:p>
+            <a:r>
+              <a:rPr sz="1600" b="0">
+                <a:solidFill>
+                  <a:srgbClr val="5B6674"/>
+                </a:solidFill>
+                <a:latin typeface="Arial"/>
+              </a:rPr>
+              <a:t>demo_series.yaml — name a test set, list the tests it runs.</a:t>
+            </a:r>
+          </a:p>
+        </p:txBody>
+      </p:sp>
+      <p:sp>
+        <p:nvSpPr>
+          <p:cNvPr id="6" name="Rectangle 5"/>
           <p:cNvSpPr/>
           <p:nvPr/>
         </p:nvSpPr>
         <p:spPr>
           <a:xfrm>
-            <a:off x="640080" y="1645920"/>
-            <a:ext cx="10972800" cy="4343400"/>
+            <a:off x="640080" y="2148840"/>
+            <a:ext cx="10972800" cy="4206240"/>
           </a:xfrm>
           <a:prstGeom prst="rect">
             <a:avLst/>
@@ -14617,208 +14818,102 @@
           </a:fontRef>
         </p:style>
         <p:txBody>
-          <a:bodyPr rtlCol="0" anchor="t" wrap="square" lIns="228600" tIns="146304"/>
-          <a:lstStyle/>
-          <a:p>
-            <a:pPr algn="l"/>
-            <a:r>
-              <a:rPr sz="1400" b="1">
-                <a:solidFill>
-                  <a:srgbClr val="2E6DA4"/>
-                </a:solidFill>
-                <a:latin typeface="Consolas"/>
-              </a:rPr>
-              <a:t>$ pav results s71                     # a clean table for humans</a:t>
-            </a:r>
-          </a:p>
-          <a:p>
-            <a:pPr algn="l"/>
-            <a:r>
-              <a:rPr sz="1100" b="0">
-                <a:solidFill>
-                  <a:srgbClr val="1B2B34"/>
-                </a:solidFill>
-                <a:latin typeface="Consolas"/>
-              </a:rPr>
-              <a:t> Test Results: s71.</a:t>
-            </a:r>
-          </a:p>
-          <a:p>
-            <a:pPr algn="l"/>
-            <a:r>
-              <a:rPr sz="1100" b="0">
-                <a:solidFill>
-                  <a:srgbClr val="1B2B34"/>
-                </a:solidFill>
-                <a:latin typeface="Consolas"/>
-              </a:rPr>
-              <a:t> Id    | Name             | Started  | Result</a:t>
-            </a:r>
-          </a:p>
-          <a:p>
-            <a:pPr algn="l"/>
-            <a:r>
-              <a:rPr sz="1100" b="0">
-                <a:solidFill>
-                  <a:srgbClr val="1E7D3C"/>
-                </a:solidFill>
-                <a:latin typeface="Consolas"/>
-              </a:rPr>
-              <a:t> s71.1 | demo_pbs.metrics | 16:40:44 | PASS</a:t>
-            </a:r>
-          </a:p>
-          <a:p>
-            <a:pPr algn="l"/>
-            <a:r>
-              <a:rPr sz="1100" b="0">
-                <a:solidFill>
-                  <a:srgbClr val="1B2B34"/>
-                </a:solidFill>
-                <a:latin typeface="Consolas"/>
-              </a:rPr>
-              <a:t> </a:t>
-            </a:r>
-          </a:p>
-          <a:p>
-            <a:pPr algn="l"/>
-            <a:r>
-              <a:rPr sz="1400" b="1">
-                <a:solidFill>
-                  <a:srgbClr val="2E6DA4"/>
-                </a:solidFill>
-                <a:latin typeface="Consolas"/>
-              </a:rPr>
-              <a:t>$ pav results --json s71              # the same run, for scripting</a:t>
-            </a:r>
-          </a:p>
-          <a:p>
-            <a:pPr algn="l"/>
-            <a:r>
-              <a:rPr sz="1100" b="0">
-                <a:solidFill>
-                  <a:srgbClr val="1B2B34"/>
-                </a:solidFill>
-                <a:latin typeface="Consolas"/>
-              </a:rPr>
-              <a:t>{</a:t>
-            </a:r>
-          </a:p>
-          <a:p>
-            <a:pPr algn="l"/>
-            <a:r>
-              <a:rPr sz="1100" b="0">
-                <a:solidFill>
-                  <a:srgbClr val="1B2B34"/>
-                </a:solidFill>
-                <a:latin typeface="Consolas"/>
-              </a:rPr>
-              <a:t>  "name": "demo_pbs.metrics",</a:t>
-            </a:r>
-          </a:p>
-          <a:p>
-            <a:pPr algn="l"/>
-            <a:r>
-              <a:rPr sz="1100" b="0">
-                <a:solidFill>
-                  <a:srgbClr val="1E7D3C"/>
-                </a:solidFill>
-                <a:latin typeface="Consolas"/>
-              </a:rPr>
-              <a:t>  "result": "PASS",</a:t>
-            </a:r>
-          </a:p>
-          <a:p>
-            <a:pPr algn="l"/>
-            <a:r>
-              <a:rPr sz="1100" b="0">
-                <a:solidFill>
-                  <a:srgbClr val="1B2B34"/>
-                </a:solidFill>
-                <a:latin typeface="Consolas"/>
-              </a:rPr>
-              <a:t>  "throughput_mbs": 123.45,</a:t>
-            </a:r>
-          </a:p>
-          <a:p>
-            <a:pPr algn="l"/>
-            <a:r>
-              <a:rPr sz="1100" b="0">
-                <a:solidFill>
-                  <a:srgbClr val="1B2B34"/>
-                </a:solidFill>
-                <a:latin typeface="Consolas"/>
-              </a:rPr>
-              <a:t>  "latency_ms": 5.6,</a:t>
-            </a:r>
-          </a:p>
-          <a:p>
-            <a:pPr algn="l"/>
-            <a:r>
-              <a:rPr sz="1100" b="0">
-                <a:solidFill>
-                  <a:srgbClr val="1B2B34"/>
-                </a:solidFill>
-                <a:latin typeface="Consolas"/>
-              </a:rPr>
-              <a:t>  "errors": 0,</a:t>
-            </a:r>
-          </a:p>
-          <a:p>
-            <a:pPr algn="l"/>
-            <a:r>
-              <a:rPr sz="1100" b="0">
-                <a:solidFill>
-                  <a:srgbClr val="1B2B34"/>
-                </a:solidFill>
-                <a:latin typeface="Consolas"/>
-              </a:rPr>
-              <a:t>  "duration": 0.041</a:t>
-            </a:r>
-          </a:p>
-          <a:p>
-            <a:pPr algn="l"/>
-            <a:r>
-              <a:rPr sz="1100" b="0">
-                <a:solidFill>
-                  <a:srgbClr val="1B2B34"/>
-                </a:solidFill>
-                <a:latin typeface="Consolas"/>
-              </a:rPr>
-              <a:t>}</a:t>
-            </a:r>
-          </a:p>
-        </p:txBody>
-      </p:sp>
-      <p:sp>
-        <p:nvSpPr>
-          <p:cNvPr id="6" name="TextBox 5"/>
-          <p:cNvSpPr txBox="1"/>
-          <p:nvPr/>
-        </p:nvSpPr>
-        <p:spPr>
-          <a:xfrm>
-            <a:off x="640080" y="6144768"/>
-            <a:ext cx="10972800" cy="502920"/>
-          </a:xfrm>
-          <a:prstGeom prst="rect">
-            <a:avLst/>
-          </a:prstGeom>
-          <a:noFill/>
-        </p:spPr>
-        <p:txBody>
-          <a:bodyPr wrap="square">
-            <a:spAutoFit/>
-          </a:bodyPr>
-          <a:lstStyle/>
-          <a:p>
+          <a:bodyPr rtlCol="0" anchor="t" wrap="square" lIns="228600" tIns="164592"/>
+          <a:lstStyle/>
+          <a:p>
+            <a:pPr algn="l"/>
             <a:r>
               <a:rPr sz="1400" b="0">
                 <a:solidFill>
                   <a:srgbClr val="5B6674"/>
                 </a:solidFill>
-                <a:latin typeface="Arial"/>
-              </a:rPr>
-              <a:t>Same results, two shapes: a table to read, JSON to pipe into jq / a script / a logger.</a:t>
+                <a:latin typeface="Consolas"/>
+              </a:rPr>
+              <a:t># config/series/demo_series.yaml</a:t>
+            </a:r>
+          </a:p>
+          <a:p>
+            <a:pPr algn="l"/>
+            <a:r>
+              <a:rPr sz="1400" b="0">
+                <a:solidFill>
+                  <a:srgbClr val="1B2B34"/>
+                </a:solidFill>
+                <a:latin typeface="Consolas"/>
+              </a:rPr>
+              <a:t>ordered: False</a:t>
+            </a:r>
+          </a:p>
+          <a:p>
+            <a:pPr algn="l"/>
+            <a:r>
+              <a:rPr sz="1400" b="0">
+                <a:solidFill>
+                  <a:srgbClr val="1B2B34"/>
+                </a:solidFill>
+                <a:latin typeface="Consolas"/>
+              </a:rPr>
+              <a:t>test_sets:</a:t>
+            </a:r>
+          </a:p>
+          <a:p>
+            <a:pPr algn="l"/>
+            <a:r>
+              <a:rPr sz="1400" b="0">
+                <a:solidFill>
+                  <a:srgbClr val="1B2B34"/>
+                </a:solidFill>
+                <a:latin typeface="Consolas"/>
+              </a:rPr>
+              <a:t>  smoke:</a:t>
+            </a:r>
+          </a:p>
+          <a:p>
+            <a:pPr algn="l"/>
+            <a:r>
+              <a:rPr sz="1400" b="0">
+                <a:solidFill>
+                  <a:srgbClr val="1B2B34"/>
+                </a:solidFill>
+                <a:latin typeface="Consolas"/>
+              </a:rPr>
+              <a:t>    tests:</a:t>
+            </a:r>
+          </a:p>
+          <a:p>
+            <a:pPr algn="l"/>
+            <a:r>
+              <a:rPr sz="1400" b="0">
+                <a:solidFill>
+                  <a:srgbClr val="1B2B34"/>
+                </a:solidFill>
+                <a:latin typeface="Consolas"/>
+              </a:rPr>
+              <a:t>      - demo_pbs.pass</a:t>
+            </a:r>
+          </a:p>
+          <a:p>
+            <a:pPr algn="l"/>
+            <a:r>
+              <a:rPr sz="1400" b="0">
+                <a:solidFill>
+                  <a:srgbClr val="1B2B34"/>
+                </a:solidFill>
+                <a:latin typeface="Consolas"/>
+              </a:rPr>
+              <a:t>      - demo_pbs.fail</a:t>
+            </a:r>
+          </a:p>
+          <a:p>
+            <a:pPr algn="l"/>
+            <a:r>
+              <a:rPr sz="1400" b="0">
+                <a:solidFill>
+                  <a:srgbClr val="1B2B34"/>
+                </a:solidFill>
+                <a:latin typeface="Consolas"/>
+              </a:rPr>
+              <a:t>      - demo_pbs.metrics</a:t>
             </a:r>
           </a:p>
         </p:txBody>
@@ -14843,20 +14938,88 @@
       <p:grpSpPr/>
       <p:sp>
         <p:nvSpPr>
-          <p:cNvPr id="2" name="Rectangle 1"/>
+          <p:cNvPr id="2" name="TextBox 1"/>
+          <p:cNvSpPr txBox="1"/>
+          <p:nvPr/>
+        </p:nvSpPr>
+        <p:spPr>
+          <a:xfrm>
+            <a:off x="548640" y="320040"/>
+            <a:ext cx="7680960" cy="365760"/>
+          </a:xfrm>
+          <a:prstGeom prst="rect">
+            <a:avLst/>
+          </a:prstGeom>
+          <a:noFill/>
+        </p:spPr>
+        <p:txBody>
+          <a:bodyPr wrap="square">
+            <a:spAutoFit/>
+          </a:bodyPr>
+          <a:lstStyle/>
+          <a:p>
+            <a:r>
+              <a:rPr sz="1200" b="1">
+                <a:solidFill>
+                  <a:srgbClr val="2E6DA4"/>
+                </a:solidFill>
+                <a:latin typeface="Arial"/>
+              </a:rPr>
+              <a:t>LIVE DEMO · L6</a:t>
+            </a:r>
+          </a:p>
+        </p:txBody>
+      </p:sp>
+      <p:sp>
+        <p:nvSpPr>
+          <p:cNvPr id="3" name="TextBox 2"/>
+          <p:cNvSpPr txBox="1"/>
+          <p:nvPr/>
+        </p:nvSpPr>
+        <p:spPr>
+          <a:xfrm>
+            <a:off x="548640" y="640080"/>
+            <a:ext cx="11064240" cy="822960"/>
+          </a:xfrm>
+          <a:prstGeom prst="rect">
+            <a:avLst/>
+          </a:prstGeom>
+          <a:noFill/>
+        </p:spPr>
+        <p:txBody>
+          <a:bodyPr wrap="square">
+            <a:spAutoFit/>
+          </a:bodyPr>
+          <a:lstStyle/>
+          <a:p>
+            <a:r>
+              <a:rPr sz="3000" b="1">
+                <a:solidFill>
+                  <a:srgbClr val="1F3B63"/>
+                </a:solidFill>
+                <a:latin typeface="Arial"/>
+              </a:rPr>
+              <a:t>Run a whole group</a:t>
+            </a:r>
+          </a:p>
+        </p:txBody>
+      </p:sp>
+      <p:sp>
+        <p:nvSpPr>
+          <p:cNvPr id="4" name="Rectangle 3"/>
           <p:cNvSpPr/>
           <p:nvPr/>
         </p:nvSpPr>
         <p:spPr>
           <a:xfrm>
-            <a:off x="0" y="2651760"/>
-            <a:ext cx="12191695" cy="1554480"/>
+            <a:off x="566928" y="1417320"/>
+            <a:ext cx="2011680" cy="38100"/>
           </a:xfrm>
           <a:prstGeom prst="rect">
             <a:avLst/>
           </a:prstGeom>
           <a:solidFill>
-            <a:srgbClr val="EEF2F7"/>
+            <a:srgbClr val="2E6DA4"/>
           </a:solidFill>
           <a:ln>
             <a:noFill/>
@@ -14886,14 +15049,240 @@
       </p:sp>
       <p:sp>
         <p:nvSpPr>
-          <p:cNvPr id="3" name="TextBox 2"/>
+          <p:cNvPr id="5" name="Rectangle 4"/>
+          <p:cNvSpPr/>
+          <p:nvPr/>
+        </p:nvSpPr>
+        <p:spPr>
+          <a:xfrm>
+            <a:off x="8503920" y="457200"/>
+            <a:ext cx="3108960" cy="502920"/>
+          </a:xfrm>
+          <a:prstGeom prst="rect">
+            <a:avLst/>
+          </a:prstGeom>
+          <a:solidFill>
+            <a:srgbClr val="2E6DA4"/>
+          </a:solidFill>
+          <a:ln>
+            <a:noFill/>
+          </a:ln>
+        </p:spPr>
+        <p:style>
+          <a:lnRef idx="1">
+            <a:schemeClr val="accent1"/>
+          </a:lnRef>
+          <a:fillRef idx="3">
+            <a:schemeClr val="accent1"/>
+          </a:fillRef>
+          <a:effectRef idx="2">
+            <a:schemeClr val="accent1"/>
+          </a:effectRef>
+          <a:fontRef idx="minor">
+            <a:schemeClr val="lt1"/>
+          </a:fontRef>
+        </p:style>
+        <p:txBody>
+          <a:bodyPr rtlCol="0" anchor="ctr" wrap="square"/>
+          <a:lstStyle/>
+          <a:p>
+            <a:pPr algn="ctr"/>
+            <a:r>
+              <a:rPr sz="1300" b="1">
+                <a:solidFill>
+                  <a:srgbClr val="FFFFFF"/>
+                </a:solidFill>
+                <a:latin typeface="Arial"/>
+              </a:rPr>
+              <a:t>▶  06-series.sh</a:t>
+            </a:r>
+          </a:p>
+        </p:txBody>
+      </p:sp>
+      <p:sp>
+        <p:nvSpPr>
+          <p:cNvPr id="6" name="Rectangle 5"/>
+          <p:cNvSpPr/>
+          <p:nvPr/>
+        </p:nvSpPr>
+        <p:spPr>
+          <a:xfrm>
+            <a:off x="640080" y="1645920"/>
+            <a:ext cx="10972800" cy="4343400"/>
+          </a:xfrm>
+          <a:prstGeom prst="rect">
+            <a:avLst/>
+          </a:prstGeom>
+          <a:solidFill>
+            <a:srgbClr val="F3F4F6"/>
+          </a:solidFill>
+          <a:ln w="12700">
+            <a:solidFill>
+              <a:srgbClr val="D5DAE0"/>
+            </a:solidFill>
+          </a:ln>
+        </p:spPr>
+        <p:style>
+          <a:lnRef idx="1">
+            <a:schemeClr val="accent1"/>
+          </a:lnRef>
+          <a:fillRef idx="3">
+            <a:schemeClr val="accent1"/>
+          </a:fillRef>
+          <a:effectRef idx="2">
+            <a:schemeClr val="accent1"/>
+          </a:effectRef>
+          <a:fontRef idx="minor">
+            <a:schemeClr val="lt1"/>
+          </a:fontRef>
+        </p:style>
+        <p:txBody>
+          <a:bodyPr rtlCol="0" anchor="t" wrap="square" lIns="228600" tIns="146304"/>
+          <a:lstStyle/>
+          <a:p>
+            <a:pPr algn="l"/>
+            <a:r>
+              <a:rPr sz="1400" b="1">
+                <a:solidFill>
+                  <a:srgbClr val="2E6DA4"/>
+                </a:solidFill>
+                <a:latin typeface="Consolas"/>
+              </a:rPr>
+              <a:t>$ pav series run demo_series</a:t>
+            </a:r>
+          </a:p>
+          <a:p>
+            <a:pPr algn="l"/>
+            <a:r>
+              <a:rPr sz="1250" b="0">
+                <a:solidFill>
+                  <a:srgbClr val="1B2B34"/>
+                </a:solidFill>
+                <a:latin typeface="Consolas"/>
+              </a:rPr>
+              <a:t>Created Test Series demo_series.</a:t>
+            </a:r>
+          </a:p>
+          <a:p>
+            <a:pPr algn="l"/>
+            <a:r>
+              <a:rPr sz="1250" b="0">
+                <a:solidFill>
+                  <a:srgbClr val="1B2B34"/>
+                </a:solidFill>
+                <a:latin typeface="Consolas"/>
+              </a:rPr>
+              <a:t>Started series s152.</a:t>
+            </a:r>
+          </a:p>
+          <a:p>
+            <a:pPr algn="l"/>
+            <a:r>
+              <a:rPr sz="1250" b="0">
+                <a:solidFill>
+                  <a:srgbClr val="1B2B34"/>
+                </a:solidFill>
+                <a:latin typeface="Consolas"/>
+              </a:rPr>
+              <a:t> </a:t>
+            </a:r>
+          </a:p>
+          <a:p>
+            <a:pPr algn="l"/>
+            <a:r>
+              <a:rPr sz="1400" b="1">
+                <a:solidFill>
+                  <a:srgbClr val="2E6DA4"/>
+                </a:solidFill>
+                <a:latin typeface="Consolas"/>
+              </a:rPr>
+              <a:t>$ qstat -a                        # the set's tests dispatched to PBS</a:t>
+            </a:r>
+          </a:p>
+          <a:p>
+            <a:pPr algn="l"/>
+            <a:r>
+              <a:rPr sz="1250" b="0">
+                <a:solidFill>
+                  <a:srgbClr val="1B2B34"/>
+                </a:solidFill>
+                <a:latin typeface="Consolas"/>
+              </a:rPr>
+              <a:t>9076.pbs-server pavilion workq pav_demo_*  1  1  R</a:t>
+            </a:r>
+          </a:p>
+          <a:p>
+            <a:pPr algn="l"/>
+            <a:r>
+              <a:rPr sz="1250" b="0">
+                <a:solidFill>
+                  <a:srgbClr val="1B2B34"/>
+                </a:solidFill>
+                <a:latin typeface="Consolas"/>
+              </a:rPr>
+              <a:t>9077.pbs-server pavilion workq pav_demo_*  1  1  R</a:t>
+            </a:r>
+          </a:p>
+          <a:p>
+            <a:pPr algn="l"/>
+            <a:r>
+              <a:rPr sz="1250" b="0">
+                <a:solidFill>
+                  <a:srgbClr val="1B2B34"/>
+                </a:solidFill>
+                <a:latin typeface="Consolas"/>
+              </a:rPr>
+              <a:t> </a:t>
+            </a:r>
+          </a:p>
+          <a:p>
+            <a:pPr algn="l"/>
+            <a:r>
+              <a:rPr sz="1400" b="1">
+                <a:solidFill>
+                  <a:srgbClr val="2E6DA4"/>
+                </a:solidFill>
+                <a:latin typeface="Consolas"/>
+              </a:rPr>
+              <a:t>$ pav series status s152</a:t>
+            </a:r>
+          </a:p>
+          <a:p>
+            <a:pPr algn="l"/>
+            <a:r>
+              <a:rPr sz="1250" b="0">
+                <a:solidFill>
+                  <a:srgbClr val="1B2B34"/>
+                </a:solidFill>
+                <a:latin typeface="Consolas"/>
+              </a:rPr>
+              <a:t>Id   | Name        | Status   | Tests | Pass | Fail</a:t>
+            </a:r>
+          </a:p>
+          <a:p>
+            <a:pPr algn="l"/>
+            <a:r>
+              <a:rPr sz="1250" b="0">
+                <a:solidFill>
+                  <a:srgbClr val="1B2B34"/>
+                </a:solidFill>
+                <a:latin typeface="Consolas"/>
+              </a:rPr>
+              <a:t>s152 | demo_series | COMPLETE |   3   |   2  |   1</a:t>
+            </a:r>
+          </a:p>
+        </p:txBody>
+      </p:sp>
+      <p:sp>
+        <p:nvSpPr>
+          <p:cNvPr id="7" name="TextBox 6"/>
           <p:cNvSpPr txBox="1"/>
           <p:nvPr/>
         </p:nvSpPr>
         <p:spPr>
           <a:xfrm>
-            <a:off x="731520" y="2834640"/>
-            <a:ext cx="10698480" cy="1188720"/>
+            <a:off x="640080" y="6144768"/>
+            <a:ext cx="10972800" cy="502920"/>
           </a:xfrm>
           <a:prstGeom prst="rect">
             <a:avLst/>
@@ -14907,24 +15296,13 @@
           <a:lstStyle/>
           <a:p>
             <a:r>
-              <a:rPr sz="1300" b="1">
-                <a:solidFill>
-                  <a:srgbClr val="2E6DA4"/>
-                </a:solidFill>
-                <a:latin typeface="Arial"/>
-              </a:rPr>
-              <a:t>EXTENDING PAVILION</a:t>
-            </a:r>
-          </a:p>
-          <a:p>
-            <a:r>
-              <a:rPr sz="3600" b="1">
-                <a:solidFill>
-                  <a:srgbClr val="1F3B63"/>
-                </a:solidFill>
-                <a:latin typeface="Arial"/>
-              </a:rPr>
-              <a:t>Plugins</a:t>
+              <a:rPr sz="1400" b="0">
+                <a:solidFill>
+                  <a:srgbClr val="5B6674"/>
+                </a:solidFill>
+                <a:latin typeface="Arial"/>
+              </a:rPr>
+              <a:t>One command runs all three tests in the 'smoke' set — 2 PASS, 1 (intentional) FAIL.</a:t>
             </a:r>
           </a:p>
         </p:txBody>
@@ -14949,88 +15327,20 @@
       <p:grpSpPr/>
       <p:sp>
         <p:nvSpPr>
-          <p:cNvPr id="2" name="TextBox 1"/>
-          <p:cNvSpPr txBox="1"/>
-          <p:nvPr/>
-        </p:nvSpPr>
-        <p:spPr>
-          <a:xfrm>
-            <a:off x="548640" y="320040"/>
-            <a:ext cx="7680960" cy="365760"/>
-          </a:xfrm>
-          <a:prstGeom prst="rect">
-            <a:avLst/>
-          </a:prstGeom>
-          <a:noFill/>
-        </p:spPr>
-        <p:txBody>
-          <a:bodyPr wrap="square">
-            <a:spAutoFit/>
-          </a:bodyPr>
-          <a:lstStyle/>
-          <a:p>
-            <a:r>
-              <a:rPr sz="1200" b="1">
-                <a:solidFill>
-                  <a:srgbClr val="2E6DA4"/>
-                </a:solidFill>
-                <a:latin typeface="Arial"/>
-              </a:rPr>
-              <a:t>PLUGINS</a:t>
-            </a:r>
-          </a:p>
-        </p:txBody>
-      </p:sp>
-      <p:sp>
-        <p:nvSpPr>
-          <p:cNvPr id="3" name="TextBox 2"/>
-          <p:cNvSpPr txBox="1"/>
-          <p:nvPr/>
-        </p:nvSpPr>
-        <p:spPr>
-          <a:xfrm>
-            <a:off x="548640" y="640080"/>
-            <a:ext cx="11064240" cy="822960"/>
-          </a:xfrm>
-          <a:prstGeom prst="rect">
-            <a:avLst/>
-          </a:prstGeom>
-          <a:noFill/>
-        </p:spPr>
-        <p:txBody>
-          <a:bodyPr wrap="square">
-            <a:spAutoFit/>
-          </a:bodyPr>
-          <a:lstStyle/>
-          <a:p>
-            <a:r>
-              <a:rPr sz="3000" b="1">
-                <a:solidFill>
-                  <a:srgbClr val="1F3B63"/>
-                </a:solidFill>
-                <a:latin typeface="Arial"/>
-              </a:rPr>
-              <a:t>Pavilion is plugins all the way down</a:t>
-            </a:r>
-          </a:p>
-        </p:txBody>
-      </p:sp>
-      <p:sp>
-        <p:nvSpPr>
-          <p:cNvPr id="4" name="Rectangle 3"/>
+          <p:cNvPr id="2" name="Rectangle 1"/>
           <p:cNvSpPr/>
           <p:nvPr/>
         </p:nvSpPr>
         <p:spPr>
           <a:xfrm>
-            <a:off x="566928" y="1417320"/>
-            <a:ext cx="2011680" cy="38100"/>
+            <a:off x="0" y="2651760"/>
+            <a:ext cx="12191695" cy="1554480"/>
           </a:xfrm>
           <a:prstGeom prst="rect">
             <a:avLst/>
           </a:prstGeom>
           <a:solidFill>
-            <a:srgbClr val="2E6DA4"/>
+            <a:srgbClr val="EEF2F7"/>
           </a:solidFill>
           <a:ln>
             <a:noFill/>
@@ -15060,14 +15370,14 @@
       </p:sp>
       <p:sp>
         <p:nvSpPr>
-          <p:cNvPr id="5" name="TextBox 4"/>
+          <p:cNvPr id="3" name="TextBox 2"/>
           <p:cNvSpPr txBox="1"/>
           <p:nvPr/>
         </p:nvSpPr>
         <p:spPr>
           <a:xfrm>
-            <a:off x="640080" y="1691640"/>
-            <a:ext cx="10972800" cy="4754880"/>
+            <a:off x="731520" y="2834640"/>
+            <a:ext cx="10698480" cy="1188720"/>
           </a:xfrm>
           <a:prstGeom prst="rect">
             <a:avLst/>
@@ -15080,99 +15390,25 @@
           </a:bodyPr>
           <a:lstStyle/>
           <a:p>
-            <a:pPr>
-              <a:spcAft>
-                <a:spcPts val="1000"/>
-              </a:spcAft>
-            </a:pPr>
-            <a:r>
-              <a:rPr sz="2000" b="0">
-                <a:solidFill>
-                  <a:srgbClr val="21252B"/>
-                </a:solidFill>
-                <a:latin typeface="Arial"/>
-              </a:rPr>
-              <a:t>•  Scheduler plugins — raw, slurm, flux, pbs (PBS is ours).</a:t>
-            </a:r>
-          </a:p>
-          <a:p>
-            <a:pPr>
-              <a:spcAft>
-                <a:spcPts val="1000"/>
-              </a:spcAft>
-            </a:pPr>
-            <a:r>
-              <a:rPr sz="2000" b="0">
-                <a:solidFill>
-                  <a:srgbClr val="21252B"/>
-                </a:solidFill>
-                <a:latin typeface="Arial"/>
-              </a:rPr>
-              <a:t>•  Result parsers — regex, constant, table, …</a:t>
-            </a:r>
-          </a:p>
-          <a:p>
-            <a:pPr>
-              <a:spcAft>
-                <a:spcPts val="1000"/>
-              </a:spcAft>
-            </a:pPr>
-            <a:r>
-              <a:rPr sz="2000" b="0">
-                <a:solidFill>
-                  <a:srgbClr val="21252B"/>
-                </a:solidFill>
-                <a:latin typeface="Arial"/>
-              </a:rPr>
-              <a:t>•  System variables — expose machine facts to tests (e.g. sys_name).</a:t>
-            </a:r>
-          </a:p>
-          <a:p>
-            <a:pPr>
-              <a:spcAft>
-                <a:spcPts val="1000"/>
-              </a:spcAft>
-            </a:pPr>
-            <a:r>
-              <a:rPr sz="2000" b="0">
-                <a:solidFill>
-                  <a:srgbClr val="21252B"/>
-                </a:solidFill>
-                <a:latin typeface="Arial"/>
-              </a:rPr>
-              <a:t>•  Command plugins — add whole new `pav &lt;command&gt;` subcommands.</a:t>
-            </a:r>
-          </a:p>
-          <a:p>
-            <a:pPr>
-              <a:spcAft>
-                <a:spcPts val="1000"/>
-              </a:spcAft>
-            </a:pPr>
-            <a:r>
-              <a:rPr sz="2000" b="0">
-                <a:solidFill>
-                  <a:srgbClr val="21252B"/>
-                </a:solidFill>
-                <a:latin typeface="Arial"/>
-              </a:rPr>
-              <a:t>•  Result loggers — ship results anywhere (CSV, OpenSearch, custom).</a:t>
-            </a:r>
-          </a:p>
-          <a:p>
-            <a:pPr>
-              <a:spcAft>
-                <a:spcPts val="1000"/>
-              </a:spcAft>
-            </a:pPr>
-            <a:r>
-              <a:rPr sz="1700" b="0">
-                <a:solidFill>
-                  <a:srgbClr val="5B6674"/>
-                </a:solidFill>
-                <a:latin typeface="Arial"/>
-              </a:rPr>
-              <a:t>    – Drop a .py + a .yapsy-plugin into config/plugins/ — Pavilion discovers it.</a:t>
+            <a:r>
+              <a:rPr sz="1300" b="1">
+                <a:solidFill>
+                  <a:srgbClr val="2E6DA4"/>
+                </a:solidFill>
+                <a:latin typeface="Arial"/>
+              </a:rPr>
+              <a:t>READING &amp; SCRIPTING</a:t>
+            </a:r>
+          </a:p>
+          <a:p>
+            <a:r>
+              <a:rPr sz="3600" b="1">
+                <a:solidFill>
+                  <a:srgbClr val="1F3B63"/>
+                </a:solidFill>
+                <a:latin typeface="Arial"/>
+              </a:rPr>
+              <a:t>Results</a:t>
             </a:r>
           </a:p>
         </p:txBody>
@@ -15224,7 +15460,7 @@
                 </a:solidFill>
                 <a:latin typeface="Arial"/>
               </a:rPr>
-              <a:t>CUSTOM COMMANDS</a:t>
+              <a:t>LIVE DEMO · RESULTS</a:t>
             </a:r>
           </a:p>
         </p:txBody>
@@ -15258,7 +15494,7 @@
                 </a:solidFill>
                 <a:latin typeface="Arial"/>
               </a:rPr>
-              <a:t>Command plugins (ours)</a:t>
+              <a:t>Results: human and machine</a:t>
             </a:r>
           </a:p>
         </p:txBody>
@@ -15308,14 +15544,224 @@
       </p:sp>
       <p:sp>
         <p:nvSpPr>
-          <p:cNvPr id="5" name="TextBox 4"/>
+          <p:cNvPr id="5" name="Rectangle 4"/>
+          <p:cNvSpPr/>
+          <p:nvPr/>
+        </p:nvSpPr>
+        <p:spPr>
+          <a:xfrm>
+            <a:off x="640080" y="1645920"/>
+            <a:ext cx="10972800" cy="4343400"/>
+          </a:xfrm>
+          <a:prstGeom prst="rect">
+            <a:avLst/>
+          </a:prstGeom>
+          <a:solidFill>
+            <a:srgbClr val="F3F4F6"/>
+          </a:solidFill>
+          <a:ln w="12700">
+            <a:solidFill>
+              <a:srgbClr val="D5DAE0"/>
+            </a:solidFill>
+          </a:ln>
+        </p:spPr>
+        <p:style>
+          <a:lnRef idx="1">
+            <a:schemeClr val="accent1"/>
+          </a:lnRef>
+          <a:fillRef idx="3">
+            <a:schemeClr val="accent1"/>
+          </a:fillRef>
+          <a:effectRef idx="2">
+            <a:schemeClr val="accent1"/>
+          </a:effectRef>
+          <a:fontRef idx="minor">
+            <a:schemeClr val="lt1"/>
+          </a:fontRef>
+        </p:style>
+        <p:txBody>
+          <a:bodyPr rtlCol="0" anchor="t" wrap="square" lIns="228600" tIns="146304"/>
+          <a:lstStyle/>
+          <a:p>
+            <a:pPr algn="l"/>
+            <a:r>
+              <a:rPr sz="1400" b="1">
+                <a:solidFill>
+                  <a:srgbClr val="2E6DA4"/>
+                </a:solidFill>
+                <a:latin typeface="Consolas"/>
+              </a:rPr>
+              <a:t>$ pav results s71                     # a clean table for humans</a:t>
+            </a:r>
+          </a:p>
+          <a:p>
+            <a:pPr algn="l"/>
+            <a:r>
+              <a:rPr sz="1100" b="0">
+                <a:solidFill>
+                  <a:srgbClr val="1B2B34"/>
+                </a:solidFill>
+                <a:latin typeface="Consolas"/>
+              </a:rPr>
+              <a:t> Test Results: s71.</a:t>
+            </a:r>
+          </a:p>
+          <a:p>
+            <a:pPr algn="l"/>
+            <a:r>
+              <a:rPr sz="1100" b="0">
+                <a:solidFill>
+                  <a:srgbClr val="1B2B34"/>
+                </a:solidFill>
+                <a:latin typeface="Consolas"/>
+              </a:rPr>
+              <a:t> Id    | Name             | Started  | Result</a:t>
+            </a:r>
+          </a:p>
+          <a:p>
+            <a:pPr algn="l"/>
+            <a:r>
+              <a:rPr sz="1100" b="0">
+                <a:solidFill>
+                  <a:srgbClr val="1E7D3C"/>
+                </a:solidFill>
+                <a:latin typeface="Consolas"/>
+              </a:rPr>
+              <a:t> s71.1 | demo_pbs.metrics | 16:40:44 | PASS</a:t>
+            </a:r>
+          </a:p>
+          <a:p>
+            <a:pPr algn="l"/>
+            <a:r>
+              <a:rPr sz="1100" b="0">
+                <a:solidFill>
+                  <a:srgbClr val="1B2B34"/>
+                </a:solidFill>
+                <a:latin typeface="Consolas"/>
+              </a:rPr>
+              <a:t> </a:t>
+            </a:r>
+          </a:p>
+          <a:p>
+            <a:pPr algn="l"/>
+            <a:r>
+              <a:rPr sz="1400" b="1">
+                <a:solidFill>
+                  <a:srgbClr val="2E6DA4"/>
+                </a:solidFill>
+                <a:latin typeface="Consolas"/>
+              </a:rPr>
+              <a:t>$ pav results --json s71              # the same run, for scripting</a:t>
+            </a:r>
+          </a:p>
+          <a:p>
+            <a:pPr algn="l"/>
+            <a:r>
+              <a:rPr sz="1100" b="0">
+                <a:solidFill>
+                  <a:srgbClr val="1B2B34"/>
+                </a:solidFill>
+                <a:latin typeface="Consolas"/>
+              </a:rPr>
+              <a:t>{</a:t>
+            </a:r>
+          </a:p>
+          <a:p>
+            <a:pPr algn="l"/>
+            <a:r>
+              <a:rPr sz="1100" b="0">
+                <a:solidFill>
+                  <a:srgbClr val="1B2B34"/>
+                </a:solidFill>
+                <a:latin typeface="Consolas"/>
+              </a:rPr>
+              <a:t>  "name": "demo_pbs.metrics",</a:t>
+            </a:r>
+          </a:p>
+          <a:p>
+            <a:pPr algn="l"/>
+            <a:r>
+              <a:rPr sz="1100" b="0">
+                <a:solidFill>
+                  <a:srgbClr val="1E7D3C"/>
+                </a:solidFill>
+                <a:latin typeface="Consolas"/>
+              </a:rPr>
+              <a:t>  "result": "PASS",</a:t>
+            </a:r>
+          </a:p>
+          <a:p>
+            <a:pPr algn="l"/>
+            <a:r>
+              <a:rPr sz="1100" b="0">
+                <a:solidFill>
+                  <a:srgbClr val="1B2B34"/>
+                </a:solidFill>
+                <a:latin typeface="Consolas"/>
+              </a:rPr>
+              <a:t>  "throughput_mbs": 123.45,</a:t>
+            </a:r>
+          </a:p>
+          <a:p>
+            <a:pPr algn="l"/>
+            <a:r>
+              <a:rPr sz="1100" b="0">
+                <a:solidFill>
+                  <a:srgbClr val="1B2B34"/>
+                </a:solidFill>
+                <a:latin typeface="Consolas"/>
+              </a:rPr>
+              <a:t>  "latency_ms": 5.6,</a:t>
+            </a:r>
+          </a:p>
+          <a:p>
+            <a:pPr algn="l"/>
+            <a:r>
+              <a:rPr sz="1100" b="0">
+                <a:solidFill>
+                  <a:srgbClr val="1B2B34"/>
+                </a:solidFill>
+                <a:latin typeface="Consolas"/>
+              </a:rPr>
+              <a:t>  "errors": 0,</a:t>
+            </a:r>
+          </a:p>
+          <a:p>
+            <a:pPr algn="l"/>
+            <a:r>
+              <a:rPr sz="1100" b="0">
+                <a:solidFill>
+                  <a:srgbClr val="1B2B34"/>
+                </a:solidFill>
+                <a:latin typeface="Consolas"/>
+              </a:rPr>
+              <a:t>  "duration": 0.041</a:t>
+            </a:r>
+          </a:p>
+          <a:p>
+            <a:pPr algn="l"/>
+            <a:r>
+              <a:rPr sz="1100" b="0">
+                <a:solidFill>
+                  <a:srgbClr val="1B2B34"/>
+                </a:solidFill>
+                <a:latin typeface="Consolas"/>
+              </a:rPr>
+              <a:t>}</a:t>
+            </a:r>
+          </a:p>
+        </p:txBody>
+      </p:sp>
+      <p:sp>
+        <p:nvSpPr>
+          <p:cNvPr id="6" name="TextBox 5"/>
           <p:cNvSpPr txBox="1"/>
           <p:nvPr/>
         </p:nvSpPr>
         <p:spPr>
           <a:xfrm>
-            <a:off x="640080" y="1691640"/>
-            <a:ext cx="10972800" cy="4754880"/>
+            <a:off x="640080" y="6144768"/>
+            <a:ext cx="10972800" cy="502920"/>
           </a:xfrm>
           <a:prstGeom prst="rect">
             <a:avLst/>
@@ -15328,67 +15774,14 @@
           </a:bodyPr>
           <a:lstStyle/>
           <a:p>
-            <a:pPr>
-              <a:spcAft>
-                <a:spcPts val="1000"/>
-              </a:spcAft>
-            </a:pPr>
-            <a:r>
-              <a:rPr sz="2000" b="0">
-                <a:solidFill>
-                  <a:srgbClr val="21252B"/>
-                </a:solidFill>
-                <a:latin typeface="Arial"/>
-              </a:rPr>
-              <a:t>•  hello — a friendly sanity check + Pavilion info.</a:t>
-            </a:r>
-          </a:p>
-          <a:p>
-            <a:pPr>
-              <a:spcAft>
-                <a:spcPts val="1000"/>
-              </a:spcAft>
-            </a:pPr>
-            <a:r>
-              <a:rPr sz="2000" b="0">
-                <a:solidFill>
-                  <a:srgbClr val="21252B"/>
-                </a:solidFill>
-                <a:latin typeface="Arial"/>
-              </a:rPr>
-              <a:t>•  recent — the most recent test runs, colored by result.</a:t>
-            </a:r>
-          </a:p>
-          <a:p>
-            <a:pPr>
-              <a:spcAft>
-                <a:spcPts val="1000"/>
-              </a:spcAft>
-            </a:pPr>
-            <a:r>
-              <a:rPr sz="2000" b="0">
-                <a:solidFill>
-                  <a:srgbClr val="21252B"/>
-                </a:solidFill>
-                <a:latin typeface="Arial"/>
-              </a:rPr>
-              <a:t>•  test-summary — a PASS/FAIL tally across recent runs.</a:t>
-            </a:r>
-          </a:p>
-          <a:p>
-            <a:pPr>
-              <a:spcAft>
-                <a:spcPts val="1000"/>
-              </a:spcAft>
-            </a:pPr>
-            <a:r>
-              <a:rPr sz="2000" b="0">
-                <a:solidFill>
-                  <a:srgbClr val="21252B"/>
-                </a:solidFill>
-                <a:latin typeface="Arial"/>
-              </a:rPr>
-              <a:t>•  disk-usage — how much space test runs / builds / series consume.</a:t>
+            <a:r>
+              <a:rPr sz="1400" b="0">
+                <a:solidFill>
+                  <a:srgbClr val="5B6674"/>
+                </a:solidFill>
+                <a:latin typeface="Arial"/>
+              </a:rPr>
+              <a:t>Same results, two shapes: a table to read, JSON to pipe into jq / a script / a logger.</a:t>
             </a:r>
           </a:p>
         </p:txBody>
@@ -15645,88 +16038,20 @@
       <p:grpSpPr/>
       <p:sp>
         <p:nvSpPr>
-          <p:cNvPr id="2" name="TextBox 1"/>
-          <p:cNvSpPr txBox="1"/>
-          <p:nvPr/>
-        </p:nvSpPr>
-        <p:spPr>
-          <a:xfrm>
-            <a:off x="548640" y="320040"/>
-            <a:ext cx="7680960" cy="365760"/>
-          </a:xfrm>
-          <a:prstGeom prst="rect">
-            <a:avLst/>
-          </a:prstGeom>
-          <a:noFill/>
-        </p:spPr>
-        <p:txBody>
-          <a:bodyPr wrap="square">
-            <a:spAutoFit/>
-          </a:bodyPr>
-          <a:lstStyle/>
-          <a:p>
-            <a:r>
-              <a:rPr sz="1200" b="1">
-                <a:solidFill>
-                  <a:srgbClr val="2E6DA4"/>
-                </a:solidFill>
-                <a:latin typeface="Arial"/>
-              </a:rPr>
-              <a:t>LIVE DEMO · L7</a:t>
-            </a:r>
-          </a:p>
-        </p:txBody>
-      </p:sp>
-      <p:sp>
-        <p:nvSpPr>
-          <p:cNvPr id="3" name="TextBox 2"/>
-          <p:cNvSpPr txBox="1"/>
-          <p:nvPr/>
-        </p:nvSpPr>
-        <p:spPr>
-          <a:xfrm>
-            <a:off x="548640" y="640080"/>
-            <a:ext cx="11064240" cy="822960"/>
-          </a:xfrm>
-          <a:prstGeom prst="rect">
-            <a:avLst/>
-          </a:prstGeom>
-          <a:noFill/>
-        </p:spPr>
-        <p:txBody>
-          <a:bodyPr wrap="square">
-            <a:spAutoFit/>
-          </a:bodyPr>
-          <a:lstStyle/>
-          <a:p>
-            <a:r>
-              <a:rPr sz="3000" b="1">
-                <a:solidFill>
-                  <a:srgbClr val="1F3B63"/>
-                </a:solidFill>
-                <a:latin typeface="Arial"/>
-              </a:rPr>
-              <a:t>Custom commands in action</a:t>
-            </a:r>
-          </a:p>
-        </p:txBody>
-      </p:sp>
-      <p:sp>
-        <p:nvSpPr>
-          <p:cNvPr id="4" name="Rectangle 3"/>
+          <p:cNvPr id="2" name="Rectangle 1"/>
           <p:cNvSpPr/>
           <p:nvPr/>
         </p:nvSpPr>
         <p:spPr>
           <a:xfrm>
-            <a:off x="566928" y="1417320"/>
-            <a:ext cx="2011680" cy="38100"/>
+            <a:off x="0" y="2651760"/>
+            <a:ext cx="12191695" cy="1554480"/>
           </a:xfrm>
           <a:prstGeom prst="rect">
             <a:avLst/>
           </a:prstGeom>
           <a:solidFill>
-            <a:srgbClr val="2E6DA4"/>
+            <a:srgbClr val="EEF2F7"/>
           </a:solidFill>
           <a:ln>
             <a:noFill/>
@@ -15756,324 +16081,14 @@
       </p:sp>
       <p:sp>
         <p:nvSpPr>
-          <p:cNvPr id="5" name="Rectangle 4"/>
-          <p:cNvSpPr/>
-          <p:nvPr/>
-        </p:nvSpPr>
-        <p:spPr>
-          <a:xfrm>
-            <a:off x="8503920" y="457200"/>
-            <a:ext cx="3108960" cy="502920"/>
-          </a:xfrm>
-          <a:prstGeom prst="rect">
-            <a:avLst/>
-          </a:prstGeom>
-          <a:solidFill>
-            <a:srgbClr val="2E6DA4"/>
-          </a:solidFill>
-          <a:ln>
-            <a:noFill/>
-          </a:ln>
-        </p:spPr>
-        <p:style>
-          <a:lnRef idx="1">
-            <a:schemeClr val="accent1"/>
-          </a:lnRef>
-          <a:fillRef idx="3">
-            <a:schemeClr val="accent1"/>
-          </a:fillRef>
-          <a:effectRef idx="2">
-            <a:schemeClr val="accent1"/>
-          </a:effectRef>
-          <a:fontRef idx="minor">
-            <a:schemeClr val="lt1"/>
-          </a:fontRef>
-        </p:style>
-        <p:txBody>
-          <a:bodyPr rtlCol="0" anchor="ctr" wrap="square"/>
-          <a:lstStyle/>
-          <a:p>
-            <a:pPr algn="ctr"/>
-            <a:r>
-              <a:rPr sz="1300" b="1">
-                <a:solidFill>
-                  <a:srgbClr val="FFFFFF"/>
-                </a:solidFill>
-                <a:latin typeface="Arial"/>
-              </a:rPr>
-              <a:t>▶  07-command-plugins.sh</a:t>
-            </a:r>
-          </a:p>
-        </p:txBody>
-      </p:sp>
-      <p:sp>
-        <p:nvSpPr>
-          <p:cNvPr id="6" name="Rectangle 5"/>
-          <p:cNvSpPr/>
-          <p:nvPr/>
-        </p:nvSpPr>
-        <p:spPr>
-          <a:xfrm>
-            <a:off x="640080" y="1645920"/>
-            <a:ext cx="10972800" cy="4343400"/>
-          </a:xfrm>
-          <a:prstGeom prst="rect">
-            <a:avLst/>
-          </a:prstGeom>
-          <a:solidFill>
-            <a:srgbClr val="F3F4F6"/>
-          </a:solidFill>
-          <a:ln w="12700">
-            <a:solidFill>
-              <a:srgbClr val="D5DAE0"/>
-            </a:solidFill>
-          </a:ln>
-        </p:spPr>
-        <p:style>
-          <a:lnRef idx="1">
-            <a:schemeClr val="accent1"/>
-          </a:lnRef>
-          <a:fillRef idx="3">
-            <a:schemeClr val="accent1"/>
-          </a:fillRef>
-          <a:effectRef idx="2">
-            <a:schemeClr val="accent1"/>
-          </a:effectRef>
-          <a:fontRef idx="minor">
-            <a:schemeClr val="lt1"/>
-          </a:fontRef>
-        </p:style>
-        <p:txBody>
-          <a:bodyPr rtlCol="0" anchor="t" wrap="square" lIns="228600" tIns="146304"/>
-          <a:lstStyle/>
-          <a:p>
-            <a:pPr algn="l"/>
-            <a:r>
-              <a:rPr sz="1400" b="1">
-                <a:solidFill>
-                  <a:srgbClr val="2E6DA4"/>
-                </a:solidFill>
-                <a:latin typeface="Consolas"/>
-              </a:rPr>
-              <a:t>$ pav hello --name Team</a:t>
-            </a:r>
-          </a:p>
-          <a:p>
-            <a:pPr algn="l"/>
-            <a:r>
-              <a:rPr sz="1150" b="0">
-                <a:solidFill>
-                  <a:srgbClr val="1B2B34"/>
-                </a:solidFill>
-                <a:latin typeface="Consolas"/>
-              </a:rPr>
-              <a:t>Hello, Team!  Welcome to Pavilion 2!</a:t>
-            </a:r>
-          </a:p>
-          <a:p>
-            <a:pPr algn="l"/>
-            <a:r>
-              <a:rPr sz="1150" b="0">
-                <a:solidFill>
-                  <a:srgbClr val="1B2B34"/>
-                </a:solidFill>
-                <a:latin typeface="Consolas"/>
-              </a:rPr>
-              <a:t> </a:t>
-            </a:r>
-          </a:p>
-          <a:p>
-            <a:pPr algn="l"/>
-            <a:r>
-              <a:rPr sz="1400" b="1">
-                <a:solidFill>
-                  <a:srgbClr val="2E6DA4"/>
-                </a:solidFill>
-                <a:latin typeface="Consolas"/>
-              </a:rPr>
-              <a:t>$ pav recent -n 3</a:t>
-            </a:r>
-          </a:p>
-          <a:p>
-            <a:pPr algn="l"/>
-            <a:r>
-              <a:rPr sz="1150" b="0">
-                <a:solidFill>
-                  <a:srgbClr val="1E7D3C"/>
-                </a:solidFill>
-                <a:latin typeface="Consolas"/>
-              </a:rPr>
-              <a:t>[s75.4] opensearch_verify.os_version_tag.v1.0-verify   PASS</a:t>
-            </a:r>
-          </a:p>
-          <a:p>
-            <a:pPr algn="l"/>
-            <a:r>
-              <a:rPr sz="1150" b="0">
-                <a:solidFill>
-                  <a:srgbClr val="1E7D3C"/>
-                </a:solidFill>
-                <a:latin typeface="Consolas"/>
-              </a:rPr>
-              <a:t>[s75.3] opensearch_verify.os_with_metrics             PASS</a:t>
-            </a:r>
-          </a:p>
-          <a:p>
-            <a:pPr algn="l"/>
-            <a:r>
-              <a:rPr sz="1150" b="0">
-                <a:solidFill>
-                  <a:srgbClr val="B32A2A"/>
-                </a:solidFill>
-                <a:latin typeface="Consolas"/>
-              </a:rPr>
-              <a:t>[s75.2] opensearch_verify.os_fail                     FAIL</a:t>
-            </a:r>
-          </a:p>
-          <a:p>
-            <a:pPr algn="l"/>
-            <a:r>
-              <a:rPr sz="1150" b="0">
-                <a:solidFill>
-                  <a:srgbClr val="1B2B34"/>
-                </a:solidFill>
-                <a:latin typeface="Consolas"/>
-              </a:rPr>
-              <a:t> </a:t>
-            </a:r>
-          </a:p>
-          <a:p>
-            <a:pPr algn="l"/>
-            <a:r>
-              <a:rPr sz="1400" b="1">
-                <a:solidFill>
-                  <a:srgbClr val="2E6DA4"/>
-                </a:solidFill>
-                <a:latin typeface="Consolas"/>
-              </a:rPr>
-              <a:t>$ pav test-summary</a:t>
-            </a:r>
-          </a:p>
-          <a:p>
-            <a:pPr algn="l"/>
-            <a:r>
-              <a:rPr sz="1150" b="0">
-                <a:solidFill>
-                  <a:srgbClr val="1E7D3C"/>
-                </a:solidFill>
-                <a:latin typeface="Consolas"/>
-              </a:rPr>
-              <a:t>PASS: 74    FAIL: 8    TOTAL: 83</a:t>
-            </a:r>
-          </a:p>
-          <a:p>
-            <a:pPr algn="l"/>
-            <a:r>
-              <a:rPr sz="1150" b="0">
-                <a:solidFill>
-                  <a:srgbClr val="1B2B34"/>
-                </a:solidFill>
-                <a:latin typeface="Consolas"/>
-              </a:rPr>
-              <a:t> </a:t>
-            </a:r>
-          </a:p>
-          <a:p>
-            <a:pPr algn="l"/>
-            <a:r>
-              <a:rPr sz="1400" b="1">
-                <a:solidFill>
-                  <a:srgbClr val="2E6DA4"/>
-                </a:solidFill>
-                <a:latin typeface="Consolas"/>
-              </a:rPr>
-              <a:t>$ pav disk-usage        # where the space goes</a:t>
-            </a:r>
-          </a:p>
-          <a:p>
-            <a:pPr algn="l"/>
-            <a:r>
-              <a:rPr sz="1150" b="0">
-                <a:solidFill>
-                  <a:srgbClr val="1B2B34"/>
-                </a:solidFill>
-                <a:latin typeface="Consolas"/>
-              </a:rPr>
-              <a:t>Config Area: main</a:t>
-            </a:r>
-          </a:p>
-          <a:p>
-            <a:pPr algn="l"/>
-            <a:r>
-              <a:rPr sz="1150" b="0">
-                <a:solidFill>
-                  <a:srgbClr val="1B2B34"/>
-                </a:solidFill>
-                <a:latin typeface="Consolas"/>
-              </a:rPr>
-              <a:t>  Test Runs:     4.42 MB</a:t>
-            </a:r>
-          </a:p>
-          <a:p>
-            <a:pPr algn="l"/>
-            <a:r>
-              <a:rPr sz="1150" b="0">
-                <a:solidFill>
-                  <a:srgbClr val="1B2B34"/>
-                </a:solidFill>
-                <a:latin typeface="Consolas"/>
-              </a:rPr>
-              <a:t>  Builds:       59.77 MB</a:t>
-            </a:r>
-          </a:p>
-          <a:p>
-            <a:pPr algn="l"/>
-            <a:r>
-              <a:rPr sz="1150" b="0">
-                <a:solidFill>
-                  <a:srgbClr val="1B2B34"/>
-                </a:solidFill>
-                <a:latin typeface="Consolas"/>
-              </a:rPr>
-              <a:t>Series:          16.84 MB</a:t>
-            </a:r>
-          </a:p>
-          <a:p>
-            <a:pPr algn="l"/>
-            <a:r>
-              <a:rPr sz="1150" b="0">
-                <a:solidFill>
-                  <a:srgbClr val="1B2B34"/>
-                </a:solidFill>
-                <a:latin typeface="Consolas"/>
-              </a:rPr>
-              <a:t>------------------------------------------------</a:t>
-            </a:r>
-          </a:p>
-          <a:p>
-            <a:pPr algn="l"/>
-            <a:r>
-              <a:rPr sz="1150" b="0">
-                <a:solidFill>
-                  <a:srgbClr val="1B2B34"/>
-                </a:solidFill>
-                <a:latin typeface="Consolas"/>
-              </a:rPr>
-              <a:t>TOTAL USAGE:    145.22 MB</a:t>
-            </a:r>
-          </a:p>
-        </p:txBody>
-      </p:sp>
-      <p:sp>
-        <p:nvSpPr>
-          <p:cNvPr id="7" name="TextBox 6"/>
+          <p:cNvPr id="3" name="TextBox 2"/>
           <p:cNvSpPr txBox="1"/>
           <p:nvPr/>
         </p:nvSpPr>
         <p:spPr>
           <a:xfrm>
-            <a:off x="640080" y="6144768"/>
-            <a:ext cx="10972800" cy="502920"/>
+            <a:off x="731520" y="2834640"/>
+            <a:ext cx="10698480" cy="1188720"/>
           </a:xfrm>
           <a:prstGeom prst="rect">
             <a:avLst/>
@@ -16087,13 +16102,24 @@
           <a:lstStyle/>
           <a:p>
             <a:r>
-              <a:rPr sz="1400" b="0">
-                <a:solidFill>
-                  <a:srgbClr val="5B6674"/>
-                </a:solidFill>
-                <a:latin typeface="Arial"/>
-              </a:rPr>
-              <a:t>Four new pav subcommands — our own tooling built on Pavilion's plugin API.</a:t>
+              <a:rPr sz="1300" b="1">
+                <a:solidFill>
+                  <a:srgbClr val="2E6DA4"/>
+                </a:solidFill>
+                <a:latin typeface="Arial"/>
+              </a:rPr>
+              <a:t>EXTENDING PAVILION</a:t>
+            </a:r>
+          </a:p>
+          <a:p>
+            <a:r>
+              <a:rPr sz="3600" b="1">
+                <a:solidFill>
+                  <a:srgbClr val="1F3B63"/>
+                </a:solidFill>
+                <a:latin typeface="Arial"/>
+              </a:rPr>
+              <a:t>Plugins</a:t>
             </a:r>
           </a:p>
         </p:txBody>
@@ -16145,7 +16171,7 @@
                 </a:solidFill>
                 <a:latin typeface="Arial"/>
               </a:rPr>
-              <a:t>CUSTOM OUTPUT</a:t>
+              <a:t>PLUGINS</a:t>
             </a:r>
           </a:p>
         </p:txBody>
@@ -16179,7 +16205,7 @@
                 </a:solidFill>
                 <a:latin typeface="Arial"/>
               </a:rPr>
-              <a:t>Result loggers (ours)</a:t>
+              <a:t>Pavilion is plugins all the way down</a:t>
             </a:r>
           </a:p>
         </p:txBody>
@@ -16261,7 +16287,7 @@
                 </a:solidFill>
                 <a:latin typeface="Arial"/>
               </a:rPr>
-              <a:t>•  csv_file — appends one CSV row per test (result, duration, metrics, permute vars).</a:t>
+              <a:t>•  Scheduler plugins — raw, slurm, flux, pbs (PBS is ours).</a:t>
             </a:r>
           </a:p>
           <a:p>
@@ -16277,7 +16303,7 @@
                 </a:solidFill>
                 <a:latin typeface="Arial"/>
               </a:rPr>
-              <a:t>•  saLog — a custom NASA/NOAA logger; writes a CSV row on result 'released'.</a:t>
+              <a:t>•  Result parsers — regex, constant, table, …</a:t>
             </a:r>
           </a:p>
           <a:p>
@@ -16293,7 +16319,7 @@
                 </a:solidFill>
                 <a:latin typeface="Arial"/>
               </a:rPr>
-              <a:t>•  opensearch — ships each result document into the `pavilion-results` index.</a:t>
+              <a:t>•  System variables — expose machine facts to tests (e.g. sys_name).</a:t>
             </a:r>
           </a:p>
           <a:p>
@@ -16309,7 +16335,39 @@
                 </a:solidFill>
                 <a:latin typeface="Arial"/>
               </a:rPr>
-              <a:t>•  Configured once in pavilion.yaml → every test result flows through them.</a:t>
+              <a:t>•  Command plugins — add whole new `pav &lt;command&gt;` subcommands.</a:t>
+            </a:r>
+          </a:p>
+          <a:p>
+            <a:pPr>
+              <a:spcAft>
+                <a:spcPts val="1000"/>
+              </a:spcAft>
+            </a:pPr>
+            <a:r>
+              <a:rPr sz="2000" b="0">
+                <a:solidFill>
+                  <a:srgbClr val="21252B"/>
+                </a:solidFill>
+                <a:latin typeface="Arial"/>
+              </a:rPr>
+              <a:t>•  Result loggers — ship results anywhere (CSV, OpenSearch, custom).</a:t>
+            </a:r>
+          </a:p>
+          <a:p>
+            <a:pPr>
+              <a:spcAft>
+                <a:spcPts val="1000"/>
+              </a:spcAft>
+            </a:pPr>
+            <a:r>
+              <a:rPr sz="1700" b="0">
+                <a:solidFill>
+                  <a:srgbClr val="5B6674"/>
+                </a:solidFill>
+                <a:latin typeface="Arial"/>
+              </a:rPr>
+              <a:t>    – Drop a .py + a .yapsy-plugin into config/plugins/ — Pavilion discovers it.</a:t>
             </a:r>
           </a:p>
         </p:txBody>
@@ -16361,7 +16419,7 @@
                 </a:solidFill>
                 <a:latin typeface="Arial"/>
               </a:rPr>
-              <a:t>LIVE DEMO · L8</a:t>
+              <a:t>CUSTOM COMMANDS</a:t>
             </a:r>
           </a:p>
         </p:txBody>
@@ -16395,7 +16453,7 @@
                 </a:solidFill>
                 <a:latin typeface="Arial"/>
               </a:rPr>
-              <a:t>Output plugin: CSV</a:t>
+              <a:t>Command plugins (ours)</a:t>
             </a:r>
           </a:p>
         </p:txBody>
@@ -16445,240 +16503,14 @@
       </p:sp>
       <p:sp>
         <p:nvSpPr>
-          <p:cNvPr id="5" name="Rectangle 4"/>
-          <p:cNvSpPr/>
-          <p:nvPr/>
-        </p:nvSpPr>
-        <p:spPr>
-          <a:xfrm>
-            <a:off x="8503920" y="457200"/>
-            <a:ext cx="3108960" cy="502920"/>
-          </a:xfrm>
-          <a:prstGeom prst="rect">
-            <a:avLst/>
-          </a:prstGeom>
-          <a:solidFill>
-            <a:srgbClr val="2E6DA4"/>
-          </a:solidFill>
-          <a:ln>
-            <a:noFill/>
-          </a:ln>
-        </p:spPr>
-        <p:style>
-          <a:lnRef idx="1">
-            <a:schemeClr val="accent1"/>
-          </a:lnRef>
-          <a:fillRef idx="3">
-            <a:schemeClr val="accent1"/>
-          </a:fillRef>
-          <a:effectRef idx="2">
-            <a:schemeClr val="accent1"/>
-          </a:effectRef>
-          <a:fontRef idx="minor">
-            <a:schemeClr val="lt1"/>
-          </a:fontRef>
-        </p:style>
-        <p:txBody>
-          <a:bodyPr rtlCol="0" anchor="ctr" wrap="square"/>
-          <a:lstStyle/>
-          <a:p>
-            <a:pPr algn="ctr"/>
-            <a:r>
-              <a:rPr sz="1300" b="1">
-                <a:solidFill>
-                  <a:srgbClr val="FFFFFF"/>
-                </a:solidFill>
-                <a:latin typeface="Arial"/>
-              </a:rPr>
-              <a:t>▶  08-output-csv.sh</a:t>
-            </a:r>
-          </a:p>
-        </p:txBody>
-      </p:sp>
-      <p:sp>
-        <p:nvSpPr>
-          <p:cNvPr id="6" name="Rectangle 5"/>
-          <p:cNvSpPr/>
-          <p:nvPr/>
-        </p:nvSpPr>
-        <p:spPr>
-          <a:xfrm>
-            <a:off x="640080" y="1645920"/>
-            <a:ext cx="10972800" cy="4343400"/>
-          </a:xfrm>
-          <a:prstGeom prst="rect">
-            <a:avLst/>
-          </a:prstGeom>
-          <a:solidFill>
-            <a:srgbClr val="F3F4F6"/>
-          </a:solidFill>
-          <a:ln w="12700">
-            <a:solidFill>
-              <a:srgbClr val="D5DAE0"/>
-            </a:solidFill>
-          </a:ln>
-        </p:spPr>
-        <p:style>
-          <a:lnRef idx="1">
-            <a:schemeClr val="accent1"/>
-          </a:lnRef>
-          <a:fillRef idx="3">
-            <a:schemeClr val="accent1"/>
-          </a:fillRef>
-          <a:effectRef idx="2">
-            <a:schemeClr val="accent1"/>
-          </a:effectRef>
-          <a:fontRef idx="minor">
-            <a:schemeClr val="lt1"/>
-          </a:fontRef>
-        </p:style>
-        <p:txBody>
-          <a:bodyPr rtlCol="0" anchor="t" wrap="square" lIns="228600" tIns="146304"/>
-          <a:lstStyle/>
-          <a:p>
-            <a:pPr algn="l"/>
-            <a:r>
-              <a:rPr sz="1400" b="1">
-                <a:solidFill>
-                  <a:srgbClr val="2E6DA4"/>
-                </a:solidFill>
-                <a:latin typeface="Consolas"/>
-              </a:rPr>
-              <a:t>$ pav run demo_pbs.pass demo_pbs.metrics      # real PBS jobs</a:t>
-            </a:r>
-          </a:p>
-          <a:p>
-            <a:pPr algn="l"/>
-            <a:r>
-              <a:rPr sz="1150" b="0">
-                <a:solidFill>
-                  <a:srgbClr val="1B2B34"/>
-                </a:solidFill>
-                <a:latin typeface="Consolas"/>
-              </a:rPr>
-              <a:t>sid: s74</a:t>
-            </a:r>
-          </a:p>
-          <a:p>
-            <a:pPr algn="l"/>
-            <a:r>
-              <a:rPr sz="1150" b="0">
-                <a:solidFill>
-                  <a:srgbClr val="1B2B34"/>
-                </a:solidFill>
-                <a:latin typeface="Consolas"/>
-              </a:rPr>
-              <a:t>tests: 2</a:t>
-            </a:r>
-          </a:p>
-          <a:p>
-            <a:pPr algn="l"/>
-            <a:r>
-              <a:rPr sz="1150" b="0">
-                <a:solidFill>
-                  <a:srgbClr val="1B2B34"/>
-                </a:solidFill>
-                <a:latin typeface="Consolas"/>
-              </a:rPr>
-              <a:t> </a:t>
-            </a:r>
-          </a:p>
-          <a:p>
-            <a:pPr algn="l"/>
-            <a:r>
-              <a:rPr sz="1400" b="1">
-                <a:solidFill>
-                  <a:srgbClr val="2E6DA4"/>
-                </a:solidFill>
-                <a:latin typeface="Consolas"/>
-              </a:rPr>
-              <a:t>$ qstat -a                                    # yes — it went through the scheduler</a:t>
-            </a:r>
-          </a:p>
-          <a:p>
-            <a:pPr algn="l"/>
-            <a:r>
-              <a:rPr sz="1150" b="0">
-                <a:solidFill>
-                  <a:srgbClr val="1B2B34"/>
-                </a:solidFill>
-                <a:latin typeface="Consolas"/>
-              </a:rPr>
-              <a:t>8387.pbs-server  pavilion  workq  pav_demo_*  1  1  R</a:t>
-            </a:r>
-          </a:p>
-          <a:p>
-            <a:pPr algn="l"/>
-            <a:r>
-              <a:rPr sz="1150" b="0">
-                <a:solidFill>
-                  <a:srgbClr val="1B2B34"/>
-                </a:solidFill>
-                <a:latin typeface="Consolas"/>
-              </a:rPr>
-              <a:t> </a:t>
-            </a:r>
-          </a:p>
-          <a:p>
-            <a:pPr algn="l"/>
-            <a:r>
-              <a:rPr sz="1400" b="1">
-                <a:solidFill>
-                  <a:srgbClr val="2E6DA4"/>
-                </a:solidFill>
-                <a:latin typeface="Consolas"/>
-              </a:rPr>
-              <a:t>$ tail ~/pav_logs/results.csv                 # csv_file logger: one row per test</a:t>
-            </a:r>
-          </a:p>
-          <a:p>
-            <a:pPr algn="l"/>
-            <a:r>
-              <a:rPr sz="1150" b="0">
-                <a:solidFill>
-                  <a:srgbClr val="1B2B34"/>
-                </a:solidFill>
-                <a:latin typeface="Consolas"/>
-              </a:rPr>
-              <a:t>name,id,result,sys_name,user, ... ,duration</a:t>
-            </a:r>
-          </a:p>
-          <a:p>
-            <a:pPr algn="l"/>
-            <a:r>
-              <a:rPr sz="1150" b="0">
-                <a:solidFill>
-                  <a:srgbClr val="1E7D3C"/>
-                </a:solidFill>
-                <a:latin typeface="Consolas"/>
-              </a:rPr>
-              <a:t>demo_pbs.pass,s74.1,PASS,pbs-server,pavilion, ... ,0.043</a:t>
-            </a:r>
-          </a:p>
-          <a:p>
-            <a:pPr algn="l"/>
-            <a:r>
-              <a:rPr sz="1150" b="0">
-                <a:solidFill>
-                  <a:srgbClr val="1E7D3C"/>
-                </a:solidFill>
-                <a:latin typeface="Consolas"/>
-              </a:rPr>
-              <a:t>demo_pbs.metrics,s74.2,PASS,pbs-server,pavilion, ... ,0.040</a:t>
-            </a:r>
-          </a:p>
-        </p:txBody>
-      </p:sp>
-      <p:sp>
-        <p:nvSpPr>
-          <p:cNvPr id="7" name="TextBox 6"/>
+          <p:cNvPr id="5" name="TextBox 4"/>
           <p:cNvSpPr txBox="1"/>
           <p:nvPr/>
         </p:nvSpPr>
         <p:spPr>
           <a:xfrm>
-            <a:off x="640080" y="6144768"/>
-            <a:ext cx="10972800" cy="502920"/>
+            <a:off x="640080" y="1691640"/>
+            <a:ext cx="10972800" cy="4754880"/>
           </a:xfrm>
           <a:prstGeom prst="rect">
             <a:avLst/>
@@ -16691,14 +16523,67 @@
           </a:bodyPr>
           <a:lstStyle/>
           <a:p>
-            <a:r>
-              <a:rPr sz="1400" b="0">
-                <a:solidFill>
-                  <a:srgbClr val="5B6674"/>
-                </a:solidFill>
-                <a:latin typeface="Arial"/>
-              </a:rPr>
-              <a:t>A real PBS job (qstat proves dispatch), then the csv_file logger writes one row per test.</a:t>
+            <a:pPr>
+              <a:spcAft>
+                <a:spcPts val="1000"/>
+              </a:spcAft>
+            </a:pPr>
+            <a:r>
+              <a:rPr sz="2000" b="0">
+                <a:solidFill>
+                  <a:srgbClr val="21252B"/>
+                </a:solidFill>
+                <a:latin typeface="Arial"/>
+              </a:rPr>
+              <a:t>•  hello — a friendly sanity check + Pavilion info.</a:t>
+            </a:r>
+          </a:p>
+          <a:p>
+            <a:pPr>
+              <a:spcAft>
+                <a:spcPts val="1000"/>
+              </a:spcAft>
+            </a:pPr>
+            <a:r>
+              <a:rPr sz="2000" b="0">
+                <a:solidFill>
+                  <a:srgbClr val="21252B"/>
+                </a:solidFill>
+                <a:latin typeface="Arial"/>
+              </a:rPr>
+              <a:t>•  recent — the most recent test runs, colored by result.</a:t>
+            </a:r>
+          </a:p>
+          <a:p>
+            <a:pPr>
+              <a:spcAft>
+                <a:spcPts val="1000"/>
+              </a:spcAft>
+            </a:pPr>
+            <a:r>
+              <a:rPr sz="2000" b="0">
+                <a:solidFill>
+                  <a:srgbClr val="21252B"/>
+                </a:solidFill>
+                <a:latin typeface="Arial"/>
+              </a:rPr>
+              <a:t>•  test-summary — a PASS/FAIL tally across recent runs.</a:t>
+            </a:r>
+          </a:p>
+          <a:p>
+            <a:pPr>
+              <a:spcAft>
+                <a:spcPts val="1000"/>
+              </a:spcAft>
+            </a:pPr>
+            <a:r>
+              <a:rPr sz="2000" b="0">
+                <a:solidFill>
+                  <a:srgbClr val="21252B"/>
+                </a:solidFill>
+                <a:latin typeface="Arial"/>
+              </a:rPr>
+              <a:t>•  disk-usage — how much space test runs / builds / series consume.</a:t>
             </a:r>
           </a:p>
         </p:txBody>
@@ -16750,7 +16635,7 @@
                 </a:solidFill>
                 <a:latin typeface="Arial"/>
               </a:rPr>
-              <a:t>LIVE DEMO · SALOG</a:t>
+              <a:t>LIVE DEMO · L7</a:t>
             </a:r>
           </a:p>
         </p:txBody>
@@ -16784,7 +16669,7 @@
                 </a:solidFill>
                 <a:latin typeface="Arial"/>
               </a:rPr>
-              <a:t>Output plugin: saLog</a:t>
+              <a:t>Custom commands in action</a:t>
             </a:r>
           </a:p>
         </p:txBody>
@@ -16879,7 +16764,7 @@
                 </a:solidFill>
                 <a:latin typeface="Arial"/>
               </a:rPr>
-              <a:t>▶  12-salog.sh</a:t>
+              <a:t>▶  07-command-plugins.sh</a:t>
             </a:r>
           </a:p>
         </p:txBody>
@@ -16933,37 +16818,25 @@
                 </a:solidFill>
                 <a:latin typeface="Consolas"/>
               </a:rPr>
-              <a:t>$ pav run demo_pbs.salog                 # 1. run in Pavilion (per_file: name)</a:t>
-            </a:r>
-          </a:p>
-          <a:p>
-            <a:pPr algn="l"/>
-            <a:r>
-              <a:rPr sz="1250" b="0">
-                <a:solidFill>
-                  <a:srgbClr val="1B2B34"/>
-                </a:solidFill>
-                <a:latin typeface="Consolas"/>
-              </a:rPr>
-              <a:t>sid: s141</a:t>
-            </a:r>
-          </a:p>
-          <a:p>
-            <a:pPr algn="l"/>
-            <a:r>
-              <a:rPr sz="1250" b="0">
-                <a:solidFill>
-                  <a:srgbClr val="1B2B34"/>
-                </a:solidFill>
-                <a:latin typeface="Consolas"/>
-              </a:rPr>
-              <a:t>tests: 1</a:t>
-            </a:r>
-          </a:p>
-          <a:p>
-            <a:pPr algn="l"/>
-            <a:r>
-              <a:rPr sz="1250" b="0">
+              <a:t>$ pav hello --name Team</a:t>
+            </a:r>
+          </a:p>
+          <a:p>
+            <a:pPr algn="l"/>
+            <a:r>
+              <a:rPr sz="1150" b="0">
+                <a:solidFill>
+                  <a:srgbClr val="1B2B34"/>
+                </a:solidFill>
+                <a:latin typeface="Consolas"/>
+              </a:rPr>
+              <a:t>Hello, Team!  Welcome to Pavilion 2!</a:t>
+            </a:r>
+          </a:p>
+          <a:p>
+            <a:pPr algn="l"/>
+            <a:r>
+              <a:rPr sz="1150" b="0">
                 <a:solidFill>
                   <a:srgbClr val="1B2B34"/>
                 </a:solidFill>
@@ -16981,25 +16854,49 @@
                 </a:solidFill>
                 <a:latin typeface="Consolas"/>
               </a:rPr>
-              <a:t>$ qstat -a                               # 2. the job, running in PBS</a:t>
-            </a:r>
-          </a:p>
-          <a:p>
-            <a:pPr algn="l"/>
-            <a:r>
-              <a:rPr sz="1250" b="0">
-                <a:solidFill>
-                  <a:srgbClr val="1B2B34"/>
-                </a:solidFill>
-                <a:latin typeface="Consolas"/>
-              </a:rPr>
-              <a:t>8410.pbs-server pavilion workq pav_demo_*  1  1  R</a:t>
-            </a:r>
-          </a:p>
-          <a:p>
-            <a:pPr algn="l"/>
-            <a:r>
-              <a:rPr sz="1250" b="0">
+              <a:t>$ pav recent -n 3</a:t>
+            </a:r>
+          </a:p>
+          <a:p>
+            <a:pPr algn="l"/>
+            <a:r>
+              <a:rPr sz="1150" b="0">
+                <a:solidFill>
+                  <a:srgbClr val="1E7D3C"/>
+                </a:solidFill>
+                <a:latin typeface="Consolas"/>
+              </a:rPr>
+              <a:t>[s75.4] opensearch_verify.os_version_tag.v1.0-verify   PASS</a:t>
+            </a:r>
+          </a:p>
+          <a:p>
+            <a:pPr algn="l"/>
+            <a:r>
+              <a:rPr sz="1150" b="0">
+                <a:solidFill>
+                  <a:srgbClr val="1E7D3C"/>
+                </a:solidFill>
+                <a:latin typeface="Consolas"/>
+              </a:rPr>
+              <a:t>[s75.3] opensearch_verify.os_with_metrics             PASS</a:t>
+            </a:r>
+          </a:p>
+          <a:p>
+            <a:pPr algn="l"/>
+            <a:r>
+              <a:rPr sz="1150" b="0">
+                <a:solidFill>
+                  <a:srgbClr val="B32A2A"/>
+                </a:solidFill>
+                <a:latin typeface="Consolas"/>
+              </a:rPr>
+              <a:t>[s75.2] opensearch_verify.os_fail                     FAIL</a:t>
+            </a:r>
+          </a:p>
+          <a:p>
+            <a:pPr algn="l"/>
+            <a:r>
+              <a:rPr sz="1150" b="0">
                 <a:solidFill>
                   <a:srgbClr val="1B2B34"/>
                 </a:solidFill>
@@ -17017,19 +16914,115 @@
                 </a:solidFill>
                 <a:latin typeface="Consolas"/>
               </a:rPr>
-              <a:t>$ tail salog_output.txt                  # 3. the CSV the sa_log plugin wrote on release</a:t>
-            </a:r>
-          </a:p>
-          <a:p>
-            <a:pPr algn="l"/>
-            <a:r>
-              <a:rPr sz="1250" b="0">
+              <a:t>$ pav test-summary</a:t>
+            </a:r>
+          </a:p>
+          <a:p>
+            <a:pPr algn="l"/>
+            <a:r>
+              <a:rPr sz="1150" b="0">
                 <a:solidFill>
                   <a:srgbClr val="1E7D3C"/>
                 </a:solidFill>
                 <a:latin typeface="Consolas"/>
               </a:rPr>
-              <a:t>x1002c6s2b0n1,"demo_pbs.salog result=PASS",pavilion,released</a:t>
+              <a:t>PASS: 74    FAIL: 8    TOTAL: 83</a:t>
+            </a:r>
+          </a:p>
+          <a:p>
+            <a:pPr algn="l"/>
+            <a:r>
+              <a:rPr sz="1150" b="0">
+                <a:solidFill>
+                  <a:srgbClr val="1B2B34"/>
+                </a:solidFill>
+                <a:latin typeface="Consolas"/>
+              </a:rPr>
+              <a:t> </a:t>
+            </a:r>
+          </a:p>
+          <a:p>
+            <a:pPr algn="l"/>
+            <a:r>
+              <a:rPr sz="1400" b="1">
+                <a:solidFill>
+                  <a:srgbClr val="2E6DA4"/>
+                </a:solidFill>
+                <a:latin typeface="Consolas"/>
+              </a:rPr>
+              <a:t>$ pav disk-usage        # where the space goes</a:t>
+            </a:r>
+          </a:p>
+          <a:p>
+            <a:pPr algn="l"/>
+            <a:r>
+              <a:rPr sz="1150" b="0">
+                <a:solidFill>
+                  <a:srgbClr val="1B2B34"/>
+                </a:solidFill>
+                <a:latin typeface="Consolas"/>
+              </a:rPr>
+              <a:t>Config Area: main</a:t>
+            </a:r>
+          </a:p>
+          <a:p>
+            <a:pPr algn="l"/>
+            <a:r>
+              <a:rPr sz="1150" b="0">
+                <a:solidFill>
+                  <a:srgbClr val="1B2B34"/>
+                </a:solidFill>
+                <a:latin typeface="Consolas"/>
+              </a:rPr>
+              <a:t>  Test Runs:     4.42 MB</a:t>
+            </a:r>
+          </a:p>
+          <a:p>
+            <a:pPr algn="l"/>
+            <a:r>
+              <a:rPr sz="1150" b="0">
+                <a:solidFill>
+                  <a:srgbClr val="1B2B34"/>
+                </a:solidFill>
+                <a:latin typeface="Consolas"/>
+              </a:rPr>
+              <a:t>  Builds:       59.77 MB</a:t>
+            </a:r>
+          </a:p>
+          <a:p>
+            <a:pPr algn="l"/>
+            <a:r>
+              <a:rPr sz="1150" b="0">
+                <a:solidFill>
+                  <a:srgbClr val="1B2B34"/>
+                </a:solidFill>
+                <a:latin typeface="Consolas"/>
+              </a:rPr>
+              <a:t>Series:          16.84 MB</a:t>
+            </a:r>
+          </a:p>
+          <a:p>
+            <a:pPr algn="l"/>
+            <a:r>
+              <a:rPr sz="1150" b="0">
+                <a:solidFill>
+                  <a:srgbClr val="1B2B34"/>
+                </a:solidFill>
+                <a:latin typeface="Consolas"/>
+              </a:rPr>
+              <a:t>------------------------------------------------</a:t>
+            </a:r>
+          </a:p>
+          <a:p>
+            <a:pPr algn="l"/>
+            <a:r>
+              <a:rPr sz="1150" b="0">
+                <a:solidFill>
+                  <a:srgbClr val="1B2B34"/>
+                </a:solidFill>
+                <a:latin typeface="Consolas"/>
+              </a:rPr>
+              <a:t>TOTAL USAGE:    145.22 MB</a:t>
             </a:r>
           </a:p>
         </p:txBody>
@@ -17063,7 +17056,7 @@
                 </a:solidFill>
                 <a:latin typeface="Arial"/>
               </a:rPr>
-              <a:t>Run in Pavilion → job in PBS → the sa_log plugin calls saLog per node as it's released.</a:t>
+              <a:t>Four new pav subcommands — our own tooling built on Pavilion's plugin API.</a:t>
             </a:r>
           </a:p>
         </p:txBody>
@@ -17115,7 +17108,7 @@
                 </a:solidFill>
                 <a:latin typeface="Arial"/>
               </a:rPr>
-              <a:t>LIVE DEMO · L9</a:t>
+              <a:t>CUSTOM OUTPUT</a:t>
             </a:r>
           </a:p>
         </p:txBody>
@@ -17149,7 +17142,7 @@
                 </a:solidFill>
                 <a:latin typeface="Arial"/>
               </a:rPr>
-              <a:t>Output plugin: OpenSearch → Grafana</a:t>
+              <a:t>Result loggers (ours)</a:t>
             </a:r>
           </a:p>
         </p:txBody>
@@ -17199,264 +17192,14 @@
       </p:sp>
       <p:sp>
         <p:nvSpPr>
-          <p:cNvPr id="5" name="Rectangle 4"/>
-          <p:cNvSpPr/>
-          <p:nvPr/>
-        </p:nvSpPr>
-        <p:spPr>
-          <a:xfrm>
-            <a:off x="8503920" y="457200"/>
-            <a:ext cx="3108960" cy="502920"/>
-          </a:xfrm>
-          <a:prstGeom prst="rect">
-            <a:avLst/>
-          </a:prstGeom>
-          <a:solidFill>
-            <a:srgbClr val="2E6DA4"/>
-          </a:solidFill>
-          <a:ln>
-            <a:noFill/>
-          </a:ln>
-        </p:spPr>
-        <p:style>
-          <a:lnRef idx="1">
-            <a:schemeClr val="accent1"/>
-          </a:lnRef>
-          <a:fillRef idx="3">
-            <a:schemeClr val="accent1"/>
-          </a:fillRef>
-          <a:effectRef idx="2">
-            <a:schemeClr val="accent1"/>
-          </a:effectRef>
-          <a:fontRef idx="minor">
-            <a:schemeClr val="lt1"/>
-          </a:fontRef>
-        </p:style>
-        <p:txBody>
-          <a:bodyPr rtlCol="0" anchor="ctr" wrap="square"/>
-          <a:lstStyle/>
-          <a:p>
-            <a:pPr algn="ctr"/>
-            <a:r>
-              <a:rPr sz="1300" b="1">
-                <a:solidFill>
-                  <a:srgbClr val="FFFFFF"/>
-                </a:solidFill>
-                <a:latin typeface="Arial"/>
-              </a:rPr>
-              <a:t>▶  09-opensearch.sh</a:t>
-            </a:r>
-          </a:p>
-        </p:txBody>
-      </p:sp>
-      <p:sp>
-        <p:nvSpPr>
-          <p:cNvPr id="6" name="Rectangle 5"/>
-          <p:cNvSpPr/>
-          <p:nvPr/>
-        </p:nvSpPr>
-        <p:spPr>
-          <a:xfrm>
-            <a:off x="640080" y="1645920"/>
-            <a:ext cx="10972800" cy="4343400"/>
-          </a:xfrm>
-          <a:prstGeom prst="rect">
-            <a:avLst/>
-          </a:prstGeom>
-          <a:solidFill>
-            <a:srgbClr val="F3F4F6"/>
-          </a:solidFill>
-          <a:ln w="12700">
-            <a:solidFill>
-              <a:srgbClr val="D5DAE0"/>
-            </a:solidFill>
-          </a:ln>
-        </p:spPr>
-        <p:style>
-          <a:lnRef idx="1">
-            <a:schemeClr val="accent1"/>
-          </a:lnRef>
-          <a:fillRef idx="3">
-            <a:schemeClr val="accent1"/>
-          </a:fillRef>
-          <a:effectRef idx="2">
-            <a:schemeClr val="accent1"/>
-          </a:effectRef>
-          <a:fontRef idx="minor">
-            <a:schemeClr val="lt1"/>
-          </a:fontRef>
-        </p:style>
-        <p:txBody>
-          <a:bodyPr rtlCol="0" anchor="t" wrap="square" lIns="228600" tIns="146304"/>
-          <a:lstStyle/>
-          <a:p>
-            <a:pPr algn="l"/>
-            <a:r>
-              <a:rPr sz="1400" b="1">
-                <a:solidFill>
-                  <a:srgbClr val="2E6DA4"/>
-                </a:solidFill>
-                <a:latin typeface="Consolas"/>
-              </a:rPr>
-              <a:t>$ pav run -m pbs opensearch_verify        # 4 tests via PBS; each result → OpenSearch</a:t>
-            </a:r>
-          </a:p>
-          <a:p>
-            <a:pPr algn="l"/>
-            <a:r>
-              <a:rPr sz="1250" b="0">
-                <a:solidFill>
-                  <a:srgbClr val="1B2B34"/>
-                </a:solidFill>
-                <a:latin typeface="Consolas"/>
-              </a:rPr>
-              <a:t>created 4 tests, skipped 0, 0 errors.</a:t>
-            </a:r>
-          </a:p>
-          <a:p>
-            <a:pPr algn="l"/>
-            <a:r>
-              <a:rPr sz="1250" b="0">
-                <a:solidFill>
-                  <a:srgbClr val="1B2B34"/>
-                </a:solidFill>
-                <a:latin typeface="Consolas"/>
-              </a:rPr>
-              <a:t>sid: s75</a:t>
-            </a:r>
-          </a:p>
-          <a:p>
-            <a:pPr algn="l"/>
-            <a:r>
-              <a:rPr sz="1250" b="0">
-                <a:solidFill>
-                  <a:srgbClr val="1B2B34"/>
-                </a:solidFill>
-                <a:latin typeface="Consolas"/>
-              </a:rPr>
-              <a:t> </a:t>
-            </a:r>
-          </a:p>
-          <a:p>
-            <a:pPr algn="l"/>
-            <a:r>
-              <a:rPr sz="1400" b="1">
-                <a:solidFill>
-                  <a:srgbClr val="2E6DA4"/>
-                </a:solidFill>
-                <a:latin typeface="Consolas"/>
-              </a:rPr>
-              <a:t>$ qstat -a                                # through the scheduler</a:t>
-            </a:r>
-          </a:p>
-          <a:p>
-            <a:pPr algn="l"/>
-            <a:r>
-              <a:rPr sz="1250" b="0">
-                <a:solidFill>
-                  <a:srgbClr val="1B2B34"/>
-                </a:solidFill>
-                <a:latin typeface="Consolas"/>
-              </a:rPr>
-              <a:t>8389.pbs-server pavilion workq pav_opens*  1  1  R</a:t>
-            </a:r>
-          </a:p>
-          <a:p>
-            <a:pPr algn="l"/>
-            <a:r>
-              <a:rPr sz="1250" b="0">
-                <a:solidFill>
-                  <a:srgbClr val="1B2B34"/>
-                </a:solidFill>
-                <a:latin typeface="Consolas"/>
-              </a:rPr>
-              <a:t> </a:t>
-            </a:r>
-          </a:p>
-          <a:p>
-            <a:pPr algn="l"/>
-            <a:r>
-              <a:rPr sz="1400" b="1">
-                <a:solidFill>
-                  <a:srgbClr val="2E6DA4"/>
-                </a:solidFill>
-                <a:latin typeface="Consolas"/>
-              </a:rPr>
-              <a:t>$ python3 ~/opensearch_results.py --name opensearch_verify</a:t>
-            </a:r>
-          </a:p>
-          <a:p>
-            <a:pPr algn="l"/>
-            <a:r>
-              <a:rPr sz="1250" b="0">
-                <a:solidFill>
-                  <a:srgbClr val="1B2B34"/>
-                </a:solidFill>
-                <a:latin typeface="Consolas"/>
-              </a:rPr>
-              <a:t>pav_id   name                                          result</a:t>
-            </a:r>
-          </a:p>
-          <a:p>
-            <a:pPr algn="l"/>
-            <a:r>
-              <a:rPr sz="1250" b="0">
-                <a:solidFill>
-                  <a:srgbClr val="1E7D3C"/>
-                </a:solidFill>
-                <a:latin typeface="Consolas"/>
-              </a:rPr>
-              <a:t>s75.1    opensearch_verify.os_pass                     PASS</a:t>
-            </a:r>
-          </a:p>
-          <a:p>
-            <a:pPr algn="l"/>
-            <a:r>
-              <a:rPr sz="1250" b="0">
-                <a:solidFill>
-                  <a:srgbClr val="B32A2A"/>
-                </a:solidFill>
-                <a:latin typeface="Consolas"/>
-              </a:rPr>
-              <a:t>s75.2    opensearch_verify.os_fail                     FAIL</a:t>
-            </a:r>
-          </a:p>
-          <a:p>
-            <a:pPr algn="l"/>
-            <a:r>
-              <a:rPr sz="1250" b="0">
-                <a:solidFill>
-                  <a:srgbClr val="1E7D3C"/>
-                </a:solidFill>
-                <a:latin typeface="Consolas"/>
-              </a:rPr>
-              <a:t>s75.3    opensearch_verify.os_with_metrics             PASS</a:t>
-            </a:r>
-          </a:p>
-          <a:p>
-            <a:pPr algn="l"/>
-            <a:r>
-              <a:rPr sz="1250" b="0">
-                <a:solidFill>
-                  <a:srgbClr val="1E7D3C"/>
-                </a:solidFill>
-                <a:latin typeface="Consolas"/>
-              </a:rPr>
-              <a:t>s75.4    opensearch_verify.os_version_tag.v1.0-verify  PASS</a:t>
-            </a:r>
-          </a:p>
-        </p:txBody>
-      </p:sp>
-      <p:sp>
-        <p:nvSpPr>
-          <p:cNvPr id="7" name="TextBox 6"/>
+          <p:cNvPr id="5" name="TextBox 4"/>
           <p:cNvSpPr txBox="1"/>
           <p:nvPr/>
         </p:nvSpPr>
         <p:spPr>
           <a:xfrm>
-            <a:off x="640080" y="6144768"/>
-            <a:ext cx="10972800" cy="502920"/>
+            <a:off x="640080" y="1691640"/>
+            <a:ext cx="10972800" cy="4754880"/>
           </a:xfrm>
           <a:prstGeom prst="rect">
             <a:avLst/>
@@ -17469,14 +17212,67 @@
           </a:bodyPr>
           <a:lstStyle/>
           <a:p>
-            <a:r>
-              <a:rPr sz="1400" b="0">
-                <a:solidFill>
-                  <a:srgbClr val="5B6674"/>
-                </a:solidFill>
-                <a:latin typeface="Arial"/>
-              </a:rPr>
-              <a:t>Shipped to OpenSearch, read back from the index — then on to Grafana dashboards.</a:t>
+            <a:pPr>
+              <a:spcAft>
+                <a:spcPts val="1000"/>
+              </a:spcAft>
+            </a:pPr>
+            <a:r>
+              <a:rPr sz="2000" b="0">
+                <a:solidFill>
+                  <a:srgbClr val="21252B"/>
+                </a:solidFill>
+                <a:latin typeface="Arial"/>
+              </a:rPr>
+              <a:t>•  csv_file — appends one CSV row per test (result, duration, metrics, permute vars).</a:t>
+            </a:r>
+          </a:p>
+          <a:p>
+            <a:pPr>
+              <a:spcAft>
+                <a:spcPts val="1000"/>
+              </a:spcAft>
+            </a:pPr>
+            <a:r>
+              <a:rPr sz="2000" b="0">
+                <a:solidFill>
+                  <a:srgbClr val="21252B"/>
+                </a:solidFill>
+                <a:latin typeface="Arial"/>
+              </a:rPr>
+              <a:t>•  saLog — a custom NASA/NOAA logger; writes a CSV row on result 'released'.</a:t>
+            </a:r>
+          </a:p>
+          <a:p>
+            <a:pPr>
+              <a:spcAft>
+                <a:spcPts val="1000"/>
+              </a:spcAft>
+            </a:pPr>
+            <a:r>
+              <a:rPr sz="2000" b="0">
+                <a:solidFill>
+                  <a:srgbClr val="21252B"/>
+                </a:solidFill>
+                <a:latin typeface="Arial"/>
+              </a:rPr>
+              <a:t>•  opensearch — ships each result document into the `pavilion-results` index.</a:t>
+            </a:r>
+          </a:p>
+          <a:p>
+            <a:pPr>
+              <a:spcAft>
+                <a:spcPts val="1000"/>
+              </a:spcAft>
+            </a:pPr>
+            <a:r>
+              <a:rPr sz="2000" b="0">
+                <a:solidFill>
+                  <a:srgbClr val="21252B"/>
+                </a:solidFill>
+                <a:latin typeface="Arial"/>
+              </a:rPr>
+              <a:t>•  Configured once in pavilion.yaml → every test result flows through them.</a:t>
             </a:r>
           </a:p>
         </p:txBody>
@@ -17528,7 +17324,7 @@
                 </a:solidFill>
                 <a:latin typeface="Arial"/>
               </a:rPr>
-              <a:t>LIVE DEMO · L10</a:t>
+              <a:t>LIVE DEMO · L8</a:t>
             </a:r>
           </a:p>
         </p:txBody>
@@ -17562,7 +17358,7 @@
                 </a:solidFill>
                 <a:latin typeface="Arial"/>
               </a:rPr>
-              <a:t>Output plugin: MySQL</a:t>
+              <a:t>Output plugin: CSV</a:t>
             </a:r>
           </a:p>
         </p:txBody>
@@ -17657,7 +17453,7 @@
                 </a:solidFill>
                 <a:latin typeface="Arial"/>
               </a:rPr>
-              <a:t>▶  10-mysql.sh</a:t>
+              <a:t>▶  08-output-csv.sh</a:t>
             </a:r>
           </a:p>
         </p:txBody>
@@ -17711,37 +17507,37 @@
                 </a:solidFill>
                 <a:latin typeface="Consolas"/>
               </a:rPr>
-              <a:t>$ pav run demo_pbs.metrics          # every logger fires, incl. mysql</a:t>
-            </a:r>
-          </a:p>
-          <a:p>
-            <a:pPr algn="l"/>
-            <a:r>
-              <a:rPr sz="1250" b="0">
-                <a:solidFill>
-                  <a:srgbClr val="1B2B34"/>
-                </a:solidFill>
-                <a:latin typeface="Consolas"/>
-              </a:rPr>
-              <a:t>sid: s71</a:t>
-            </a:r>
-          </a:p>
-          <a:p>
-            <a:pPr algn="l"/>
-            <a:r>
-              <a:rPr sz="1250" b="0">
-                <a:solidFill>
-                  <a:srgbClr val="1B2B34"/>
-                </a:solidFill>
-                <a:latin typeface="Consolas"/>
-              </a:rPr>
-              <a:t>tests: 1</a:t>
-            </a:r>
-          </a:p>
-          <a:p>
-            <a:pPr algn="l"/>
-            <a:r>
-              <a:rPr sz="1250" b="0">
+              <a:t>$ pav run demo_pbs.pass demo_pbs.metrics      # real PBS jobs</a:t>
+            </a:r>
+          </a:p>
+          <a:p>
+            <a:pPr algn="l"/>
+            <a:r>
+              <a:rPr sz="1150" b="0">
+                <a:solidFill>
+                  <a:srgbClr val="1B2B34"/>
+                </a:solidFill>
+                <a:latin typeface="Consolas"/>
+              </a:rPr>
+              <a:t>sid: s74</a:t>
+            </a:r>
+          </a:p>
+          <a:p>
+            <a:pPr algn="l"/>
+            <a:r>
+              <a:rPr sz="1150" b="0">
+                <a:solidFill>
+                  <a:srgbClr val="1B2B34"/>
+                </a:solidFill>
+                <a:latin typeface="Consolas"/>
+              </a:rPr>
+              <a:t>tests: 2</a:t>
+            </a:r>
+          </a:p>
+          <a:p>
+            <a:pPr algn="l"/>
+            <a:r>
+              <a:rPr sz="1150" b="0">
                 <a:solidFill>
                   <a:srgbClr val="1B2B34"/>
                 </a:solidFill>
@@ -17759,25 +17555,25 @@
                 </a:solidFill>
                 <a:latin typeface="Consolas"/>
               </a:rPr>
-              <a:t>$ qstat -a                          # a real PBS job</a:t>
-            </a:r>
-          </a:p>
-          <a:p>
-            <a:pPr algn="l"/>
-            <a:r>
-              <a:rPr sz="1250" b="0">
-                <a:solidFill>
-                  <a:srgbClr val="1B2B34"/>
-                </a:solidFill>
-                <a:latin typeface="Consolas"/>
-              </a:rPr>
-              <a:t>8384.pbs-server pavilion workq pav_demo_*  1  1  R</a:t>
-            </a:r>
-          </a:p>
-          <a:p>
-            <a:pPr algn="l"/>
-            <a:r>
-              <a:rPr sz="1250" b="0">
+              <a:t>$ qstat -a                                    # yes — it went through the scheduler</a:t>
+            </a:r>
+          </a:p>
+          <a:p>
+            <a:pPr algn="l"/>
+            <a:r>
+              <a:rPr sz="1150" b="0">
+                <a:solidFill>
+                  <a:srgbClr val="1B2B34"/>
+                </a:solidFill>
+                <a:latin typeface="Consolas"/>
+              </a:rPr>
+              <a:t>8387.pbs-server  pavilion  workq  pav_demo_*  1  1  R</a:t>
+            </a:r>
+          </a:p>
+          <a:p>
+            <a:pPr algn="l"/>
+            <a:r>
+              <a:rPr sz="1150" b="0">
                 <a:solidFill>
                   <a:srgbClr val="1B2B34"/>
                 </a:solidFill>
@@ -17795,68 +17591,43 @@
                 </a:solidFill>
                 <a:latin typeface="Consolas"/>
               </a:rPr>
-              <a:t>$ mysql pavilion -e 'SELECT pav_id,name,result,sys_name,ROUND(duration,3) dur
-                    FROM results ORDER BY logged_at DESC LIMIT 4'</a:t>
-            </a:r>
-          </a:p>
-          <a:p>
-            <a:pPr algn="l"/>
-            <a:r>
-              <a:rPr sz="1250" b="0">
-                <a:solidFill>
-                  <a:srgbClr val="1B2B34"/>
-                </a:solidFill>
-                <a:latin typeface="Consolas"/>
-              </a:rPr>
-              <a:t>pav_id  name                  result  sys_name    dur</a:t>
-            </a:r>
-          </a:p>
-          <a:p>
-            <a:pPr algn="l"/>
-            <a:r>
-              <a:rPr sz="1250" b="0">
+              <a:t>$ tail ~/pav_logs/results.csv                 # csv_file logger: one row per test</a:t>
+            </a:r>
+          </a:p>
+          <a:p>
+            <a:pPr algn="l"/>
+            <a:r>
+              <a:rPr sz="1150" b="0">
+                <a:solidFill>
+                  <a:srgbClr val="1B2B34"/>
+                </a:solidFill>
+                <a:latin typeface="Consolas"/>
+              </a:rPr>
+              <a:t>name,id,result,sys_name,user, ... ,duration</a:t>
+            </a:r>
+          </a:p>
+          <a:p>
+            <a:pPr algn="l"/>
+            <a:r>
+              <a:rPr sz="1150" b="0">
                 <a:solidFill>
                   <a:srgbClr val="1E7D3C"/>
                 </a:solidFill>
                 <a:latin typeface="Consolas"/>
               </a:rPr>
-              <a:t>s74.2   demo_pbs.metrics      PASS    pbs-server  0.040</a:t>
-            </a:r>
-          </a:p>
-          <a:p>
-            <a:pPr algn="l"/>
-            <a:r>
-              <a:rPr sz="1250" b="0">
+              <a:t>demo_pbs.pass,s74.1,PASS,pbs-server,pavilion, ... ,0.043</a:t>
+            </a:r>
+          </a:p>
+          <a:p>
+            <a:pPr algn="l"/>
+            <a:r>
+              <a:rPr sz="1150" b="0">
                 <a:solidFill>
                   <a:srgbClr val="1E7D3C"/>
                 </a:solidFill>
                 <a:latin typeface="Consolas"/>
               </a:rPr>
-              <a:t>s74.1   demo_pbs.pass         PASS    pbs-server  0.043</a:t>
-            </a:r>
-          </a:p>
-          <a:p>
-            <a:pPr algn="l"/>
-            <a:r>
-              <a:rPr sz="1250" b="0">
-                <a:solidFill>
-                  <a:srgbClr val="1E7D3C"/>
-                </a:solidFill>
-                <a:latin typeface="Consolas"/>
-              </a:rPr>
-              <a:t>s73.1   demo_modes.mode_demo  PASS    pbs-server  0.040</a:t>
-            </a:r>
-          </a:p>
-          <a:p>
-            <a:pPr algn="l"/>
-            <a:r>
-              <a:rPr sz="1250" b="0">
-                <a:solidFill>
-                  <a:srgbClr val="1E7D3C"/>
-                </a:solidFill>
-                <a:latin typeface="Consolas"/>
-              </a:rPr>
-              <a:t>s72.3   demo_perms.matrix...  PASS    pbs-server  0.040</a:t>
+              <a:t>demo_pbs.metrics,s74.2,PASS,pbs-server,pavilion, ... ,0.040</a:t>
             </a:r>
           </a:p>
         </p:txBody>
@@ -17890,7 +17661,7 @@
                 </a:solidFill>
                 <a:latin typeface="Arial"/>
               </a:rPr>
-              <a:t>A result logger we wrote — every result lands in a MySQL table (passwordless local auth).</a:t>
+              <a:t>A real PBS job (qstat proves dispatch), then the csv_file logger writes one row per test.</a:t>
             </a:r>
           </a:p>
         </p:txBody>
@@ -17942,7 +17713,7 @@
                 </a:solidFill>
                 <a:latin typeface="Arial"/>
               </a:rPr>
-              <a:t>RESULT LOGGERS</a:t>
+              <a:t>LIVE DEMO · SALOG</a:t>
             </a:r>
           </a:p>
         </p:txBody>
@@ -17976,7 +17747,7 @@
                 </a:solidFill>
                 <a:latin typeface="Arial"/>
               </a:rPr>
-              <a:t>Export results anywhere</a:t>
+              <a:t>Output plugin: saLog</a:t>
             </a:r>
           </a:p>
         </p:txBody>
@@ -18026,14 +17797,216 @@
       </p:sp>
       <p:sp>
         <p:nvSpPr>
-          <p:cNvPr id="5" name="TextBox 4"/>
+          <p:cNvPr id="5" name="Rectangle 4"/>
+          <p:cNvSpPr/>
+          <p:nvPr/>
+        </p:nvSpPr>
+        <p:spPr>
+          <a:xfrm>
+            <a:off x="8503920" y="457200"/>
+            <a:ext cx="3108960" cy="502920"/>
+          </a:xfrm>
+          <a:prstGeom prst="rect">
+            <a:avLst/>
+          </a:prstGeom>
+          <a:solidFill>
+            <a:srgbClr val="2E6DA4"/>
+          </a:solidFill>
+          <a:ln>
+            <a:noFill/>
+          </a:ln>
+        </p:spPr>
+        <p:style>
+          <a:lnRef idx="1">
+            <a:schemeClr val="accent1"/>
+          </a:lnRef>
+          <a:fillRef idx="3">
+            <a:schemeClr val="accent1"/>
+          </a:fillRef>
+          <a:effectRef idx="2">
+            <a:schemeClr val="accent1"/>
+          </a:effectRef>
+          <a:fontRef idx="minor">
+            <a:schemeClr val="lt1"/>
+          </a:fontRef>
+        </p:style>
+        <p:txBody>
+          <a:bodyPr rtlCol="0" anchor="ctr" wrap="square"/>
+          <a:lstStyle/>
+          <a:p>
+            <a:pPr algn="ctr"/>
+            <a:r>
+              <a:rPr sz="1300" b="1">
+                <a:solidFill>
+                  <a:srgbClr val="FFFFFF"/>
+                </a:solidFill>
+                <a:latin typeface="Arial"/>
+              </a:rPr>
+              <a:t>▶  12-salog.sh</a:t>
+            </a:r>
+          </a:p>
+        </p:txBody>
+      </p:sp>
+      <p:sp>
+        <p:nvSpPr>
+          <p:cNvPr id="6" name="Rectangle 5"/>
+          <p:cNvSpPr/>
+          <p:nvPr/>
+        </p:nvSpPr>
+        <p:spPr>
+          <a:xfrm>
+            <a:off x="640080" y="1645920"/>
+            <a:ext cx="10972800" cy="4343400"/>
+          </a:xfrm>
+          <a:prstGeom prst="rect">
+            <a:avLst/>
+          </a:prstGeom>
+          <a:solidFill>
+            <a:srgbClr val="F3F4F6"/>
+          </a:solidFill>
+          <a:ln w="12700">
+            <a:solidFill>
+              <a:srgbClr val="D5DAE0"/>
+            </a:solidFill>
+          </a:ln>
+        </p:spPr>
+        <p:style>
+          <a:lnRef idx="1">
+            <a:schemeClr val="accent1"/>
+          </a:lnRef>
+          <a:fillRef idx="3">
+            <a:schemeClr val="accent1"/>
+          </a:fillRef>
+          <a:effectRef idx="2">
+            <a:schemeClr val="accent1"/>
+          </a:effectRef>
+          <a:fontRef idx="minor">
+            <a:schemeClr val="lt1"/>
+          </a:fontRef>
+        </p:style>
+        <p:txBody>
+          <a:bodyPr rtlCol="0" anchor="t" wrap="square" lIns="228600" tIns="146304"/>
+          <a:lstStyle/>
+          <a:p>
+            <a:pPr algn="l"/>
+            <a:r>
+              <a:rPr sz="1400" b="1">
+                <a:solidFill>
+                  <a:srgbClr val="2E6DA4"/>
+                </a:solidFill>
+                <a:latin typeface="Consolas"/>
+              </a:rPr>
+              <a:t>$ pav run demo_pbs.salog                 # 1. run in Pavilion (per_file: name)</a:t>
+            </a:r>
+          </a:p>
+          <a:p>
+            <a:pPr algn="l"/>
+            <a:r>
+              <a:rPr sz="1250" b="0">
+                <a:solidFill>
+                  <a:srgbClr val="1B2B34"/>
+                </a:solidFill>
+                <a:latin typeface="Consolas"/>
+              </a:rPr>
+              <a:t>sid: s141</a:t>
+            </a:r>
+          </a:p>
+          <a:p>
+            <a:pPr algn="l"/>
+            <a:r>
+              <a:rPr sz="1250" b="0">
+                <a:solidFill>
+                  <a:srgbClr val="1B2B34"/>
+                </a:solidFill>
+                <a:latin typeface="Consolas"/>
+              </a:rPr>
+              <a:t>tests: 1</a:t>
+            </a:r>
+          </a:p>
+          <a:p>
+            <a:pPr algn="l"/>
+            <a:r>
+              <a:rPr sz="1250" b="0">
+                <a:solidFill>
+                  <a:srgbClr val="1B2B34"/>
+                </a:solidFill>
+                <a:latin typeface="Consolas"/>
+              </a:rPr>
+              <a:t> </a:t>
+            </a:r>
+          </a:p>
+          <a:p>
+            <a:pPr algn="l"/>
+            <a:r>
+              <a:rPr sz="1400" b="1">
+                <a:solidFill>
+                  <a:srgbClr val="2E6DA4"/>
+                </a:solidFill>
+                <a:latin typeface="Consolas"/>
+              </a:rPr>
+              <a:t>$ qstat -a                               # 2. the job, running in PBS</a:t>
+            </a:r>
+          </a:p>
+          <a:p>
+            <a:pPr algn="l"/>
+            <a:r>
+              <a:rPr sz="1250" b="0">
+                <a:solidFill>
+                  <a:srgbClr val="1B2B34"/>
+                </a:solidFill>
+                <a:latin typeface="Consolas"/>
+              </a:rPr>
+              <a:t>8410.pbs-server pavilion workq pav_demo_*  1  1  R</a:t>
+            </a:r>
+          </a:p>
+          <a:p>
+            <a:pPr algn="l"/>
+            <a:r>
+              <a:rPr sz="1250" b="0">
+                <a:solidFill>
+                  <a:srgbClr val="1B2B34"/>
+                </a:solidFill>
+                <a:latin typeface="Consolas"/>
+              </a:rPr>
+              <a:t> </a:t>
+            </a:r>
+          </a:p>
+          <a:p>
+            <a:pPr algn="l"/>
+            <a:r>
+              <a:rPr sz="1400" b="1">
+                <a:solidFill>
+                  <a:srgbClr val="2E6DA4"/>
+                </a:solidFill>
+                <a:latin typeface="Consolas"/>
+              </a:rPr>
+              <a:t>$ tail salog_output.txt                  # 3. the CSV the sa_log plugin wrote on release</a:t>
+            </a:r>
+          </a:p>
+          <a:p>
+            <a:pPr algn="l"/>
+            <a:r>
+              <a:rPr sz="1250" b="0">
+                <a:solidFill>
+                  <a:srgbClr val="1E7D3C"/>
+                </a:solidFill>
+                <a:latin typeface="Consolas"/>
+              </a:rPr>
+              <a:t>x1002c6s2b0n1,"demo_pbs.salog result=PASS",pavilion,released</a:t>
+            </a:r>
+          </a:p>
+        </p:txBody>
+      </p:sp>
+      <p:sp>
+        <p:nvSpPr>
+          <p:cNvPr id="7" name="TextBox 6"/>
           <p:cNvSpPr txBox="1"/>
           <p:nvPr/>
         </p:nvSpPr>
         <p:spPr>
           <a:xfrm>
-            <a:off x="640080" y="1691640"/>
-            <a:ext cx="10972800" cy="4754880"/>
+            <a:off x="640080" y="6144768"/>
+            <a:ext cx="10972800" cy="502920"/>
           </a:xfrm>
           <a:prstGeom prst="rect">
             <a:avLst/>
@@ -18046,83 +18019,14 @@
           </a:bodyPr>
           <a:lstStyle/>
           <a:p>
-            <a:pPr>
-              <a:spcAft>
-                <a:spcPts val="1000"/>
-              </a:spcAft>
-            </a:pPr>
-            <a:r>
-              <a:rPr sz="2000" b="0">
-                <a:solidFill>
-                  <a:srgbClr val="21252B"/>
-                </a:solidFill>
-                <a:latin typeface="Arial"/>
-              </a:rPr>
-              <a:t>•  Grafana — live dashboards &amp; trends  (shown today).</a:t>
-            </a:r>
-          </a:p>
-          <a:p>
-            <a:pPr>
-              <a:spcAft>
-                <a:spcPts val="1000"/>
-              </a:spcAft>
-            </a:pPr>
-            <a:r>
-              <a:rPr sz="2000" b="0">
-                <a:solidFill>
-                  <a:srgbClr val="21252B"/>
-                </a:solidFill>
-                <a:latin typeface="Arial"/>
-              </a:rPr>
-              <a:t>•  OpenSearch — index every result document  (shown today).</a:t>
-            </a:r>
-          </a:p>
-          <a:p>
-            <a:pPr>
-              <a:spcAft>
-                <a:spcPts val="1000"/>
-              </a:spcAft>
-            </a:pPr>
-            <a:r>
-              <a:rPr sz="2000" b="0">
-                <a:solidFill>
-                  <a:srgbClr val="21252B"/>
-                </a:solidFill>
-                <a:latin typeface="Arial"/>
-              </a:rPr>
-              <a:t>•  MySQL — a row per result in a relational table  (shown today).</a:t>
-            </a:r>
-          </a:p>
-          <a:p>
-            <a:pPr>
-              <a:spcAft>
-                <a:spcPts val="1000"/>
-              </a:spcAft>
-            </a:pPr>
-            <a:r>
-              <a:rPr sz="2000" b="0">
-                <a:solidFill>
-                  <a:srgbClr val="21252B"/>
-                </a:solidFill>
-                <a:latin typeface="Arial"/>
-              </a:rPr>
-              <a:t>•  PostgreSQL — same idea, for a Postgres shop.</a:t>
-            </a:r>
-          </a:p>
-          <a:p>
-            <a:pPr>
-              <a:spcAft>
-                <a:spcPts val="1000"/>
-              </a:spcAft>
-            </a:pPr>
-            <a:r>
-              <a:rPr sz="2000" b="0">
-                <a:solidFill>
-                  <a:srgbClr val="21252B"/>
-                </a:solidFill>
-                <a:latin typeface="Arial"/>
-              </a:rPr>
-              <a:t>•  [add your own] — a result logger is just a plugin: target any destination.</a:t>
+            <a:r>
+              <a:rPr sz="1400" b="0">
+                <a:solidFill>
+                  <a:srgbClr val="5B6674"/>
+                </a:solidFill>
+                <a:latin typeface="Arial"/>
+              </a:rPr>
+              <a:t>Run in Pavilion → job in PBS → the sa_log plugin calls saLog per node as it's released.</a:t>
             </a:r>
           </a:p>
         </p:txBody>
@@ -18147,20 +18051,88 @@
       <p:grpSpPr/>
       <p:sp>
         <p:nvSpPr>
-          <p:cNvPr id="2" name="Rectangle 1"/>
+          <p:cNvPr id="2" name="TextBox 1"/>
+          <p:cNvSpPr txBox="1"/>
+          <p:nvPr/>
+        </p:nvSpPr>
+        <p:spPr>
+          <a:xfrm>
+            <a:off x="548640" y="320040"/>
+            <a:ext cx="7680960" cy="365760"/>
+          </a:xfrm>
+          <a:prstGeom prst="rect">
+            <a:avLst/>
+          </a:prstGeom>
+          <a:noFill/>
+        </p:spPr>
+        <p:txBody>
+          <a:bodyPr wrap="square">
+            <a:spAutoFit/>
+          </a:bodyPr>
+          <a:lstStyle/>
+          <a:p>
+            <a:r>
+              <a:rPr sz="1200" b="1">
+                <a:solidFill>
+                  <a:srgbClr val="2E6DA4"/>
+                </a:solidFill>
+                <a:latin typeface="Arial"/>
+              </a:rPr>
+              <a:t>LIVE DEMO · L9</a:t>
+            </a:r>
+          </a:p>
+        </p:txBody>
+      </p:sp>
+      <p:sp>
+        <p:nvSpPr>
+          <p:cNvPr id="3" name="TextBox 2"/>
+          <p:cNvSpPr txBox="1"/>
+          <p:nvPr/>
+        </p:nvSpPr>
+        <p:spPr>
+          <a:xfrm>
+            <a:off x="548640" y="640080"/>
+            <a:ext cx="11064240" cy="822960"/>
+          </a:xfrm>
+          <a:prstGeom prst="rect">
+            <a:avLst/>
+          </a:prstGeom>
+          <a:noFill/>
+        </p:spPr>
+        <p:txBody>
+          <a:bodyPr wrap="square">
+            <a:spAutoFit/>
+          </a:bodyPr>
+          <a:lstStyle/>
+          <a:p>
+            <a:r>
+              <a:rPr sz="3000" b="1">
+                <a:solidFill>
+                  <a:srgbClr val="1F3B63"/>
+                </a:solidFill>
+                <a:latin typeface="Arial"/>
+              </a:rPr>
+              <a:t>Output plugin: OpenSearch → Grafana</a:t>
+            </a:r>
+          </a:p>
+        </p:txBody>
+      </p:sp>
+      <p:sp>
+        <p:nvSpPr>
+          <p:cNvPr id="4" name="Rectangle 3"/>
           <p:cNvSpPr/>
           <p:nvPr/>
         </p:nvSpPr>
         <p:spPr>
           <a:xfrm>
-            <a:off x="0" y="2651760"/>
-            <a:ext cx="12191695" cy="1554480"/>
+            <a:off x="566928" y="1417320"/>
+            <a:ext cx="2011680" cy="38100"/>
           </a:xfrm>
           <a:prstGeom prst="rect">
             <a:avLst/>
           </a:prstGeom>
           <a:solidFill>
-            <a:srgbClr val="EEF2F7"/>
+            <a:srgbClr val="2E6DA4"/>
           </a:solidFill>
           <a:ln>
             <a:noFill/>
@@ -18190,14 +18162,264 @@
       </p:sp>
       <p:sp>
         <p:nvSpPr>
-          <p:cNvPr id="3" name="TextBox 2"/>
+          <p:cNvPr id="5" name="Rectangle 4"/>
+          <p:cNvSpPr/>
+          <p:nvPr/>
+        </p:nvSpPr>
+        <p:spPr>
+          <a:xfrm>
+            <a:off x="8503920" y="457200"/>
+            <a:ext cx="3108960" cy="502920"/>
+          </a:xfrm>
+          <a:prstGeom prst="rect">
+            <a:avLst/>
+          </a:prstGeom>
+          <a:solidFill>
+            <a:srgbClr val="2E6DA4"/>
+          </a:solidFill>
+          <a:ln>
+            <a:noFill/>
+          </a:ln>
+        </p:spPr>
+        <p:style>
+          <a:lnRef idx="1">
+            <a:schemeClr val="accent1"/>
+          </a:lnRef>
+          <a:fillRef idx="3">
+            <a:schemeClr val="accent1"/>
+          </a:fillRef>
+          <a:effectRef idx="2">
+            <a:schemeClr val="accent1"/>
+          </a:effectRef>
+          <a:fontRef idx="minor">
+            <a:schemeClr val="lt1"/>
+          </a:fontRef>
+        </p:style>
+        <p:txBody>
+          <a:bodyPr rtlCol="0" anchor="ctr" wrap="square"/>
+          <a:lstStyle/>
+          <a:p>
+            <a:pPr algn="ctr"/>
+            <a:r>
+              <a:rPr sz="1300" b="1">
+                <a:solidFill>
+                  <a:srgbClr val="FFFFFF"/>
+                </a:solidFill>
+                <a:latin typeface="Arial"/>
+              </a:rPr>
+              <a:t>▶  09-opensearch.sh</a:t>
+            </a:r>
+          </a:p>
+        </p:txBody>
+      </p:sp>
+      <p:sp>
+        <p:nvSpPr>
+          <p:cNvPr id="6" name="Rectangle 5"/>
+          <p:cNvSpPr/>
+          <p:nvPr/>
+        </p:nvSpPr>
+        <p:spPr>
+          <a:xfrm>
+            <a:off x="640080" y="1645920"/>
+            <a:ext cx="10972800" cy="4343400"/>
+          </a:xfrm>
+          <a:prstGeom prst="rect">
+            <a:avLst/>
+          </a:prstGeom>
+          <a:solidFill>
+            <a:srgbClr val="F3F4F6"/>
+          </a:solidFill>
+          <a:ln w="12700">
+            <a:solidFill>
+              <a:srgbClr val="D5DAE0"/>
+            </a:solidFill>
+          </a:ln>
+        </p:spPr>
+        <p:style>
+          <a:lnRef idx="1">
+            <a:schemeClr val="accent1"/>
+          </a:lnRef>
+          <a:fillRef idx="3">
+            <a:schemeClr val="accent1"/>
+          </a:fillRef>
+          <a:effectRef idx="2">
+            <a:schemeClr val="accent1"/>
+          </a:effectRef>
+          <a:fontRef idx="minor">
+            <a:schemeClr val="lt1"/>
+          </a:fontRef>
+        </p:style>
+        <p:txBody>
+          <a:bodyPr rtlCol="0" anchor="t" wrap="square" lIns="228600" tIns="146304"/>
+          <a:lstStyle/>
+          <a:p>
+            <a:pPr algn="l"/>
+            <a:r>
+              <a:rPr sz="1400" b="1">
+                <a:solidFill>
+                  <a:srgbClr val="2E6DA4"/>
+                </a:solidFill>
+                <a:latin typeface="Consolas"/>
+              </a:rPr>
+              <a:t>$ pav run -m pbs opensearch_verify        # 4 tests via PBS; each result → OpenSearch</a:t>
+            </a:r>
+          </a:p>
+          <a:p>
+            <a:pPr algn="l"/>
+            <a:r>
+              <a:rPr sz="1250" b="0">
+                <a:solidFill>
+                  <a:srgbClr val="1B2B34"/>
+                </a:solidFill>
+                <a:latin typeface="Consolas"/>
+              </a:rPr>
+              <a:t>created 4 tests, skipped 0, 0 errors.</a:t>
+            </a:r>
+          </a:p>
+          <a:p>
+            <a:pPr algn="l"/>
+            <a:r>
+              <a:rPr sz="1250" b="0">
+                <a:solidFill>
+                  <a:srgbClr val="1B2B34"/>
+                </a:solidFill>
+                <a:latin typeface="Consolas"/>
+              </a:rPr>
+              <a:t>sid: s75</a:t>
+            </a:r>
+          </a:p>
+          <a:p>
+            <a:pPr algn="l"/>
+            <a:r>
+              <a:rPr sz="1250" b="0">
+                <a:solidFill>
+                  <a:srgbClr val="1B2B34"/>
+                </a:solidFill>
+                <a:latin typeface="Consolas"/>
+              </a:rPr>
+              <a:t> </a:t>
+            </a:r>
+          </a:p>
+          <a:p>
+            <a:pPr algn="l"/>
+            <a:r>
+              <a:rPr sz="1400" b="1">
+                <a:solidFill>
+                  <a:srgbClr val="2E6DA4"/>
+                </a:solidFill>
+                <a:latin typeface="Consolas"/>
+              </a:rPr>
+              <a:t>$ qstat -a                                # through the scheduler</a:t>
+            </a:r>
+          </a:p>
+          <a:p>
+            <a:pPr algn="l"/>
+            <a:r>
+              <a:rPr sz="1250" b="0">
+                <a:solidFill>
+                  <a:srgbClr val="1B2B34"/>
+                </a:solidFill>
+                <a:latin typeface="Consolas"/>
+              </a:rPr>
+              <a:t>8389.pbs-server pavilion workq pav_opens*  1  1  R</a:t>
+            </a:r>
+          </a:p>
+          <a:p>
+            <a:pPr algn="l"/>
+            <a:r>
+              <a:rPr sz="1250" b="0">
+                <a:solidFill>
+                  <a:srgbClr val="1B2B34"/>
+                </a:solidFill>
+                <a:latin typeface="Consolas"/>
+              </a:rPr>
+              <a:t> </a:t>
+            </a:r>
+          </a:p>
+          <a:p>
+            <a:pPr algn="l"/>
+            <a:r>
+              <a:rPr sz="1400" b="1">
+                <a:solidFill>
+                  <a:srgbClr val="2E6DA4"/>
+                </a:solidFill>
+                <a:latin typeface="Consolas"/>
+              </a:rPr>
+              <a:t>$ python3 ~/opensearch_results.py --name opensearch_verify</a:t>
+            </a:r>
+          </a:p>
+          <a:p>
+            <a:pPr algn="l"/>
+            <a:r>
+              <a:rPr sz="1250" b="0">
+                <a:solidFill>
+                  <a:srgbClr val="1B2B34"/>
+                </a:solidFill>
+                <a:latin typeface="Consolas"/>
+              </a:rPr>
+              <a:t>pav_id   name                                          result</a:t>
+            </a:r>
+          </a:p>
+          <a:p>
+            <a:pPr algn="l"/>
+            <a:r>
+              <a:rPr sz="1250" b="0">
+                <a:solidFill>
+                  <a:srgbClr val="1E7D3C"/>
+                </a:solidFill>
+                <a:latin typeface="Consolas"/>
+              </a:rPr>
+              <a:t>s75.1    opensearch_verify.os_pass                     PASS</a:t>
+            </a:r>
+          </a:p>
+          <a:p>
+            <a:pPr algn="l"/>
+            <a:r>
+              <a:rPr sz="1250" b="0">
+                <a:solidFill>
+                  <a:srgbClr val="B32A2A"/>
+                </a:solidFill>
+                <a:latin typeface="Consolas"/>
+              </a:rPr>
+              <a:t>s75.2    opensearch_verify.os_fail                     FAIL</a:t>
+            </a:r>
+          </a:p>
+          <a:p>
+            <a:pPr algn="l"/>
+            <a:r>
+              <a:rPr sz="1250" b="0">
+                <a:solidFill>
+                  <a:srgbClr val="1E7D3C"/>
+                </a:solidFill>
+                <a:latin typeface="Consolas"/>
+              </a:rPr>
+              <a:t>s75.3    opensearch_verify.os_with_metrics             PASS</a:t>
+            </a:r>
+          </a:p>
+          <a:p>
+            <a:pPr algn="l"/>
+            <a:r>
+              <a:rPr sz="1250" b="0">
+                <a:solidFill>
+                  <a:srgbClr val="1E7D3C"/>
+                </a:solidFill>
+                <a:latin typeface="Consolas"/>
+              </a:rPr>
+              <a:t>s75.4    opensearch_verify.os_version_tag.v1.0-verify  PASS</a:t>
+            </a:r>
+          </a:p>
+        </p:txBody>
+      </p:sp>
+      <p:sp>
+        <p:nvSpPr>
+          <p:cNvPr id="7" name="TextBox 6"/>
           <p:cNvSpPr txBox="1"/>
           <p:nvPr/>
         </p:nvSpPr>
         <p:spPr>
           <a:xfrm>
-            <a:off x="731520" y="2834640"/>
-            <a:ext cx="10698480" cy="1188720"/>
+            <a:off x="640080" y="6144768"/>
+            <a:ext cx="10972800" cy="502920"/>
           </a:xfrm>
           <a:prstGeom prst="rect">
             <a:avLst/>
@@ -18211,24 +18433,13 @@
           <a:lstStyle/>
           <a:p>
             <a:r>
-              <a:rPr sz="1300" b="1">
-                <a:solidFill>
-                  <a:srgbClr val="2E6DA4"/>
-                </a:solidFill>
-                <a:latin typeface="Arial"/>
-              </a:rPr>
-              <a:t>REAL-WORLD</a:t>
-            </a:r>
-          </a:p>
-          <a:p>
-            <a:r>
-              <a:rPr sz="3600" b="1">
-                <a:solidFill>
-                  <a:srgbClr val="1F3B63"/>
-                </a:solidFill>
-                <a:latin typeface="Arial"/>
-              </a:rPr>
-              <a:t>Putting it together</a:t>
+              <a:rPr sz="1400" b="0">
+                <a:solidFill>
+                  <a:srgbClr val="5B6674"/>
+                </a:solidFill>
+                <a:latin typeface="Arial"/>
+              </a:rPr>
+              <a:t>Shipped to OpenSearch, read back from the index — then on to Grafana dashboards.</a:t>
             </a:r>
           </a:p>
         </p:txBody>
@@ -18280,7 +18491,7 @@
                 </a:solidFill>
                 <a:latin typeface="Arial"/>
               </a:rPr>
-              <a:t>IN PRACTICE</a:t>
+              <a:t>LIVE DEMO · L10</a:t>
             </a:r>
           </a:p>
         </p:txBody>
@@ -18314,7 +18525,7 @@
                 </a:solidFill>
                 <a:latin typeface="Arial"/>
               </a:rPr>
-              <a:t>How we use it here</a:t>
+              <a:t>Output plugin: MySQL</a:t>
             </a:r>
           </a:p>
         </p:txBody>
@@ -18364,14 +18575,265 @@
       </p:sp>
       <p:sp>
         <p:nvSpPr>
-          <p:cNvPr id="5" name="TextBox 4"/>
+          <p:cNvPr id="5" name="Rectangle 4"/>
+          <p:cNvSpPr/>
+          <p:nvPr/>
+        </p:nvSpPr>
+        <p:spPr>
+          <a:xfrm>
+            <a:off x="8503920" y="457200"/>
+            <a:ext cx="3108960" cy="502920"/>
+          </a:xfrm>
+          <a:prstGeom prst="rect">
+            <a:avLst/>
+          </a:prstGeom>
+          <a:solidFill>
+            <a:srgbClr val="2E6DA4"/>
+          </a:solidFill>
+          <a:ln>
+            <a:noFill/>
+          </a:ln>
+        </p:spPr>
+        <p:style>
+          <a:lnRef idx="1">
+            <a:schemeClr val="accent1"/>
+          </a:lnRef>
+          <a:fillRef idx="3">
+            <a:schemeClr val="accent1"/>
+          </a:fillRef>
+          <a:effectRef idx="2">
+            <a:schemeClr val="accent1"/>
+          </a:effectRef>
+          <a:fontRef idx="minor">
+            <a:schemeClr val="lt1"/>
+          </a:fontRef>
+        </p:style>
+        <p:txBody>
+          <a:bodyPr rtlCol="0" anchor="ctr" wrap="square"/>
+          <a:lstStyle/>
+          <a:p>
+            <a:pPr algn="ctr"/>
+            <a:r>
+              <a:rPr sz="1300" b="1">
+                <a:solidFill>
+                  <a:srgbClr val="FFFFFF"/>
+                </a:solidFill>
+                <a:latin typeface="Arial"/>
+              </a:rPr>
+              <a:t>▶  10-mysql.sh</a:t>
+            </a:r>
+          </a:p>
+        </p:txBody>
+      </p:sp>
+      <p:sp>
+        <p:nvSpPr>
+          <p:cNvPr id="6" name="Rectangle 5"/>
+          <p:cNvSpPr/>
+          <p:nvPr/>
+        </p:nvSpPr>
+        <p:spPr>
+          <a:xfrm>
+            <a:off x="640080" y="1645920"/>
+            <a:ext cx="10972800" cy="4343400"/>
+          </a:xfrm>
+          <a:prstGeom prst="rect">
+            <a:avLst/>
+          </a:prstGeom>
+          <a:solidFill>
+            <a:srgbClr val="F3F4F6"/>
+          </a:solidFill>
+          <a:ln w="12700">
+            <a:solidFill>
+              <a:srgbClr val="D5DAE0"/>
+            </a:solidFill>
+          </a:ln>
+        </p:spPr>
+        <p:style>
+          <a:lnRef idx="1">
+            <a:schemeClr val="accent1"/>
+          </a:lnRef>
+          <a:fillRef idx="3">
+            <a:schemeClr val="accent1"/>
+          </a:fillRef>
+          <a:effectRef idx="2">
+            <a:schemeClr val="accent1"/>
+          </a:effectRef>
+          <a:fontRef idx="minor">
+            <a:schemeClr val="lt1"/>
+          </a:fontRef>
+        </p:style>
+        <p:txBody>
+          <a:bodyPr rtlCol="0" anchor="t" wrap="square" lIns="228600" tIns="146304"/>
+          <a:lstStyle/>
+          <a:p>
+            <a:pPr algn="l"/>
+            <a:r>
+              <a:rPr sz="1400" b="1">
+                <a:solidFill>
+                  <a:srgbClr val="2E6DA4"/>
+                </a:solidFill>
+                <a:latin typeface="Consolas"/>
+              </a:rPr>
+              <a:t>$ pav run demo_pbs.metrics          # every logger fires, incl. mysql</a:t>
+            </a:r>
+          </a:p>
+          <a:p>
+            <a:pPr algn="l"/>
+            <a:r>
+              <a:rPr sz="1250" b="0">
+                <a:solidFill>
+                  <a:srgbClr val="1B2B34"/>
+                </a:solidFill>
+                <a:latin typeface="Consolas"/>
+              </a:rPr>
+              <a:t>sid: s71</a:t>
+            </a:r>
+          </a:p>
+          <a:p>
+            <a:pPr algn="l"/>
+            <a:r>
+              <a:rPr sz="1250" b="0">
+                <a:solidFill>
+                  <a:srgbClr val="1B2B34"/>
+                </a:solidFill>
+                <a:latin typeface="Consolas"/>
+              </a:rPr>
+              <a:t>tests: 1</a:t>
+            </a:r>
+          </a:p>
+          <a:p>
+            <a:pPr algn="l"/>
+            <a:r>
+              <a:rPr sz="1250" b="0">
+                <a:solidFill>
+                  <a:srgbClr val="1B2B34"/>
+                </a:solidFill>
+                <a:latin typeface="Consolas"/>
+              </a:rPr>
+              <a:t> </a:t>
+            </a:r>
+          </a:p>
+          <a:p>
+            <a:pPr algn="l"/>
+            <a:r>
+              <a:rPr sz="1400" b="1">
+                <a:solidFill>
+                  <a:srgbClr val="2E6DA4"/>
+                </a:solidFill>
+                <a:latin typeface="Consolas"/>
+              </a:rPr>
+              <a:t>$ qstat -a                          # a real PBS job</a:t>
+            </a:r>
+          </a:p>
+          <a:p>
+            <a:pPr algn="l"/>
+            <a:r>
+              <a:rPr sz="1250" b="0">
+                <a:solidFill>
+                  <a:srgbClr val="1B2B34"/>
+                </a:solidFill>
+                <a:latin typeface="Consolas"/>
+              </a:rPr>
+              <a:t>8384.pbs-server pavilion workq pav_demo_*  1  1  R</a:t>
+            </a:r>
+          </a:p>
+          <a:p>
+            <a:pPr algn="l"/>
+            <a:r>
+              <a:rPr sz="1250" b="0">
+                <a:solidFill>
+                  <a:srgbClr val="1B2B34"/>
+                </a:solidFill>
+                <a:latin typeface="Consolas"/>
+              </a:rPr>
+              <a:t> </a:t>
+            </a:r>
+          </a:p>
+          <a:p>
+            <a:pPr algn="l"/>
+            <a:r>
+              <a:rPr sz="1400" b="1">
+                <a:solidFill>
+                  <a:srgbClr val="2E6DA4"/>
+                </a:solidFill>
+                <a:latin typeface="Consolas"/>
+              </a:rPr>
+              <a:t>$ mysql pavilion -e 'SELECT pav_id,name,result,sys_name,ROUND(duration,3) dur
+                    FROM results ORDER BY logged_at DESC LIMIT 4'</a:t>
+            </a:r>
+          </a:p>
+          <a:p>
+            <a:pPr algn="l"/>
+            <a:r>
+              <a:rPr sz="1250" b="0">
+                <a:solidFill>
+                  <a:srgbClr val="1B2B34"/>
+                </a:solidFill>
+                <a:latin typeface="Consolas"/>
+              </a:rPr>
+              <a:t>pav_id  name                  result  sys_name    dur</a:t>
+            </a:r>
+          </a:p>
+          <a:p>
+            <a:pPr algn="l"/>
+            <a:r>
+              <a:rPr sz="1250" b="0">
+                <a:solidFill>
+                  <a:srgbClr val="1E7D3C"/>
+                </a:solidFill>
+                <a:latin typeface="Consolas"/>
+              </a:rPr>
+              <a:t>s74.2   demo_pbs.metrics      PASS    pbs-server  0.040</a:t>
+            </a:r>
+          </a:p>
+          <a:p>
+            <a:pPr algn="l"/>
+            <a:r>
+              <a:rPr sz="1250" b="0">
+                <a:solidFill>
+                  <a:srgbClr val="1E7D3C"/>
+                </a:solidFill>
+                <a:latin typeface="Consolas"/>
+              </a:rPr>
+              <a:t>s74.1   demo_pbs.pass         PASS    pbs-server  0.043</a:t>
+            </a:r>
+          </a:p>
+          <a:p>
+            <a:pPr algn="l"/>
+            <a:r>
+              <a:rPr sz="1250" b="0">
+                <a:solidFill>
+                  <a:srgbClr val="1E7D3C"/>
+                </a:solidFill>
+                <a:latin typeface="Consolas"/>
+              </a:rPr>
+              <a:t>s73.1   demo_modes.mode_demo  PASS    pbs-server  0.040</a:t>
+            </a:r>
+          </a:p>
+          <a:p>
+            <a:pPr algn="l"/>
+            <a:r>
+              <a:rPr sz="1250" b="0">
+                <a:solidFill>
+                  <a:srgbClr val="1E7D3C"/>
+                </a:solidFill>
+                <a:latin typeface="Consolas"/>
+              </a:rPr>
+              <a:t>s72.3   demo_perms.matrix...  PASS    pbs-server  0.040</a:t>
+            </a:r>
+          </a:p>
+        </p:txBody>
+      </p:sp>
+      <p:sp>
+        <p:nvSpPr>
+          <p:cNvPr id="7" name="TextBox 6"/>
           <p:cNvSpPr txBox="1"/>
           <p:nvPr/>
         </p:nvSpPr>
         <p:spPr>
           <a:xfrm>
-            <a:off x="640080" y="1691640"/>
-            <a:ext cx="10972800" cy="4754880"/>
+            <a:off x="640080" y="6144768"/>
+            <a:ext cx="10972800" cy="502920"/>
           </a:xfrm>
           <a:prstGeom prst="rect">
             <a:avLst/>
@@ -18384,67 +18846,14 @@
           </a:bodyPr>
           <a:lstStyle/>
           <a:p>
-            <a:pPr>
-              <a:spcAft>
-                <a:spcPts val="1000"/>
-              </a:spcAft>
-            </a:pPr>
-            <a:r>
-              <a:rPr sz="2000" b="0">
-                <a:solidFill>
-                  <a:srgbClr val="21252B"/>
-                </a:solidFill>
-                <a:latin typeface="Arial"/>
-              </a:rPr>
-              <a:t>•  Define acceptance/regression tests once (incl. real benchmarks: HPL, HPCG).</a:t>
-            </a:r>
-          </a:p>
-          <a:p>
-            <a:pPr>
-              <a:spcAft>
-                <a:spcPts val="1000"/>
-              </a:spcAft>
-            </a:pPr>
-            <a:r>
-              <a:rPr sz="2000" b="0">
-                <a:solidFill>
-                  <a:srgbClr val="21252B"/>
-                </a:solidFill>
-                <a:latin typeface="Arial"/>
-              </a:rPr>
-              <a:t>•  Run through PBS across the cluster; permute across configurations.</a:t>
-            </a:r>
-          </a:p>
-          <a:p>
-            <a:pPr>
-              <a:spcAft>
-                <a:spcPts val="1000"/>
-              </a:spcAft>
-            </a:pPr>
-            <a:r>
-              <a:rPr sz="2000" b="0">
-                <a:solidFill>
-                  <a:srgbClr val="21252B"/>
-                </a:solidFill>
-                <a:latin typeface="Arial"/>
-              </a:rPr>
-              <a:t>•  Parse metrics; every result flows to CSV + OpenSearch automatically.</a:t>
-            </a:r>
-          </a:p>
-          <a:p>
-            <a:pPr>
-              <a:spcAft>
-                <a:spcPts val="1000"/>
-              </a:spcAft>
-            </a:pPr>
-            <a:r>
-              <a:rPr sz="2000" b="0">
-                <a:solidFill>
-                  <a:srgbClr val="21252B"/>
-                </a:solidFill>
-                <a:latin typeface="Arial"/>
-              </a:rPr>
-              <a:t>•  Grafana dashboards make trends and regressions visible over time.</a:t>
+            <a:r>
+              <a:rPr sz="1400" b="0">
+                <a:solidFill>
+                  <a:srgbClr val="5B6674"/>
+                </a:solidFill>
+                <a:latin typeface="Arial"/>
+              </a:rPr>
+              <a:t>A result logger we wrote — every result lands in a MySQL table (passwordless local auth).</a:t>
             </a:r>
           </a:p>
         </p:txBody>
@@ -18496,7 +18905,7 @@
                 </a:solidFill>
                 <a:latin typeface="Arial"/>
               </a:rPr>
-              <a:t>WRAP-UP</a:t>
+              <a:t>RESULT LOGGERS</a:t>
             </a:r>
           </a:p>
         </p:txBody>
@@ -18530,7 +18939,7 @@
                 </a:solidFill>
                 <a:latin typeface="Arial"/>
               </a:rPr>
-              <a:t>Recap</a:t>
+              <a:t>Export results anywhere</a:t>
             </a:r>
           </a:p>
         </p:txBody>
@@ -18612,7 +19021,7 @@
                 </a:solidFill>
                 <a:latin typeface="Arial"/>
               </a:rPr>
-              <a:t>•  YAML tests → build → run → parse → log. One model, everywhere.</a:t>
+              <a:t>•  Grafana — live dashboards &amp; trends  (shown today).</a:t>
             </a:r>
           </a:p>
           <a:p>
@@ -18628,7 +19037,7 @@
                 </a:solidFill>
                 <a:latin typeface="Arial"/>
               </a:rPr>
-              <a:t>•  Permutations turn one config into a whole test matrix.</a:t>
+              <a:t>•  OpenSearch — index every result document  (shown today).</a:t>
             </a:r>
           </a:p>
           <a:p>
@@ -18644,7 +19053,7 @@
                 </a:solidFill>
                 <a:latin typeface="Arial"/>
               </a:rPr>
-              <a:t>•  Schedulers (incl. our PBS plugin) run it at cluster scale.</a:t>
+              <a:t>•  MySQL — a row per result in a relational table  (shown today).</a:t>
             </a:r>
           </a:p>
           <a:p>
@@ -18660,7 +19069,7 @@
                 </a:solidFill>
                 <a:latin typeface="Arial"/>
               </a:rPr>
-              <a:t>•  Plugins extend everything — our commands and result loggers included.</a:t>
+              <a:t>•  PostgreSQL — same idea, for a Postgres shop.</a:t>
             </a:r>
           </a:p>
           <a:p>
@@ -18676,23 +19085,7 @@
                 </a:solidFill>
                 <a:latin typeface="Arial"/>
               </a:rPr>
-              <a:t>•  Results become dashboards. Questions?</a:t>
-            </a:r>
-          </a:p>
-          <a:p>
-            <a:pPr>
-              <a:spcAft>
-                <a:spcPts val="1000"/>
-              </a:spcAft>
-            </a:pPr>
-            <a:r>
-              <a:rPr sz="2000" b="0">
-                <a:solidFill>
-                  <a:srgbClr val="21252B"/>
-                </a:solidFill>
-                <a:latin typeface="Arial"/>
-              </a:rPr>
-              <a:t>•  Learn more →  github.com/hpc/pavilion2   ·   pavilion2.readthedocs.io</a:t>
+              <a:t>•  [add your own] — a result logger is just a plugin: target any destination.</a:t>
             </a:r>
           </a:p>
         </p:txBody>
@@ -18925,6 +19318,576 @@
                 <a:latin typeface="Arial"/>
               </a:rPr>
               <a:t>•  Results are captured, parsed, and shippable to dashboards (OpenSearch → Grafana).</a:t>
+            </a:r>
+          </a:p>
+        </p:txBody>
+      </p:sp>
+    </p:spTree>
+  </p:cSld>
+  <p:clrMapOvr>
+    <a:masterClrMapping/>
+  </p:clrMapOvr>
+</p:sld>
+</file>
+
+<file path=ppt/slides/slide50.xml><?xml version="1.0" encoding="utf-8"?>
+<p:sld xmlns:a="http://schemas.openxmlformats.org/drawingml/2006/main" xmlns:p="http://schemas.openxmlformats.org/presentationml/2006/main" xmlns:r="http://schemas.openxmlformats.org/officeDocument/2006/relationships">
+  <p:cSld>
+    <p:spTree>
+      <p:nvGrpSpPr>
+        <p:cNvPr id="1" name=""/>
+        <p:cNvGrpSpPr/>
+        <p:nvPr/>
+      </p:nvGrpSpPr>
+      <p:grpSpPr/>
+      <p:sp>
+        <p:nvSpPr>
+          <p:cNvPr id="2" name="Rectangle 1"/>
+          <p:cNvSpPr/>
+          <p:nvPr/>
+        </p:nvSpPr>
+        <p:spPr>
+          <a:xfrm>
+            <a:off x="0" y="2651760"/>
+            <a:ext cx="12191695" cy="1554480"/>
+          </a:xfrm>
+          <a:prstGeom prst="rect">
+            <a:avLst/>
+          </a:prstGeom>
+          <a:solidFill>
+            <a:srgbClr val="EEF2F7"/>
+          </a:solidFill>
+          <a:ln>
+            <a:noFill/>
+          </a:ln>
+        </p:spPr>
+        <p:style>
+          <a:lnRef idx="1">
+            <a:schemeClr val="accent1"/>
+          </a:lnRef>
+          <a:fillRef idx="3">
+            <a:schemeClr val="accent1"/>
+          </a:fillRef>
+          <a:effectRef idx="2">
+            <a:schemeClr val="accent1"/>
+          </a:effectRef>
+          <a:fontRef idx="minor">
+            <a:schemeClr val="lt1"/>
+          </a:fontRef>
+        </p:style>
+        <p:txBody>
+          <a:bodyPr rtlCol="0" anchor="ctr"/>
+          <a:lstStyle/>
+          <a:p>
+            <a:pPr algn="ctr"/>
+          </a:p>
+        </p:txBody>
+      </p:sp>
+      <p:sp>
+        <p:nvSpPr>
+          <p:cNvPr id="3" name="TextBox 2"/>
+          <p:cNvSpPr txBox="1"/>
+          <p:nvPr/>
+        </p:nvSpPr>
+        <p:spPr>
+          <a:xfrm>
+            <a:off x="731520" y="2834640"/>
+            <a:ext cx="10698480" cy="1188720"/>
+          </a:xfrm>
+          <a:prstGeom prst="rect">
+            <a:avLst/>
+          </a:prstGeom>
+          <a:noFill/>
+        </p:spPr>
+        <p:txBody>
+          <a:bodyPr wrap="square">
+            <a:spAutoFit/>
+          </a:bodyPr>
+          <a:lstStyle/>
+          <a:p>
+            <a:r>
+              <a:rPr sz="1300" b="1">
+                <a:solidFill>
+                  <a:srgbClr val="2E6DA4"/>
+                </a:solidFill>
+                <a:latin typeface="Arial"/>
+              </a:rPr>
+              <a:t>REAL-WORLD</a:t>
+            </a:r>
+          </a:p>
+          <a:p>
+            <a:r>
+              <a:rPr sz="3600" b="1">
+                <a:solidFill>
+                  <a:srgbClr val="1F3B63"/>
+                </a:solidFill>
+                <a:latin typeface="Arial"/>
+              </a:rPr>
+              <a:t>Putting it together</a:t>
+            </a:r>
+          </a:p>
+        </p:txBody>
+      </p:sp>
+    </p:spTree>
+  </p:cSld>
+  <p:clrMapOvr>
+    <a:masterClrMapping/>
+  </p:clrMapOvr>
+</p:sld>
+</file>
+
+<file path=ppt/slides/slide51.xml><?xml version="1.0" encoding="utf-8"?>
+<p:sld xmlns:a="http://schemas.openxmlformats.org/drawingml/2006/main" xmlns:p="http://schemas.openxmlformats.org/presentationml/2006/main" xmlns:r="http://schemas.openxmlformats.org/officeDocument/2006/relationships">
+  <p:cSld>
+    <p:spTree>
+      <p:nvGrpSpPr>
+        <p:cNvPr id="1" name=""/>
+        <p:cNvGrpSpPr/>
+        <p:nvPr/>
+      </p:nvGrpSpPr>
+      <p:grpSpPr/>
+      <p:sp>
+        <p:nvSpPr>
+          <p:cNvPr id="2" name="TextBox 1"/>
+          <p:cNvSpPr txBox="1"/>
+          <p:nvPr/>
+        </p:nvSpPr>
+        <p:spPr>
+          <a:xfrm>
+            <a:off x="548640" y="320040"/>
+            <a:ext cx="7680960" cy="365760"/>
+          </a:xfrm>
+          <a:prstGeom prst="rect">
+            <a:avLst/>
+          </a:prstGeom>
+          <a:noFill/>
+        </p:spPr>
+        <p:txBody>
+          <a:bodyPr wrap="square">
+            <a:spAutoFit/>
+          </a:bodyPr>
+          <a:lstStyle/>
+          <a:p>
+            <a:r>
+              <a:rPr sz="1200" b="1">
+                <a:solidFill>
+                  <a:srgbClr val="2E6DA4"/>
+                </a:solidFill>
+                <a:latin typeface="Arial"/>
+              </a:rPr>
+              <a:t>IN PRACTICE</a:t>
+            </a:r>
+          </a:p>
+        </p:txBody>
+      </p:sp>
+      <p:sp>
+        <p:nvSpPr>
+          <p:cNvPr id="3" name="TextBox 2"/>
+          <p:cNvSpPr txBox="1"/>
+          <p:nvPr/>
+        </p:nvSpPr>
+        <p:spPr>
+          <a:xfrm>
+            <a:off x="548640" y="640080"/>
+            <a:ext cx="11064240" cy="822960"/>
+          </a:xfrm>
+          <a:prstGeom prst="rect">
+            <a:avLst/>
+          </a:prstGeom>
+          <a:noFill/>
+        </p:spPr>
+        <p:txBody>
+          <a:bodyPr wrap="square">
+            <a:spAutoFit/>
+          </a:bodyPr>
+          <a:lstStyle/>
+          <a:p>
+            <a:r>
+              <a:rPr sz="3000" b="1">
+                <a:solidFill>
+                  <a:srgbClr val="1F3B63"/>
+                </a:solidFill>
+                <a:latin typeface="Arial"/>
+              </a:rPr>
+              <a:t>How we use it here</a:t>
+            </a:r>
+          </a:p>
+        </p:txBody>
+      </p:sp>
+      <p:sp>
+        <p:nvSpPr>
+          <p:cNvPr id="4" name="Rectangle 3"/>
+          <p:cNvSpPr/>
+          <p:nvPr/>
+        </p:nvSpPr>
+        <p:spPr>
+          <a:xfrm>
+            <a:off x="566928" y="1417320"/>
+            <a:ext cx="2011680" cy="38100"/>
+          </a:xfrm>
+          <a:prstGeom prst="rect">
+            <a:avLst/>
+          </a:prstGeom>
+          <a:solidFill>
+            <a:srgbClr val="2E6DA4"/>
+          </a:solidFill>
+          <a:ln>
+            <a:noFill/>
+          </a:ln>
+        </p:spPr>
+        <p:style>
+          <a:lnRef idx="1">
+            <a:schemeClr val="accent1"/>
+          </a:lnRef>
+          <a:fillRef idx="3">
+            <a:schemeClr val="accent1"/>
+          </a:fillRef>
+          <a:effectRef idx="2">
+            <a:schemeClr val="accent1"/>
+          </a:effectRef>
+          <a:fontRef idx="minor">
+            <a:schemeClr val="lt1"/>
+          </a:fontRef>
+        </p:style>
+        <p:txBody>
+          <a:bodyPr rtlCol="0" anchor="ctr"/>
+          <a:lstStyle/>
+          <a:p>
+            <a:pPr algn="ctr"/>
+          </a:p>
+        </p:txBody>
+      </p:sp>
+      <p:sp>
+        <p:nvSpPr>
+          <p:cNvPr id="5" name="TextBox 4"/>
+          <p:cNvSpPr txBox="1"/>
+          <p:nvPr/>
+        </p:nvSpPr>
+        <p:spPr>
+          <a:xfrm>
+            <a:off x="640080" y="1691640"/>
+            <a:ext cx="10972800" cy="4754880"/>
+          </a:xfrm>
+          <a:prstGeom prst="rect">
+            <a:avLst/>
+          </a:prstGeom>
+          <a:noFill/>
+        </p:spPr>
+        <p:txBody>
+          <a:bodyPr wrap="square">
+            <a:spAutoFit/>
+          </a:bodyPr>
+          <a:lstStyle/>
+          <a:p>
+            <a:pPr>
+              <a:spcAft>
+                <a:spcPts val="1000"/>
+              </a:spcAft>
+            </a:pPr>
+            <a:r>
+              <a:rPr sz="2000" b="0">
+                <a:solidFill>
+                  <a:srgbClr val="21252B"/>
+                </a:solidFill>
+                <a:latin typeface="Arial"/>
+              </a:rPr>
+              <a:t>•  Define acceptance/regression tests once (incl. real benchmarks: HPL, HPCG).</a:t>
+            </a:r>
+          </a:p>
+          <a:p>
+            <a:pPr>
+              <a:spcAft>
+                <a:spcPts val="1000"/>
+              </a:spcAft>
+            </a:pPr>
+            <a:r>
+              <a:rPr sz="2000" b="0">
+                <a:solidFill>
+                  <a:srgbClr val="21252B"/>
+                </a:solidFill>
+                <a:latin typeface="Arial"/>
+              </a:rPr>
+              <a:t>•  Run through PBS across the cluster; permute across configurations.</a:t>
+            </a:r>
+          </a:p>
+          <a:p>
+            <a:pPr>
+              <a:spcAft>
+                <a:spcPts val="1000"/>
+              </a:spcAft>
+            </a:pPr>
+            <a:r>
+              <a:rPr sz="2000" b="0">
+                <a:solidFill>
+                  <a:srgbClr val="21252B"/>
+                </a:solidFill>
+                <a:latin typeface="Arial"/>
+              </a:rPr>
+              <a:t>•  Parse metrics; every result flows to CSV + OpenSearch automatically.</a:t>
+            </a:r>
+          </a:p>
+          <a:p>
+            <a:pPr>
+              <a:spcAft>
+                <a:spcPts val="1000"/>
+              </a:spcAft>
+            </a:pPr>
+            <a:r>
+              <a:rPr sz="2000" b="0">
+                <a:solidFill>
+                  <a:srgbClr val="21252B"/>
+                </a:solidFill>
+                <a:latin typeface="Arial"/>
+              </a:rPr>
+              <a:t>•  Grafana dashboards make trends and regressions visible over time.</a:t>
+            </a:r>
+          </a:p>
+        </p:txBody>
+      </p:sp>
+    </p:spTree>
+  </p:cSld>
+  <p:clrMapOvr>
+    <a:masterClrMapping/>
+  </p:clrMapOvr>
+</p:sld>
+</file>
+
+<file path=ppt/slides/slide52.xml><?xml version="1.0" encoding="utf-8"?>
+<p:sld xmlns:a="http://schemas.openxmlformats.org/drawingml/2006/main" xmlns:p="http://schemas.openxmlformats.org/presentationml/2006/main" xmlns:r="http://schemas.openxmlformats.org/officeDocument/2006/relationships">
+  <p:cSld>
+    <p:spTree>
+      <p:nvGrpSpPr>
+        <p:cNvPr id="1" name=""/>
+        <p:cNvGrpSpPr/>
+        <p:nvPr/>
+      </p:nvGrpSpPr>
+      <p:grpSpPr/>
+      <p:sp>
+        <p:nvSpPr>
+          <p:cNvPr id="2" name="TextBox 1"/>
+          <p:cNvSpPr txBox="1"/>
+          <p:nvPr/>
+        </p:nvSpPr>
+        <p:spPr>
+          <a:xfrm>
+            <a:off x="548640" y="320040"/>
+            <a:ext cx="7680960" cy="365760"/>
+          </a:xfrm>
+          <a:prstGeom prst="rect">
+            <a:avLst/>
+          </a:prstGeom>
+          <a:noFill/>
+        </p:spPr>
+        <p:txBody>
+          <a:bodyPr wrap="square">
+            <a:spAutoFit/>
+          </a:bodyPr>
+          <a:lstStyle/>
+          <a:p>
+            <a:r>
+              <a:rPr sz="1200" b="1">
+                <a:solidFill>
+                  <a:srgbClr val="2E6DA4"/>
+                </a:solidFill>
+                <a:latin typeface="Arial"/>
+              </a:rPr>
+              <a:t>WRAP-UP</a:t>
+            </a:r>
+          </a:p>
+        </p:txBody>
+      </p:sp>
+      <p:sp>
+        <p:nvSpPr>
+          <p:cNvPr id="3" name="TextBox 2"/>
+          <p:cNvSpPr txBox="1"/>
+          <p:nvPr/>
+        </p:nvSpPr>
+        <p:spPr>
+          <a:xfrm>
+            <a:off x="548640" y="640080"/>
+            <a:ext cx="11064240" cy="822960"/>
+          </a:xfrm>
+          <a:prstGeom prst="rect">
+            <a:avLst/>
+          </a:prstGeom>
+          <a:noFill/>
+        </p:spPr>
+        <p:txBody>
+          <a:bodyPr wrap="square">
+            <a:spAutoFit/>
+          </a:bodyPr>
+          <a:lstStyle/>
+          <a:p>
+            <a:r>
+              <a:rPr sz="3000" b="1">
+                <a:solidFill>
+                  <a:srgbClr val="1F3B63"/>
+                </a:solidFill>
+                <a:latin typeface="Arial"/>
+              </a:rPr>
+              <a:t>Recap</a:t>
+            </a:r>
+          </a:p>
+        </p:txBody>
+      </p:sp>
+      <p:sp>
+        <p:nvSpPr>
+          <p:cNvPr id="4" name="Rectangle 3"/>
+          <p:cNvSpPr/>
+          <p:nvPr/>
+        </p:nvSpPr>
+        <p:spPr>
+          <a:xfrm>
+            <a:off x="566928" y="1417320"/>
+            <a:ext cx="2011680" cy="38100"/>
+          </a:xfrm>
+          <a:prstGeom prst="rect">
+            <a:avLst/>
+          </a:prstGeom>
+          <a:solidFill>
+            <a:srgbClr val="2E6DA4"/>
+          </a:solidFill>
+          <a:ln>
+            <a:noFill/>
+          </a:ln>
+        </p:spPr>
+        <p:style>
+          <a:lnRef idx="1">
+            <a:schemeClr val="accent1"/>
+          </a:lnRef>
+          <a:fillRef idx="3">
+            <a:schemeClr val="accent1"/>
+          </a:fillRef>
+          <a:effectRef idx="2">
+            <a:schemeClr val="accent1"/>
+          </a:effectRef>
+          <a:fontRef idx="minor">
+            <a:schemeClr val="lt1"/>
+          </a:fontRef>
+        </p:style>
+        <p:txBody>
+          <a:bodyPr rtlCol="0" anchor="ctr"/>
+          <a:lstStyle/>
+          <a:p>
+            <a:pPr algn="ctr"/>
+          </a:p>
+        </p:txBody>
+      </p:sp>
+      <p:sp>
+        <p:nvSpPr>
+          <p:cNvPr id="5" name="TextBox 4"/>
+          <p:cNvSpPr txBox="1"/>
+          <p:nvPr/>
+        </p:nvSpPr>
+        <p:spPr>
+          <a:xfrm>
+            <a:off x="640080" y="1691640"/>
+            <a:ext cx="10972800" cy="4754880"/>
+          </a:xfrm>
+          <a:prstGeom prst="rect">
+            <a:avLst/>
+          </a:prstGeom>
+          <a:noFill/>
+        </p:spPr>
+        <p:txBody>
+          <a:bodyPr wrap="square">
+            <a:spAutoFit/>
+          </a:bodyPr>
+          <a:lstStyle/>
+          <a:p>
+            <a:pPr>
+              <a:spcAft>
+                <a:spcPts val="1000"/>
+              </a:spcAft>
+            </a:pPr>
+            <a:r>
+              <a:rPr sz="2000" b="0">
+                <a:solidFill>
+                  <a:srgbClr val="21252B"/>
+                </a:solidFill>
+                <a:latin typeface="Arial"/>
+              </a:rPr>
+              <a:t>•  YAML tests → build → run → parse → log. One model, everywhere.</a:t>
+            </a:r>
+          </a:p>
+          <a:p>
+            <a:pPr>
+              <a:spcAft>
+                <a:spcPts val="1000"/>
+              </a:spcAft>
+            </a:pPr>
+            <a:r>
+              <a:rPr sz="2000" b="0">
+                <a:solidFill>
+                  <a:srgbClr val="21252B"/>
+                </a:solidFill>
+                <a:latin typeface="Arial"/>
+              </a:rPr>
+              <a:t>•  Permutations turn one config into a whole test matrix.</a:t>
+            </a:r>
+          </a:p>
+          <a:p>
+            <a:pPr>
+              <a:spcAft>
+                <a:spcPts val="1000"/>
+              </a:spcAft>
+            </a:pPr>
+            <a:r>
+              <a:rPr sz="2000" b="0">
+                <a:solidFill>
+                  <a:srgbClr val="21252B"/>
+                </a:solidFill>
+                <a:latin typeface="Arial"/>
+              </a:rPr>
+              <a:t>•  Schedulers (incl. our PBS plugin) run it at cluster scale.</a:t>
+            </a:r>
+          </a:p>
+          <a:p>
+            <a:pPr>
+              <a:spcAft>
+                <a:spcPts val="1000"/>
+              </a:spcAft>
+            </a:pPr>
+            <a:r>
+              <a:rPr sz="2000" b="0">
+                <a:solidFill>
+                  <a:srgbClr val="21252B"/>
+                </a:solidFill>
+                <a:latin typeface="Arial"/>
+              </a:rPr>
+              <a:t>•  Plugins extend everything — our commands and result loggers included.</a:t>
+            </a:r>
+          </a:p>
+          <a:p>
+            <a:pPr>
+              <a:spcAft>
+                <a:spcPts val="1000"/>
+              </a:spcAft>
+            </a:pPr>
+            <a:r>
+              <a:rPr sz="2000" b="0">
+                <a:solidFill>
+                  <a:srgbClr val="21252B"/>
+                </a:solidFill>
+                <a:latin typeface="Arial"/>
+              </a:rPr>
+              <a:t>•  Results become dashboards. Questions?</a:t>
+            </a:r>
+          </a:p>
+          <a:p>
+            <a:pPr>
+              <a:spcAft>
+                <a:spcPts val="1000"/>
+              </a:spcAft>
+            </a:pPr>
+            <a:r>
+              <a:rPr sz="2000" b="0">
+                <a:solidFill>
+                  <a:srgbClr val="21252B"/>
+                </a:solidFill>
+                <a:latin typeface="Arial"/>
+              </a:rPr>
+              <a:t>•  Learn more →  github.com/hpc/pavilion2   ·   pavilion2.readthedocs.io</a:t>
             </a:r>
           </a:p>
         </p:txBody>

--- a/deck/pavilion-workshop.pptx
+++ b/deck/pavilion-workshop.pptx
@@ -8072,7 +8072,7 @@
                 </a:solidFill>
                 <a:latin typeface="Arial"/>
               </a:rPr>
-              <a:t>▶  00-inheritance.sh</a:t>
+              <a:t>▶  01-inheritance.sh</a:t>
             </a:r>
           </a:p>
         </p:txBody>
@@ -8721,7 +8721,7 @@
                 </a:solidFill>
                 <a:latin typeface="Arial"/>
               </a:rPr>
-              <a:t>▶  11-history.sh</a:t>
+              <a:t>▶  13-history.sh</a:t>
             </a:r>
           </a:p>
         </p:txBody>
@@ -9134,7 +9134,7 @@
                 </a:solidFill>
                 <a:latin typeface="Arial"/>
               </a:rPr>
-              <a:t>▶  01-basic.sh</a:t>
+              <a:t>▶  02-basic.sh</a:t>
             </a:r>
           </a:p>
         </p:txBody>
@@ -10084,7 +10084,7 @@
                 </a:solidFill>
                 <a:latin typeface="Arial"/>
               </a:rPr>
-              <a:t>▶  02-metrics.sh</a:t>
+              <a:t>▶  03-metrics.sh</a:t>
             </a:r>
           </a:p>
         </p:txBody>
@@ -10928,7 +10928,7 @@
                 </a:solidFill>
                 <a:latin typeface="Arial"/>
               </a:rPr>
-              <a:t>▶  02b-evaluate.sh</a:t>
+              <a:t>▶  04-evaluate.sh</a:t>
             </a:r>
           </a:p>
         </p:txBody>
@@ -11808,7 +11808,7 @@
                 </a:solidFill>
                 <a:latin typeface="Arial"/>
               </a:rPr>
-              <a:t>▶  03-permutations.sh</a:t>
+              <a:t>▶  05-permutations.sh</a:t>
             </a:r>
           </a:p>
         </p:txBody>
@@ -13178,7 +13178,7 @@
                 </a:solidFill>
                 <a:latin typeface="Arial"/>
               </a:rPr>
-              <a:t>▶  04-pbs.sh</a:t>
+              <a:t>▶  06-pbs.sh</a:t>
             </a:r>
           </a:p>
         </p:txBody>
@@ -14310,7 +14310,7 @@
                 </a:solidFill>
                 <a:latin typeface="Arial"/>
               </a:rPr>
-              <a:t>▶  05-modes.sh</a:t>
+              <a:t>▶  07-modes.sh</a:t>
             </a:r>
           </a:p>
         </p:txBody>
@@ -15094,7 +15094,7 @@
                 </a:solidFill>
                 <a:latin typeface="Arial"/>
               </a:rPr>
-              <a:t>▶  06-series.sh</a:t>
+              <a:t>▶  08-series.sh</a:t>
             </a:r>
           </a:p>
         </p:txBody>
@@ -16764,7 +16764,7 @@
                 </a:solidFill>
                 <a:latin typeface="Arial"/>
               </a:rPr>
-              <a:t>▶  07-command-plugins.sh</a:t>
+              <a:t>▶  09-command-plugins.sh</a:t>
             </a:r>
           </a:p>
         </p:txBody>
@@ -17453,7 +17453,7 @@
                 </a:solidFill>
                 <a:latin typeface="Arial"/>
               </a:rPr>
-              <a:t>▶  08-output-csv.sh</a:t>
+              <a:t>▶  10-output-csv.sh</a:t>
             </a:r>
           </a:p>
         </p:txBody>
@@ -17842,7 +17842,7 @@
                 </a:solidFill>
                 <a:latin typeface="Arial"/>
               </a:rPr>
-              <a:t>▶  12-salog.sh</a:t>
+              <a:t>▶  14-salog.sh</a:t>
             </a:r>
           </a:p>
         </p:txBody>
@@ -18207,7 +18207,7 @@
                 </a:solidFill>
                 <a:latin typeface="Arial"/>
               </a:rPr>
-              <a:t>▶  09-opensearch.sh</a:t>
+              <a:t>▶  11-opensearch.sh</a:t>
             </a:r>
           </a:p>
         </p:txBody>
@@ -18620,7 +18620,7 @@
                 </a:solidFill>
                 <a:latin typeface="Arial"/>
               </a:rPr>
-              <a:t>▶  10-mysql.sh</a:t>
+              <a:t>▶  12-mysql.sh</a:t>
             </a:r>
           </a:p>
         </p:txBody>

--- a/deck/pavilion-workshop.pptx
+++ b/deck/pavilion-workshop.pptx
@@ -2373,7 +2373,7 @@
           <a:lstStyle/>
           <a:p>
             <a:r>
-              <a:t>Result loggers run at the end of the results stage. One config, applies to all runs. (Redact the OpenSearch password if you ever show pavilion.yaml.)</a:t>
+              <a:t>Result loggers run at the end of the results stage. One config, applies to all runs.</a:t>
             </a:r>
           </a:p>
         </p:txBody>
